--- a/docs/AI_Document_Intelligence_Platform_Presentation.pptx
+++ b/docs/AI_Document_Intelligence_Platform_Presentation.pptx
@@ -16,6 +16,7 @@
     <p:sldId id="264" r:id="rId15"/>
     <p:sldId id="265" r:id="rId16"/>
     <p:sldId id="266" r:id="rId17"/>
+    <p:sldId id="267" r:id="rId18"/>
   </p:sldIdLst>
   <p:sldSz cx="12191695" cy="6858000" type="screen4x3"/>
   <p:notesSz cx="6858000" cy="9144000"/>
@@ -3113,7 +3114,7 @@
             <a:avLst/>
           </a:prstGeom>
           <a:solidFill>
-            <a:srgbClr val="0F172A"/>
+            <a:srgbClr val="F8FAFC"/>
           </a:solidFill>
           <a:ln>
             <a:noFill/>
@@ -3158,27 +3159,27 @@
           <a:noFill/>
         </p:spPr>
         <p:txBody>
-          <a:bodyPr wrap="square">
+          <a:bodyPr wrap="none">
             <a:spAutoFit/>
           </a:bodyPr>
           <a:lstStyle/>
           <a:p>
             <a:pPr>
-              <a:defRPr sz="1400" b="1">
-                <a:solidFill>
-                  <a:srgbClr val="06B6D4"/>
-                </a:solidFill>
-              </a:defRPr>
-            </a:pPr>
-            <a:r>
-              <a:t>AI-POWERED FINANCIAL INTELLIGENCE</a:t>
-            </a:r>
-          </a:p>
-          <a:p>
-            <a:pPr>
-              <a:defRPr sz="4000" b="1">
-                <a:solidFill>
-                  <a:srgbClr val="FFFFFF"/>
+              <a:defRPr sz="1300" b="1">
+                <a:solidFill>
+                  <a:srgbClr val="2563EB"/>
+                </a:solidFill>
+              </a:defRPr>
+            </a:pPr>
+            <a:r>
+              <a:t>AI ENGINEER INTERNSHIP  •  TECHNICAL CASE STUDY</a:t>
+            </a:r>
+          </a:p>
+          <a:p>
+            <a:pPr>
+              <a:defRPr sz="3800" b="1">
+                <a:solidFill>
+                  <a:srgbClr val="0F172A"/>
                 </a:solidFill>
               </a:defRPr>
             </a:pPr>
@@ -3194,12 +3195,12 @@
             <a:pPr>
               <a:defRPr sz="1600">
                 <a:solidFill>
-                  <a:srgbClr val="94A3B8"/>
-                </a:solidFill>
-              </a:defRPr>
-            </a:pPr>
-            <a:r>
-              <a:t>An End-to-End Enterprise Solution for Invoices, Balance Sheets, Profit &amp; Loss Statements, and Cash Flows</a:t>
+                  <a:srgbClr val="475569"/>
+                </a:solidFill>
+              </a:defRPr>
+            </a:pPr>
+            <a:r>
+              <a:t>AI-powered financial document extraction, validation, persistence and API platform</a:t>
             </a:r>
           </a:p>
           <a:p>
@@ -3207,12 +3208,12 @@
             <a:pPr>
               <a:defRPr sz="1300" b="1">
                 <a:solidFill>
-                  <a:srgbClr val="3B82F6"/>
-                </a:solidFill>
-              </a:defRPr>
-            </a:pPr>
-            <a:r>
-              <a:t>AI Engineer Case Study  •  FastAPI  •  Google Gemini 3.6  •  PyMuPDF  •  Docker  •  Render</a:t>
+                  <a:srgbClr val="0284C7"/>
+                </a:solidFill>
+              </a:defRPr>
+            </a:pPr>
+            <a:r>
+              <a:t>Supported Documents: Invoice  |  Balance Sheet  |  Profit &amp; Loss  |  Cash Flow Statement</a:t>
             </a:r>
           </a:p>
         </p:txBody>
@@ -3250,7 +3251,7 @@
             <a:avLst/>
           </a:prstGeom>
           <a:solidFill>
-            <a:srgbClr val="0F172A"/>
+            <a:srgbClr val="F8FAFC"/>
           </a:solidFill>
           <a:ln>
             <a:noFill/>
@@ -3286,8 +3287,8 @@
         </p:nvSpPr>
         <p:spPr>
           <a:xfrm>
-            <a:off x="731520" y="457200"/>
-            <a:ext cx="10698480" cy="365760"/>
+            <a:off x="731520" y="365760"/>
+            <a:ext cx="10698480" cy="274320"/>
           </a:xfrm>
           <a:prstGeom prst="rect">
             <a:avLst/>
@@ -3295,20 +3296,20 @@
           <a:noFill/>
         </p:spPr>
         <p:txBody>
-          <a:bodyPr wrap="square">
+          <a:bodyPr wrap="none">
             <a:spAutoFit/>
           </a:bodyPr>
           <a:lstStyle/>
           <a:p>
             <a:pPr>
-              <a:defRPr sz="1100" b="1">
-                <a:solidFill>
-                  <a:srgbClr val="06B6D4"/>
-                </a:solidFill>
-              </a:defRPr>
-            </a:pPr>
-            <a:r>
-              <a:t>AI ENGINEER INTERNSHIP CASE STUDY</a:t>
+              <a:defRPr sz="1000" b="1">
+                <a:solidFill>
+                  <a:srgbClr val="2563EB"/>
+                </a:solidFill>
+              </a:defRPr>
+            </a:pPr>
+            <a:r>
+              <a:t>LIMITATIONS &amp; FUTURE IMPROVEMENTS</a:t>
             </a:r>
           </a:p>
         </p:txBody>
@@ -3321,8 +3322,8 @@
         </p:nvSpPr>
         <p:spPr>
           <a:xfrm>
-            <a:off x="731520" y="777240"/>
-            <a:ext cx="10698480" cy="731520"/>
+            <a:off x="731520" y="640080"/>
+            <a:ext cx="10698480" cy="548640"/>
           </a:xfrm>
           <a:prstGeom prst="rect">
             <a:avLst/>
@@ -3330,44 +3331,79 @@
           <a:noFill/>
         </p:spPr>
         <p:txBody>
-          <a:bodyPr wrap="square">
+          <a:bodyPr wrap="none">
             <a:spAutoFit/>
           </a:bodyPr>
           <a:lstStyle/>
           <a:p>
             <a:pPr>
-              <a:defRPr sz="2600" b="1">
-                <a:solidFill>
-                  <a:srgbClr val="FFFFFF"/>
-                </a:solidFill>
-              </a:defRPr>
-            </a:pPr>
-            <a:r>
-              <a:t>Known Limitations &amp; Enterprise Production Roadmap</a:t>
-            </a:r>
-          </a:p>
-        </p:txBody>
-      </p:sp>
-      <p:sp>
-        <p:nvSpPr>
-          <p:cNvPr id="5" name="Rounded Rectangle 4"/>
+              <a:defRPr sz="2200" b="1">
+                <a:solidFill>
+                  <a:srgbClr val="0F172A"/>
+                </a:solidFill>
+              </a:defRPr>
+            </a:pPr>
+            <a:r>
+              <a:t>Limitations &amp; Production Improvements</a:t>
+            </a:r>
+          </a:p>
+        </p:txBody>
+      </p:sp>
+      <p:sp>
+        <p:nvSpPr>
+          <p:cNvPr id="5" name="TextBox 4"/>
+          <p:cNvSpPr txBox="1"/>
+          <p:nvPr/>
+        </p:nvSpPr>
+        <p:spPr>
+          <a:xfrm>
+            <a:off x="731520" y="6400800"/>
+            <a:ext cx="10698480" cy="274320"/>
+          </a:xfrm>
+          <a:prstGeom prst="rect">
+            <a:avLst/>
+          </a:prstGeom>
+          <a:noFill/>
+        </p:spPr>
+        <p:txBody>
+          <a:bodyPr wrap="none">
+            <a:spAutoFit/>
+          </a:bodyPr>
+          <a:lstStyle/>
+          <a:p>
+            <a:pPr>
+              <a:defRPr sz="900">
+                <a:solidFill>
+                  <a:srgbClr val="94A3B8"/>
+                </a:solidFill>
+              </a:defRPr>
+            </a:pPr>
+            <a:r>
+              <a:t>Intelligent Document Extraction, Validation &amp; API Platform  |  AI Engineer Internship Technical Case Study</a:t>
+            </a:r>
+          </a:p>
+        </p:txBody>
+      </p:sp>
+      <p:sp>
+        <p:nvSpPr>
+          <p:cNvPr id="6" name="Rounded Rectangle 5"/>
           <p:cNvSpPr/>
           <p:nvPr/>
         </p:nvSpPr>
         <p:spPr>
           <a:xfrm>
-            <a:off x="731520" y="1645920"/>
-            <a:ext cx="5120640" cy="4572000"/>
+            <a:off x="731520" y="1371600"/>
+            <a:ext cx="5212080" cy="4754880"/>
           </a:xfrm>
           <a:prstGeom prst="roundRect">
             <a:avLst/>
           </a:prstGeom>
           <a:solidFill>
-            <a:srgbClr val="1E293B"/>
+            <a:srgbClr val="FFFFFF"/>
           </a:solidFill>
           <a:ln w="12700">
             <a:solidFill>
-              <a:srgbClr val="334155"/>
+              <a:srgbClr val="E2E8F0"/>
             </a:solidFill>
           </a:ln>
         </p:spPr>
@@ -3395,14 +3431,14 @@
       </p:sp>
       <p:sp>
         <p:nvSpPr>
-          <p:cNvPr id="6" name="TextBox 5"/>
+          <p:cNvPr id="7" name="TextBox 6"/>
           <p:cNvSpPr txBox="1"/>
           <p:nvPr/>
         </p:nvSpPr>
         <p:spPr>
           <a:xfrm>
-            <a:off x="914400" y="1828800"/>
-            <a:ext cx="4754880" cy="4114800"/>
+            <a:off x="914400" y="1554480"/>
+            <a:ext cx="4846320" cy="4389120"/>
           </a:xfrm>
           <a:prstGeom prst="rect">
             <a:avLst/>
@@ -3418,88 +3454,101 @@
             <a:pPr>
               <a:defRPr sz="1500" b="1">
                 <a:solidFill>
-                  <a:srgbClr val="F59E0B"/>
-                </a:solidFill>
-              </a:defRPr>
-            </a:pPr>
-            <a:r>
-              <a:t>CURRENT SYSTEM BOUNDARIES</a:t>
-            </a:r>
-          </a:p>
-          <a:p>
-            <a:br/>
-            <a:pPr>
-              <a:defRPr sz="1150">
-                <a:solidFill>
-                  <a:srgbClr val="94A3B8"/>
-                </a:solidFill>
-              </a:defRPr>
-            </a:pPr>
-            <a:r>
-              <a:t>• Gemini API Free Tier rate limit: 15 Requests Per Minute requires sequential throttling in bulk runs.</a:t>
-            </a:r>
-          </a:p>
-          <a:p>
-            <a:br/>
-            <a:pPr>
-              <a:defRPr sz="1150">
-                <a:solidFill>
-                  <a:srgbClr val="94A3B8"/>
-                </a:solidFill>
-              </a:defRPr>
-            </a:pPr>
-            <a:r>
-              <a:t>• Scanned quality variance: Heavily distorted, crumpled or low-DPI scans can impact decimal OCR accuracy.</a:t>
-            </a:r>
-          </a:p>
-          <a:p>
-            <a:br/>
-            <a:pPr>
-              <a:defRPr sz="1150">
-                <a:solidFill>
-                  <a:srgbClr val="94A3B8"/>
-                </a:solidFill>
-              </a:defRPr>
-            </a:pPr>
-            <a:r>
-              <a:t>• Ephemeral SQLite: SQLite on free-tier containers resets on redeploy; suitable for demo/eval, not distributed scale.</a:t>
-            </a:r>
-          </a:p>
-          <a:p>
-            <a:br/>
-            <a:pPr>
-              <a:defRPr sz="1150">
-                <a:solidFill>
-                  <a:srgbClr val="94A3B8"/>
-                </a:solidFill>
-              </a:defRPr>
-            </a:pPr>
-            <a:r>
-              <a:t>• Memorandum Items: Off-balance sheet notes (e.g. contingent liabilities) need dedicated footnote routing.</a:t>
-            </a:r>
-          </a:p>
-        </p:txBody>
-      </p:sp>
-      <p:sp>
-        <p:nvSpPr>
-          <p:cNvPr id="7" name="Rounded Rectangle 6"/>
+                  <a:srgbClr val="D97706"/>
+                </a:solidFill>
+              </a:defRPr>
+            </a:pPr>
+            <a:r>
+              <a:t>Current System Boundaries</a:t>
+            </a:r>
+          </a:p>
+          <a:p>
+            <a:br/>
+            <a:pPr>
+              <a:defRPr sz="1100">
+                <a:solidFill>
+                  <a:srgbClr val="475569"/>
+                </a:solidFill>
+              </a:defRPr>
+            </a:pPr>
+            <a:r>
+              <a:t>• OCR quality directly depends on physical scan quality, resolution, and DPI.</a:t>
+            </a:r>
+          </a:p>
+          <a:p>
+            <a:br/>
+            <a:pPr>
+              <a:defRPr sz="1100">
+                <a:solidFill>
+                  <a:srgbClr val="475569"/>
+                </a:solidFill>
+              </a:defRPr>
+            </a:pPr>
+            <a:r>
+              <a:t>• Complex non-standard financial document layouts can affect extraction accuracy.</a:t>
+            </a:r>
+          </a:p>
+          <a:p>
+            <a:br/>
+            <a:pPr>
+              <a:defRPr sz="1100">
+                <a:solidFill>
+                  <a:srgbClr val="475569"/>
+                </a:solidFill>
+              </a:defRPr>
+            </a:pPr>
+            <a:r>
+              <a:t>• AI extraction behavior and token limits depend on multimodal model availability.</a:t>
+            </a:r>
+          </a:p>
+          <a:p>
+            <a:br/>
+            <a:pPr>
+              <a:defRPr sz="1100">
+                <a:solidFill>
+                  <a:srgbClr val="475569"/>
+                </a:solidFill>
+              </a:defRPr>
+            </a:pPr>
+            <a:r>
+              <a:t>• Different regional accounting conventions and document formats vary significantly.</a:t>
+            </a:r>
+          </a:p>
+          <a:p>
+            <a:br/>
+            <a:pPr>
+              <a:defRPr sz="1100">
+                <a:solidFill>
+                  <a:srgbClr val="475569"/>
+                </a:solidFill>
+              </a:defRPr>
+            </a:pPr>
+            <a:r>
+              <a:t>• Free-tier container storage is ephemeral between service redeployments.</a:t>
+            </a:r>
+          </a:p>
+        </p:txBody>
+      </p:sp>
+      <p:sp>
+        <p:nvSpPr>
+          <p:cNvPr id="8" name="Rounded Rectangle 7"/>
           <p:cNvSpPr/>
           <p:nvPr/>
         </p:nvSpPr>
         <p:spPr>
           <a:xfrm>
-            <a:off x="6309360" y="1645920"/>
-            <a:ext cx="5120640" cy="4572000"/>
+            <a:off x="6217920" y="1371600"/>
+            <a:ext cx="5212080" cy="4754880"/>
           </a:xfrm>
           <a:prstGeom prst="roundRect">
             <a:avLst/>
           </a:prstGeom>
           <a:solidFill>
-            <a:srgbClr val="1E293B"/>
+            <a:srgbClr val="FFFFFF"/>
           </a:solidFill>
           <a:ln w="12700">
             <a:solidFill>
-              <a:srgbClr val="334155"/>
+              <a:srgbClr val="E2E8F0"/>
             </a:solidFill>
           </a:ln>
         </p:spPr>
@@ -3527,14 +3576,14 @@
       </p:sp>
       <p:sp>
         <p:nvSpPr>
-          <p:cNvPr id="8" name="TextBox 7"/>
+          <p:cNvPr id="9" name="TextBox 8"/>
           <p:cNvSpPr txBox="1"/>
           <p:nvPr/>
         </p:nvSpPr>
         <p:spPr>
           <a:xfrm>
-            <a:off x="6492240" y="1828800"/>
-            <a:ext cx="4754880" cy="4114800"/>
+            <a:off x="6400800" y="1554480"/>
+            <a:ext cx="4846320" cy="4389120"/>
           </a:xfrm>
           <a:prstGeom prst="rect">
             <a:avLst/>
@@ -3550,77 +3599,103 @@
             <a:pPr>
               <a:defRPr sz="1500" b="1">
                 <a:solidFill>
-                  <a:srgbClr val="22C55E"/>
-                </a:solidFill>
-              </a:defRPr>
-            </a:pPr>
-            <a:r>
-              <a:t>ENTERPRISE ROADMAP</a:t>
-            </a:r>
-          </a:p>
-          <a:p>
-            <a:br/>
-            <a:pPr>
-              <a:defRPr sz="1150">
-                <a:solidFill>
-                  <a:srgbClr val="94A3B8"/>
-                </a:solidFill>
-              </a:defRPr>
-            </a:pPr>
-            <a:r>
-              <a:t>✓ Distributed Async Task Queue: Celery + Redis for asynchronous background processing of thousands of documents.</a:t>
-            </a:r>
-          </a:p>
-          <a:p>
-            <a:br/>
-            <a:pPr>
-              <a:defRPr sz="1150">
-                <a:solidFill>
-                  <a:srgbClr val="94A3B8"/>
-                </a:solidFill>
-              </a:defRPr>
-            </a:pPr>
-            <a:r>
-              <a:t>✓ Managed Cloud Database: PostgreSQL with JSONB indices for high-concurrency document searches and analytics.</a:t>
-            </a:r>
-          </a:p>
-          <a:p>
-            <a:br/>
-            <a:pPr>
-              <a:defRPr sz="1150">
-                <a:solidFill>
-                  <a:srgbClr val="94A3B8"/>
-                </a:solidFill>
-              </a:defRPr>
-            </a:pPr>
-            <a:r>
-              <a:t>✓ Human-in-the-Loop (HITL): Workflow routing low-confidence extractions (&lt;80%) to compliance reviewers.</a:t>
-            </a:r>
-          </a:p>
-          <a:p>
-            <a:br/>
-            <a:pPr>
-              <a:defRPr sz="1150">
-                <a:solidFill>
-                  <a:srgbClr val="94A3B8"/>
-                </a:solidFill>
-              </a:defRPr>
-            </a:pPr>
-            <a:r>
-              <a:t>✓ Multi-Model Consensus: Cross-verifying ambiguous fields across Gemini 3.6, Claude 3.5 Sonnet, and GPT-4o.</a:t>
-            </a:r>
-          </a:p>
-          <a:p>
-            <a:br/>
-            <a:pPr>
-              <a:defRPr sz="1150">
-                <a:solidFill>
-                  <a:srgbClr val="94A3B8"/>
-                </a:solidFill>
-              </a:defRPr>
-            </a:pPr>
-            <a:r>
-              <a:t>✓ Role-Based Access Control (RBAC): JWT authentication and tenant-level encryption at rest.</a:t>
+                  <a:srgbClr val="16A34A"/>
+                </a:solidFill>
+              </a:defRPr>
+            </a:pPr>
+            <a:r>
+              <a:t>Enterprise Production Roadmap</a:t>
+            </a:r>
+          </a:p>
+          <a:p>
+            <a:br/>
+            <a:pPr>
+              <a:defRPr sz="1100">
+                <a:solidFill>
+                  <a:srgbClr val="475569"/>
+                </a:solidFill>
+              </a:defRPr>
+            </a:pPr>
+            <a:r>
+              <a:t>✓ Managed PostgreSQL with JSONB query indexing for enterprise durability.</a:t>
+            </a:r>
+          </a:p>
+          <a:p>
+            <a:br/>
+            <a:pPr>
+              <a:defRPr sz="1100">
+                <a:solidFill>
+                  <a:srgbClr val="475569"/>
+                </a:solidFill>
+              </a:defRPr>
+            </a:pPr>
+            <a:r>
+              <a:t>✓ Durable cloud object storage (AWS S3 / GCP Storage) for uploaded files.</a:t>
+            </a:r>
+          </a:p>
+          <a:p>
+            <a:br/>
+            <a:pPr>
+              <a:defRPr sz="1100">
+                <a:solidFill>
+                  <a:srgbClr val="475569"/>
+                </a:solidFill>
+              </a:defRPr>
+            </a:pPr>
+            <a:r>
+              <a:t>✓ Asynchronous task queue (Celery + Redis) for large batch processing.</a:t>
+            </a:r>
+          </a:p>
+          <a:p>
+            <a:br/>
+            <a:pPr>
+              <a:defRPr sz="1100">
+                <a:solidFill>
+                  <a:srgbClr val="475569"/>
+                </a:solidFill>
+              </a:defRPr>
+            </a:pPr>
+            <a:r>
+              <a:t>✓ Authentication, authorization, and tenant-level encryption at rest.</a:t>
+            </a:r>
+          </a:p>
+          <a:p>
+            <a:br/>
+            <a:pPr>
+              <a:defRPr sz="1100">
+                <a:solidFill>
+                  <a:srgbClr val="475569"/>
+                </a:solidFill>
+              </a:defRPr>
+            </a:pPr>
+            <a:r>
+              <a:t>✓ API rate limiting, Prometheus metrics, and OpenTelemetry tracing.</a:t>
+            </a:r>
+          </a:p>
+          <a:p>
+            <a:br/>
+            <a:pPr>
+              <a:defRPr sz="1100">
+                <a:solidFill>
+                  <a:srgbClr val="475569"/>
+                </a:solidFill>
+              </a:defRPr>
+            </a:pPr>
+            <a:r>
+              <a:t>✓ Human review (HITL) workflows for low-confidence documents.</a:t>
+            </a:r>
+          </a:p>
+          <a:p>
+            <a:br/>
+            <a:pPr>
+              <a:defRPr sz="1100">
+                <a:solidFill>
+                  <a:srgbClr val="475569"/>
+                </a:solidFill>
+              </a:defRPr>
+            </a:pPr>
+            <a:r>
+              <a:t>✓ Expanded regression test datasets across international accounting layouts.</a:t>
             </a:r>
           </a:p>
         </p:txBody>
@@ -3658,7 +3733,7 @@
             <a:avLst/>
           </a:prstGeom>
           <a:solidFill>
-            <a:srgbClr val="0F172A"/>
+            <a:srgbClr val="F8FAFC"/>
           </a:solidFill>
           <a:ln>
             <a:noFill/>
@@ -3694,8 +3769,158 @@
         </p:nvSpPr>
         <p:spPr>
           <a:xfrm>
-            <a:off x="914400" y="1371600"/>
-            <a:ext cx="10332720" cy="4114800"/>
+            <a:off x="731520" y="365760"/>
+            <a:ext cx="10698480" cy="274320"/>
+          </a:xfrm>
+          <a:prstGeom prst="rect">
+            <a:avLst/>
+          </a:prstGeom>
+          <a:noFill/>
+        </p:spPr>
+        <p:txBody>
+          <a:bodyPr wrap="none">
+            <a:spAutoFit/>
+          </a:bodyPr>
+          <a:lstStyle/>
+          <a:p>
+            <a:pPr>
+              <a:defRPr sz="1000" b="1">
+                <a:solidFill>
+                  <a:srgbClr val="2563EB"/>
+                </a:solidFill>
+              </a:defRPr>
+            </a:pPr>
+            <a:r>
+              <a:t>TECHNICAL DEMONSTRATION</a:t>
+            </a:r>
+          </a:p>
+        </p:txBody>
+      </p:sp>
+      <p:sp>
+        <p:nvSpPr>
+          <p:cNvPr id="4" name="TextBox 3"/>
+          <p:cNvSpPr txBox="1"/>
+          <p:nvPr/>
+        </p:nvSpPr>
+        <p:spPr>
+          <a:xfrm>
+            <a:off x="731520" y="640080"/>
+            <a:ext cx="10698480" cy="548640"/>
+          </a:xfrm>
+          <a:prstGeom prst="rect">
+            <a:avLst/>
+          </a:prstGeom>
+          <a:noFill/>
+        </p:spPr>
+        <p:txBody>
+          <a:bodyPr wrap="none">
+            <a:spAutoFit/>
+          </a:bodyPr>
+          <a:lstStyle/>
+          <a:p>
+            <a:pPr>
+              <a:defRPr sz="2200" b="1">
+                <a:solidFill>
+                  <a:srgbClr val="0F172A"/>
+                </a:solidFill>
+              </a:defRPr>
+            </a:pPr>
+            <a:r>
+              <a:t>Demo Walkthrough</a:t>
+            </a:r>
+          </a:p>
+        </p:txBody>
+      </p:sp>
+      <p:sp>
+        <p:nvSpPr>
+          <p:cNvPr id="5" name="TextBox 4"/>
+          <p:cNvSpPr txBox="1"/>
+          <p:nvPr/>
+        </p:nvSpPr>
+        <p:spPr>
+          <a:xfrm>
+            <a:off x="731520" y="6400800"/>
+            <a:ext cx="10698480" cy="274320"/>
+          </a:xfrm>
+          <a:prstGeom prst="rect">
+            <a:avLst/>
+          </a:prstGeom>
+          <a:noFill/>
+        </p:spPr>
+        <p:txBody>
+          <a:bodyPr wrap="none">
+            <a:spAutoFit/>
+          </a:bodyPr>
+          <a:lstStyle/>
+          <a:p>
+            <a:pPr>
+              <a:defRPr sz="900">
+                <a:solidFill>
+                  <a:srgbClr val="94A3B8"/>
+                </a:solidFill>
+              </a:defRPr>
+            </a:pPr>
+            <a:r>
+              <a:t>Intelligent Document Extraction, Validation &amp; API Platform  |  AI Engineer Internship Technical Case Study</a:t>
+            </a:r>
+          </a:p>
+        </p:txBody>
+      </p:sp>
+      <p:sp>
+        <p:nvSpPr>
+          <p:cNvPr id="6" name="Rounded Rectangle 5"/>
+          <p:cNvSpPr/>
+          <p:nvPr/>
+        </p:nvSpPr>
+        <p:spPr>
+          <a:xfrm>
+            <a:off x="731520" y="1371600"/>
+            <a:ext cx="5212080" cy="731520"/>
+          </a:xfrm>
+          <a:prstGeom prst="roundRect">
+            <a:avLst/>
+          </a:prstGeom>
+          <a:solidFill>
+            <a:srgbClr val="FFFFFF"/>
+          </a:solidFill>
+          <a:ln w="12700">
+            <a:solidFill>
+              <a:srgbClr val="E2E8F0"/>
+            </a:solidFill>
+          </a:ln>
+        </p:spPr>
+        <p:style>
+          <a:lnRef idx="1">
+            <a:schemeClr val="accent1"/>
+          </a:lnRef>
+          <a:fillRef idx="3">
+            <a:schemeClr val="accent1"/>
+          </a:fillRef>
+          <a:effectRef idx="2">
+            <a:schemeClr val="accent1"/>
+          </a:effectRef>
+          <a:fontRef idx="minor">
+            <a:schemeClr val="lt1"/>
+          </a:fontRef>
+        </p:style>
+        <p:txBody>
+          <a:bodyPr rtlCol="0" anchor="ctr"/>
+          <a:lstStyle/>
+          <a:p>
+            <a:pPr algn="ctr"/>
+          </a:p>
+        </p:txBody>
+      </p:sp>
+      <p:sp>
+        <p:nvSpPr>
+          <p:cNvPr id="7" name="TextBox 6"/>
+          <p:cNvSpPr txBox="1"/>
+          <p:nvPr/>
+        </p:nvSpPr>
+        <p:spPr>
+          <a:xfrm>
+            <a:off x="914400" y="1426464"/>
+            <a:ext cx="4846320" cy="621792"/>
           </a:xfrm>
           <a:prstGeom prst="rect">
             <a:avLst/>
@@ -3709,86 +3934,1316 @@
           <a:lstStyle/>
           <a:p>
             <a:pPr>
-              <a:defRPr sz="1400" b="1">
-                <a:solidFill>
-                  <a:srgbClr val="06B6D4"/>
-                </a:solidFill>
-              </a:defRPr>
-            </a:pPr>
-            <a:r>
-              <a:t>SUBMISSION DELIVERABLES</a:t>
-            </a:r>
-          </a:p>
-          <a:p>
-            <a:pPr>
-              <a:defRPr sz="3600" b="1">
-                <a:solidFill>
-                  <a:srgbClr val="FFFFFF"/>
-                </a:solidFill>
-              </a:defRPr>
-            </a:pPr>
-            <a:r>
-              <a:t>Project Summary &amp; Verification Complete</a:t>
-            </a:r>
-          </a:p>
-          <a:p>
-            <a:pPr>
-              <a:defRPr sz="1400">
+              <a:defRPr sz="1050">
+                <a:solidFill>
+                  <a:srgbClr val="0F172A"/>
+                </a:solidFill>
+              </a:defRPr>
+            </a:pPr>
+            <a:r>
+              <a:t>1. Open Deployed Frontend: Access public live web application in any browser.</a:t>
+            </a:r>
+          </a:p>
+        </p:txBody>
+      </p:sp>
+      <p:sp>
+        <p:nvSpPr>
+          <p:cNvPr id="8" name="Rounded Rectangle 7"/>
+          <p:cNvSpPr/>
+          <p:nvPr/>
+        </p:nvSpPr>
+        <p:spPr>
+          <a:xfrm>
+            <a:off x="6126480" y="1371600"/>
+            <a:ext cx="5212080" cy="731520"/>
+          </a:xfrm>
+          <a:prstGeom prst="roundRect">
+            <a:avLst/>
+          </a:prstGeom>
+          <a:solidFill>
+            <a:srgbClr val="FFFFFF"/>
+          </a:solidFill>
+          <a:ln w="12700">
+            <a:solidFill>
+              <a:srgbClr val="E2E8F0"/>
+            </a:solidFill>
+          </a:ln>
+        </p:spPr>
+        <p:style>
+          <a:lnRef idx="1">
+            <a:schemeClr val="accent1"/>
+          </a:lnRef>
+          <a:fillRef idx="3">
+            <a:schemeClr val="accent1"/>
+          </a:fillRef>
+          <a:effectRef idx="2">
+            <a:schemeClr val="accent1"/>
+          </a:effectRef>
+          <a:fontRef idx="minor">
+            <a:schemeClr val="lt1"/>
+          </a:fontRef>
+        </p:style>
+        <p:txBody>
+          <a:bodyPr rtlCol="0" anchor="ctr"/>
+          <a:lstStyle/>
+          <a:p>
+            <a:pPr algn="ctr"/>
+          </a:p>
+        </p:txBody>
+      </p:sp>
+      <p:sp>
+        <p:nvSpPr>
+          <p:cNvPr id="9" name="TextBox 8"/>
+          <p:cNvSpPr txBox="1"/>
+          <p:nvPr/>
+        </p:nvSpPr>
+        <p:spPr>
+          <a:xfrm>
+            <a:off x="6309360" y="1426464"/>
+            <a:ext cx="4846320" cy="621792"/>
+          </a:xfrm>
+          <a:prstGeom prst="rect">
+            <a:avLst/>
+          </a:prstGeom>
+          <a:noFill/>
+        </p:spPr>
+        <p:txBody>
+          <a:bodyPr wrap="square">
+            <a:spAutoFit/>
+          </a:bodyPr>
+          <a:lstStyle/>
+          <a:p>
+            <a:pPr>
+              <a:defRPr sz="1050">
+                <a:solidFill>
+                  <a:srgbClr val="0F172A"/>
+                </a:solidFill>
+              </a:defRPr>
+            </a:pPr>
+            <a:r>
+              <a:t>2. Select Document Type: Choose Invoice, Balance Sheet, P&amp;L, or Cash Flow Statement.</a:t>
+            </a:r>
+          </a:p>
+        </p:txBody>
+      </p:sp>
+      <p:sp>
+        <p:nvSpPr>
+          <p:cNvPr id="10" name="Rounded Rectangle 9"/>
+          <p:cNvSpPr/>
+          <p:nvPr/>
+        </p:nvSpPr>
+        <p:spPr>
+          <a:xfrm>
+            <a:off x="731520" y="2176272"/>
+            <a:ext cx="5212080" cy="731520"/>
+          </a:xfrm>
+          <a:prstGeom prst="roundRect">
+            <a:avLst/>
+          </a:prstGeom>
+          <a:solidFill>
+            <a:srgbClr val="FFFFFF"/>
+          </a:solidFill>
+          <a:ln w="12700">
+            <a:solidFill>
+              <a:srgbClr val="E2E8F0"/>
+            </a:solidFill>
+          </a:ln>
+        </p:spPr>
+        <p:style>
+          <a:lnRef idx="1">
+            <a:schemeClr val="accent1"/>
+          </a:lnRef>
+          <a:fillRef idx="3">
+            <a:schemeClr val="accent1"/>
+          </a:fillRef>
+          <a:effectRef idx="2">
+            <a:schemeClr val="accent1"/>
+          </a:effectRef>
+          <a:fontRef idx="minor">
+            <a:schemeClr val="lt1"/>
+          </a:fontRef>
+        </p:style>
+        <p:txBody>
+          <a:bodyPr rtlCol="0" anchor="ctr"/>
+          <a:lstStyle/>
+          <a:p>
+            <a:pPr algn="ctr"/>
+          </a:p>
+        </p:txBody>
+      </p:sp>
+      <p:sp>
+        <p:nvSpPr>
+          <p:cNvPr id="11" name="TextBox 10"/>
+          <p:cNvSpPr txBox="1"/>
+          <p:nvPr/>
+        </p:nvSpPr>
+        <p:spPr>
+          <a:xfrm>
+            <a:off x="914400" y="2231136"/>
+            <a:ext cx="4846320" cy="621792"/>
+          </a:xfrm>
+          <a:prstGeom prst="rect">
+            <a:avLst/>
+          </a:prstGeom>
+          <a:noFill/>
+        </p:spPr>
+        <p:txBody>
+          <a:bodyPr wrap="square">
+            <a:spAutoFit/>
+          </a:bodyPr>
+          <a:lstStyle/>
+          <a:p>
+            <a:pPr>
+              <a:defRPr sz="1050">
+                <a:solidFill>
+                  <a:srgbClr val="0F172A"/>
+                </a:solidFill>
+              </a:defRPr>
+            </a:pPr>
+            <a:r>
+              <a:t>3. Upload Document: Attach sample PDF/JPG/PNG and click 'Process Document'.</a:t>
+            </a:r>
+          </a:p>
+        </p:txBody>
+      </p:sp>
+      <p:sp>
+        <p:nvSpPr>
+          <p:cNvPr id="12" name="Rounded Rectangle 11"/>
+          <p:cNvSpPr/>
+          <p:nvPr/>
+        </p:nvSpPr>
+        <p:spPr>
+          <a:xfrm>
+            <a:off x="6126480" y="2176272"/>
+            <a:ext cx="5212080" cy="731520"/>
+          </a:xfrm>
+          <a:prstGeom prst="roundRect">
+            <a:avLst/>
+          </a:prstGeom>
+          <a:solidFill>
+            <a:srgbClr val="FFFFFF"/>
+          </a:solidFill>
+          <a:ln w="12700">
+            <a:solidFill>
+              <a:srgbClr val="E2E8F0"/>
+            </a:solidFill>
+          </a:ln>
+        </p:spPr>
+        <p:style>
+          <a:lnRef idx="1">
+            <a:schemeClr val="accent1"/>
+          </a:lnRef>
+          <a:fillRef idx="3">
+            <a:schemeClr val="accent1"/>
+          </a:fillRef>
+          <a:effectRef idx="2">
+            <a:schemeClr val="accent1"/>
+          </a:effectRef>
+          <a:fontRef idx="minor">
+            <a:schemeClr val="lt1"/>
+          </a:fontRef>
+        </p:style>
+        <p:txBody>
+          <a:bodyPr rtlCol="0" anchor="ctr"/>
+          <a:lstStyle/>
+          <a:p>
+            <a:pPr algn="ctr"/>
+          </a:p>
+        </p:txBody>
+      </p:sp>
+      <p:sp>
+        <p:nvSpPr>
+          <p:cNvPr id="13" name="TextBox 12"/>
+          <p:cNvSpPr txBox="1"/>
+          <p:nvPr/>
+        </p:nvSpPr>
+        <p:spPr>
+          <a:xfrm>
+            <a:off x="6309360" y="2231136"/>
+            <a:ext cx="4846320" cy="621792"/>
+          </a:xfrm>
+          <a:prstGeom prst="rect">
+            <a:avLst/>
+          </a:prstGeom>
+          <a:noFill/>
+        </p:spPr>
+        <p:txBody>
+          <a:bodyPr wrap="square">
+            <a:spAutoFit/>
+          </a:bodyPr>
+          <a:lstStyle/>
+          <a:p>
+            <a:pPr>
+              <a:defRPr sz="1050">
+                <a:solidFill>
+                  <a:srgbClr val="0F172A"/>
+                </a:solidFill>
+              </a:defRPr>
+            </a:pPr>
+            <a:r>
+              <a:t>4. Show Extracted Fields: Inspect key-value pairs with source quotes and confidence %.</a:t>
+            </a:r>
+          </a:p>
+        </p:txBody>
+      </p:sp>
+      <p:sp>
+        <p:nvSpPr>
+          <p:cNvPr id="14" name="Rounded Rectangle 13"/>
+          <p:cNvSpPr/>
+          <p:nvPr/>
+        </p:nvSpPr>
+        <p:spPr>
+          <a:xfrm>
+            <a:off x="731520" y="2980944"/>
+            <a:ext cx="5212080" cy="731520"/>
+          </a:xfrm>
+          <a:prstGeom prst="roundRect">
+            <a:avLst/>
+          </a:prstGeom>
+          <a:solidFill>
+            <a:srgbClr val="FFFFFF"/>
+          </a:solidFill>
+          <a:ln w="12700">
+            <a:solidFill>
+              <a:srgbClr val="E2E8F0"/>
+            </a:solidFill>
+          </a:ln>
+        </p:spPr>
+        <p:style>
+          <a:lnRef idx="1">
+            <a:schemeClr val="accent1"/>
+          </a:lnRef>
+          <a:fillRef idx="3">
+            <a:schemeClr val="accent1"/>
+          </a:fillRef>
+          <a:effectRef idx="2">
+            <a:schemeClr val="accent1"/>
+          </a:effectRef>
+          <a:fontRef idx="minor">
+            <a:schemeClr val="lt1"/>
+          </a:fontRef>
+        </p:style>
+        <p:txBody>
+          <a:bodyPr rtlCol="0" anchor="ctr"/>
+          <a:lstStyle/>
+          <a:p>
+            <a:pPr algn="ctr"/>
+          </a:p>
+        </p:txBody>
+      </p:sp>
+      <p:sp>
+        <p:nvSpPr>
+          <p:cNvPr id="15" name="TextBox 14"/>
+          <p:cNvSpPr txBox="1"/>
+          <p:nvPr/>
+        </p:nvSpPr>
+        <p:spPr>
+          <a:xfrm>
+            <a:off x="914400" y="3035808"/>
+            <a:ext cx="4846320" cy="621792"/>
+          </a:xfrm>
+          <a:prstGeom prst="rect">
+            <a:avLst/>
+          </a:prstGeom>
+          <a:noFill/>
+        </p:spPr>
+        <p:txBody>
+          <a:bodyPr wrap="square">
+            <a:spAutoFit/>
+          </a:bodyPr>
+          <a:lstStyle/>
+          <a:p>
+            <a:pPr>
+              <a:defRPr sz="1050">
+                <a:solidFill>
+                  <a:srgbClr val="0F172A"/>
+                </a:solidFill>
+              </a:defRPr>
+            </a:pPr>
+            <a:r>
+              <a:t>5. Show Line Items / Tables: Inspect tabular breakdown for items and comparative periods.</a:t>
+            </a:r>
+          </a:p>
+        </p:txBody>
+      </p:sp>
+      <p:sp>
+        <p:nvSpPr>
+          <p:cNvPr id="16" name="Rounded Rectangle 15"/>
+          <p:cNvSpPr/>
+          <p:nvPr/>
+        </p:nvSpPr>
+        <p:spPr>
+          <a:xfrm>
+            <a:off x="6126480" y="2980944"/>
+            <a:ext cx="5212080" cy="731520"/>
+          </a:xfrm>
+          <a:prstGeom prst="roundRect">
+            <a:avLst/>
+          </a:prstGeom>
+          <a:solidFill>
+            <a:srgbClr val="FFFFFF"/>
+          </a:solidFill>
+          <a:ln w="12700">
+            <a:solidFill>
+              <a:srgbClr val="E2E8F0"/>
+            </a:solidFill>
+          </a:ln>
+        </p:spPr>
+        <p:style>
+          <a:lnRef idx="1">
+            <a:schemeClr val="accent1"/>
+          </a:lnRef>
+          <a:fillRef idx="3">
+            <a:schemeClr val="accent1"/>
+          </a:fillRef>
+          <a:effectRef idx="2">
+            <a:schemeClr val="accent1"/>
+          </a:effectRef>
+          <a:fontRef idx="minor">
+            <a:schemeClr val="lt1"/>
+          </a:fontRef>
+        </p:style>
+        <p:txBody>
+          <a:bodyPr rtlCol="0" anchor="ctr"/>
+          <a:lstStyle/>
+          <a:p>
+            <a:pPr algn="ctr"/>
+          </a:p>
+        </p:txBody>
+      </p:sp>
+      <p:sp>
+        <p:nvSpPr>
+          <p:cNvPr id="17" name="TextBox 16"/>
+          <p:cNvSpPr txBox="1"/>
+          <p:nvPr/>
+        </p:nvSpPr>
+        <p:spPr>
+          <a:xfrm>
+            <a:off x="6309360" y="3035808"/>
+            <a:ext cx="4846320" cy="621792"/>
+          </a:xfrm>
+          <a:prstGeom prst="rect">
+            <a:avLst/>
+          </a:prstGeom>
+          <a:noFill/>
+        </p:spPr>
+        <p:txBody>
+          <a:bodyPr wrap="square">
+            <a:spAutoFit/>
+          </a:bodyPr>
+          <a:lstStyle/>
+          <a:p>
+            <a:pPr>
+              <a:defRPr sz="1050">
+                <a:solidFill>
+                  <a:srgbClr val="0F172A"/>
+                </a:solidFill>
+              </a:defRPr>
+            </a:pPr>
+            <a:r>
+              <a:t>6. Show Financial Validation: Examine calculated vs reported values, formulas &amp; variances.</a:t>
+            </a:r>
+          </a:p>
+        </p:txBody>
+      </p:sp>
+      <p:sp>
+        <p:nvSpPr>
+          <p:cNvPr id="18" name="Rounded Rectangle 17"/>
+          <p:cNvSpPr/>
+          <p:nvPr/>
+        </p:nvSpPr>
+        <p:spPr>
+          <a:xfrm>
+            <a:off x="731520" y="3785616"/>
+            <a:ext cx="5212080" cy="731520"/>
+          </a:xfrm>
+          <a:prstGeom prst="roundRect">
+            <a:avLst/>
+          </a:prstGeom>
+          <a:solidFill>
+            <a:srgbClr val="FFFFFF"/>
+          </a:solidFill>
+          <a:ln w="12700">
+            <a:solidFill>
+              <a:srgbClr val="E2E8F0"/>
+            </a:solidFill>
+          </a:ln>
+        </p:spPr>
+        <p:style>
+          <a:lnRef idx="1">
+            <a:schemeClr val="accent1"/>
+          </a:lnRef>
+          <a:fillRef idx="3">
+            <a:schemeClr val="accent1"/>
+          </a:fillRef>
+          <a:effectRef idx="2">
+            <a:schemeClr val="accent1"/>
+          </a:effectRef>
+          <a:fontRef idx="minor">
+            <a:schemeClr val="lt1"/>
+          </a:fontRef>
+        </p:style>
+        <p:txBody>
+          <a:bodyPr rtlCol="0" anchor="ctr"/>
+          <a:lstStyle/>
+          <a:p>
+            <a:pPr algn="ctr"/>
+          </a:p>
+        </p:txBody>
+      </p:sp>
+      <p:sp>
+        <p:nvSpPr>
+          <p:cNvPr id="19" name="TextBox 18"/>
+          <p:cNvSpPr txBox="1"/>
+          <p:nvPr/>
+        </p:nvSpPr>
+        <p:spPr>
+          <a:xfrm>
+            <a:off x="914400" y="3840480"/>
+            <a:ext cx="4846320" cy="621792"/>
+          </a:xfrm>
+          <a:prstGeom prst="rect">
+            <a:avLst/>
+          </a:prstGeom>
+          <a:noFill/>
+        </p:spPr>
+        <p:txBody>
+          <a:bodyPr wrap="square">
+            <a:spAutoFit/>
+          </a:bodyPr>
+          <a:lstStyle/>
+          <a:p>
+            <a:pPr>
+              <a:defRPr sz="1050">
+                <a:solidFill>
+                  <a:srgbClr val="0F172A"/>
+                </a:solidFill>
+              </a:defRPr>
+            </a:pPr>
+            <a:r>
+              <a:t>7. Show Validation Status: Inspect PASS, FAIL, or NOT_APPLICABLE badges.</a:t>
+            </a:r>
+          </a:p>
+        </p:txBody>
+      </p:sp>
+      <p:sp>
+        <p:nvSpPr>
+          <p:cNvPr id="20" name="Rounded Rectangle 19"/>
+          <p:cNvSpPr/>
+          <p:nvPr/>
+        </p:nvSpPr>
+        <p:spPr>
+          <a:xfrm>
+            <a:off x="6126480" y="3785616"/>
+            <a:ext cx="5212080" cy="731520"/>
+          </a:xfrm>
+          <a:prstGeom prst="roundRect">
+            <a:avLst/>
+          </a:prstGeom>
+          <a:solidFill>
+            <a:srgbClr val="FFFFFF"/>
+          </a:solidFill>
+          <a:ln w="12700">
+            <a:solidFill>
+              <a:srgbClr val="E2E8F0"/>
+            </a:solidFill>
+          </a:ln>
+        </p:spPr>
+        <p:style>
+          <a:lnRef idx="1">
+            <a:schemeClr val="accent1"/>
+          </a:lnRef>
+          <a:fillRef idx="3">
+            <a:schemeClr val="accent1"/>
+          </a:fillRef>
+          <a:effectRef idx="2">
+            <a:schemeClr val="accent1"/>
+          </a:effectRef>
+          <a:fontRef idx="minor">
+            <a:schemeClr val="lt1"/>
+          </a:fontRef>
+        </p:style>
+        <p:txBody>
+          <a:bodyPr rtlCol="0" anchor="ctr"/>
+          <a:lstStyle/>
+          <a:p>
+            <a:pPr algn="ctr"/>
+          </a:p>
+        </p:txBody>
+      </p:sp>
+      <p:sp>
+        <p:nvSpPr>
+          <p:cNvPr id="21" name="TextBox 20"/>
+          <p:cNvSpPr txBox="1"/>
+          <p:nvPr/>
+        </p:nvSpPr>
+        <p:spPr>
+          <a:xfrm>
+            <a:off x="6309360" y="3840480"/>
+            <a:ext cx="4846320" cy="621792"/>
+          </a:xfrm>
+          <a:prstGeom prst="rect">
+            <a:avLst/>
+          </a:prstGeom>
+          <a:noFill/>
+        </p:spPr>
+        <p:txBody>
+          <a:bodyPr wrap="square">
+            <a:spAutoFit/>
+          </a:bodyPr>
+          <a:lstStyle/>
+          <a:p>
+            <a:pPr>
+              <a:defRPr sz="1050">
+                <a:solidFill>
+                  <a:srgbClr val="0F172A"/>
+                </a:solidFill>
+              </a:defRPr>
+            </a:pPr>
+            <a:r>
+              <a:t>8. Open Dashboard: Navigate registry of all processed documents.</a:t>
+            </a:r>
+          </a:p>
+        </p:txBody>
+      </p:sp>
+      <p:sp>
+        <p:nvSpPr>
+          <p:cNvPr id="22" name="Rounded Rectangle 21"/>
+          <p:cNvSpPr/>
+          <p:nvPr/>
+        </p:nvSpPr>
+        <p:spPr>
+          <a:xfrm>
+            <a:off x="731520" y="4590288"/>
+            <a:ext cx="5212080" cy="731520"/>
+          </a:xfrm>
+          <a:prstGeom prst="roundRect">
+            <a:avLst/>
+          </a:prstGeom>
+          <a:solidFill>
+            <a:srgbClr val="FFFFFF"/>
+          </a:solidFill>
+          <a:ln w="12700">
+            <a:solidFill>
+              <a:srgbClr val="E2E8F0"/>
+            </a:solidFill>
+          </a:ln>
+        </p:spPr>
+        <p:style>
+          <a:lnRef idx="1">
+            <a:schemeClr val="accent1"/>
+          </a:lnRef>
+          <a:fillRef idx="3">
+            <a:schemeClr val="accent1"/>
+          </a:fillRef>
+          <a:effectRef idx="2">
+            <a:schemeClr val="accent1"/>
+          </a:effectRef>
+          <a:fontRef idx="minor">
+            <a:schemeClr val="lt1"/>
+          </a:fontRef>
+        </p:style>
+        <p:txBody>
+          <a:bodyPr rtlCol="0" anchor="ctr"/>
+          <a:lstStyle/>
+          <a:p>
+            <a:pPr algn="ctr"/>
+          </a:p>
+        </p:txBody>
+      </p:sp>
+      <p:sp>
+        <p:nvSpPr>
+          <p:cNvPr id="23" name="TextBox 22"/>
+          <p:cNvSpPr txBox="1"/>
+          <p:nvPr/>
+        </p:nvSpPr>
+        <p:spPr>
+          <a:xfrm>
+            <a:off x="914400" y="4645152"/>
+            <a:ext cx="4846320" cy="621792"/>
+          </a:xfrm>
+          <a:prstGeom prst="rect">
+            <a:avLst/>
+          </a:prstGeom>
+          <a:noFill/>
+        </p:spPr>
+        <p:txBody>
+          <a:bodyPr wrap="square">
+            <a:spAutoFit/>
+          </a:bodyPr>
+          <a:lstStyle/>
+          <a:p>
+            <a:pPr>
+              <a:defRPr sz="1050">
+                <a:solidFill>
+                  <a:srgbClr val="0F172A"/>
+                </a:solidFill>
+              </a:defRPr>
+            </a:pPr>
+            <a:r>
+              <a:t>9. Open Raw JSON: Toggle developer raw JSON contract view.</a:t>
+            </a:r>
+          </a:p>
+        </p:txBody>
+      </p:sp>
+      <p:sp>
+        <p:nvSpPr>
+          <p:cNvPr id="24" name="Rounded Rectangle 23"/>
+          <p:cNvSpPr/>
+          <p:nvPr/>
+        </p:nvSpPr>
+        <p:spPr>
+          <a:xfrm>
+            <a:off x="6126480" y="4590288"/>
+            <a:ext cx="5212080" cy="731520"/>
+          </a:xfrm>
+          <a:prstGeom prst="roundRect">
+            <a:avLst/>
+          </a:prstGeom>
+          <a:solidFill>
+            <a:srgbClr val="FFFFFF"/>
+          </a:solidFill>
+          <a:ln w="12700">
+            <a:solidFill>
+              <a:srgbClr val="E2E8F0"/>
+            </a:solidFill>
+          </a:ln>
+        </p:spPr>
+        <p:style>
+          <a:lnRef idx="1">
+            <a:schemeClr val="accent1"/>
+          </a:lnRef>
+          <a:fillRef idx="3">
+            <a:schemeClr val="accent1"/>
+          </a:fillRef>
+          <a:effectRef idx="2">
+            <a:schemeClr val="accent1"/>
+          </a:effectRef>
+          <a:fontRef idx="minor">
+            <a:schemeClr val="lt1"/>
+          </a:fontRef>
+        </p:style>
+        <p:txBody>
+          <a:bodyPr rtlCol="0" anchor="ctr"/>
+          <a:lstStyle/>
+          <a:p>
+            <a:pPr algn="ctr"/>
+          </a:p>
+        </p:txBody>
+      </p:sp>
+      <p:sp>
+        <p:nvSpPr>
+          <p:cNvPr id="25" name="TextBox 24"/>
+          <p:cNvSpPr txBox="1"/>
+          <p:nvPr/>
+        </p:nvSpPr>
+        <p:spPr>
+          <a:xfrm>
+            <a:off x="6309360" y="4645152"/>
+            <a:ext cx="4846320" cy="621792"/>
+          </a:xfrm>
+          <a:prstGeom prst="rect">
+            <a:avLst/>
+          </a:prstGeom>
+          <a:noFill/>
+        </p:spPr>
+        <p:txBody>
+          <a:bodyPr wrap="square">
+            <a:spAutoFit/>
+          </a:bodyPr>
+          <a:lstStyle/>
+          <a:p>
+            <a:pPr>
+              <a:defRPr sz="1050">
+                <a:solidFill>
+                  <a:srgbClr val="0F172A"/>
+                </a:solidFill>
+              </a:defRPr>
+            </a:pPr>
+            <a:r>
+              <a:t>10. Open Swagger UI: Navigate to /docs to test interactive endpoints.</a:t>
+            </a:r>
+          </a:p>
+        </p:txBody>
+      </p:sp>
+      <p:sp>
+        <p:nvSpPr>
+          <p:cNvPr id="26" name="Rounded Rectangle 25"/>
+          <p:cNvSpPr/>
+          <p:nvPr/>
+        </p:nvSpPr>
+        <p:spPr>
+          <a:xfrm>
+            <a:off x="731520" y="5394960"/>
+            <a:ext cx="5212080" cy="731520"/>
+          </a:xfrm>
+          <a:prstGeom prst="roundRect">
+            <a:avLst/>
+          </a:prstGeom>
+          <a:solidFill>
+            <a:srgbClr val="FFFFFF"/>
+          </a:solidFill>
+          <a:ln w="12700">
+            <a:solidFill>
+              <a:srgbClr val="E2E8F0"/>
+            </a:solidFill>
+          </a:ln>
+        </p:spPr>
+        <p:style>
+          <a:lnRef idx="1">
+            <a:schemeClr val="accent1"/>
+          </a:lnRef>
+          <a:fillRef idx="3">
+            <a:schemeClr val="accent1"/>
+          </a:fillRef>
+          <a:effectRef idx="2">
+            <a:schemeClr val="accent1"/>
+          </a:effectRef>
+          <a:fontRef idx="minor">
+            <a:schemeClr val="lt1"/>
+          </a:fontRef>
+        </p:style>
+        <p:txBody>
+          <a:bodyPr rtlCol="0" anchor="ctr"/>
+          <a:lstStyle/>
+          <a:p>
+            <a:pPr algn="ctr"/>
+          </a:p>
+        </p:txBody>
+      </p:sp>
+      <p:sp>
+        <p:nvSpPr>
+          <p:cNvPr id="27" name="TextBox 26"/>
+          <p:cNvSpPr txBox="1"/>
+          <p:nvPr/>
+        </p:nvSpPr>
+        <p:spPr>
+          <a:xfrm>
+            <a:off x="914400" y="5449824"/>
+            <a:ext cx="4846320" cy="621792"/>
+          </a:xfrm>
+          <a:prstGeom prst="rect">
+            <a:avLst/>
+          </a:prstGeom>
+          <a:noFill/>
+        </p:spPr>
+        <p:txBody>
+          <a:bodyPr wrap="square">
+            <a:spAutoFit/>
+          </a:bodyPr>
+          <a:lstStyle/>
+          <a:p>
+            <a:pPr>
+              <a:defRPr sz="1050">
+                <a:solidFill>
+                  <a:srgbClr val="0F172A"/>
+                </a:solidFill>
+              </a:defRPr>
+            </a:pPr>
+            <a:r>
+              <a:t>11. Call GET API: Retrieve document JSON programmatically via REST API.</a:t>
+            </a:r>
+          </a:p>
+        </p:txBody>
+      </p:sp>
+      <p:sp>
+        <p:nvSpPr>
+          <p:cNvPr id="28" name="Rounded Rectangle 27"/>
+          <p:cNvSpPr/>
+          <p:nvPr/>
+        </p:nvSpPr>
+        <p:spPr>
+          <a:xfrm>
+            <a:off x="6126480" y="5394960"/>
+            <a:ext cx="5212080" cy="731520"/>
+          </a:xfrm>
+          <a:prstGeom prst="roundRect">
+            <a:avLst/>
+          </a:prstGeom>
+          <a:solidFill>
+            <a:srgbClr val="FFFFFF"/>
+          </a:solidFill>
+          <a:ln w="12700">
+            <a:solidFill>
+              <a:srgbClr val="E2E8F0"/>
+            </a:solidFill>
+          </a:ln>
+        </p:spPr>
+        <p:style>
+          <a:lnRef idx="1">
+            <a:schemeClr val="accent1"/>
+          </a:lnRef>
+          <a:fillRef idx="3">
+            <a:schemeClr val="accent1"/>
+          </a:fillRef>
+          <a:effectRef idx="2">
+            <a:schemeClr val="accent1"/>
+          </a:effectRef>
+          <a:fontRef idx="minor">
+            <a:schemeClr val="lt1"/>
+          </a:fontRef>
+        </p:style>
+        <p:txBody>
+          <a:bodyPr rtlCol="0" anchor="ctr"/>
+          <a:lstStyle/>
+          <a:p>
+            <a:pPr algn="ctr"/>
+          </a:p>
+        </p:txBody>
+      </p:sp>
+      <p:sp>
+        <p:nvSpPr>
+          <p:cNvPr id="29" name="TextBox 28"/>
+          <p:cNvSpPr txBox="1"/>
+          <p:nvPr/>
+        </p:nvSpPr>
+        <p:spPr>
+          <a:xfrm>
+            <a:off x="6309360" y="5449824"/>
+            <a:ext cx="4846320" cy="621792"/>
+          </a:xfrm>
+          <a:prstGeom prst="rect">
+            <a:avLst/>
+          </a:prstGeom>
+          <a:noFill/>
+        </p:spPr>
+        <p:txBody>
+          <a:bodyPr wrap="square">
+            <a:spAutoFit/>
+          </a:bodyPr>
+          <a:lstStyle/>
+          <a:p>
+            <a:pPr>
+              <a:defRPr sz="1050">
+                <a:solidFill>
+                  <a:srgbClr val="0F172A"/>
+                </a:solidFill>
+              </a:defRPr>
+            </a:pPr>
+            <a:r>
+              <a:t>12. Show Health Endpoint: Call /api/v1/health to demonstrate system probe.</a:t>
+            </a:r>
+          </a:p>
+        </p:txBody>
+      </p:sp>
+    </p:spTree>
+  </p:cSld>
+  <p:clrMapOvr>
+    <a:masterClrMapping/>
+  </p:clrMapOvr>
+</p:sld>
+</file>
+
+<file path=ppt/slides/slide12.xml><?xml version="1.0" encoding="utf-8"?>
+<p:sld xmlns:a="http://schemas.openxmlformats.org/drawingml/2006/main" xmlns:p="http://schemas.openxmlformats.org/presentationml/2006/main" xmlns:r="http://schemas.openxmlformats.org/officeDocument/2006/relationships">
+  <p:cSld>
+    <p:spTree>
+      <p:nvGrpSpPr>
+        <p:cNvPr id="1" name=""/>
+        <p:cNvGrpSpPr/>
+        <p:nvPr/>
+      </p:nvGrpSpPr>
+      <p:grpSpPr/>
+      <p:sp>
+        <p:nvSpPr>
+          <p:cNvPr id="2" name="Rectangle 1"/>
+          <p:cNvSpPr/>
+          <p:nvPr/>
+        </p:nvSpPr>
+        <p:spPr>
+          <a:xfrm>
+            <a:off x="0" y="0"/>
+            <a:ext cx="12191695" cy="6858000"/>
+          </a:xfrm>
+          <a:prstGeom prst="rect">
+            <a:avLst/>
+          </a:prstGeom>
+          <a:solidFill>
+            <a:srgbClr val="F8FAFC"/>
+          </a:solidFill>
+          <a:ln>
+            <a:noFill/>
+          </a:ln>
+        </p:spPr>
+        <p:style>
+          <a:lnRef idx="1">
+            <a:schemeClr val="accent1"/>
+          </a:lnRef>
+          <a:fillRef idx="3">
+            <a:schemeClr val="accent1"/>
+          </a:fillRef>
+          <a:effectRef idx="2">
+            <a:schemeClr val="accent1"/>
+          </a:effectRef>
+          <a:fontRef idx="minor">
+            <a:schemeClr val="lt1"/>
+          </a:fontRef>
+        </p:style>
+        <p:txBody>
+          <a:bodyPr rtlCol="0" anchor="ctr"/>
+          <a:lstStyle/>
+          <a:p>
+            <a:pPr algn="ctr"/>
+          </a:p>
+        </p:txBody>
+      </p:sp>
+      <p:sp>
+        <p:nvSpPr>
+          <p:cNvPr id="3" name="TextBox 2"/>
+          <p:cNvSpPr txBox="1"/>
+          <p:nvPr/>
+        </p:nvSpPr>
+        <p:spPr>
+          <a:xfrm>
+            <a:off x="731520" y="365760"/>
+            <a:ext cx="10698480" cy="274320"/>
+          </a:xfrm>
+          <a:prstGeom prst="rect">
+            <a:avLst/>
+          </a:prstGeom>
+          <a:noFill/>
+        </p:spPr>
+        <p:txBody>
+          <a:bodyPr wrap="none">
+            <a:spAutoFit/>
+          </a:bodyPr>
+          <a:lstStyle/>
+          <a:p>
+            <a:pPr>
+              <a:defRPr sz="1000" b="1">
+                <a:solidFill>
+                  <a:srgbClr val="2563EB"/>
+                </a:solidFill>
+              </a:defRPr>
+            </a:pPr>
+            <a:r>
+              <a:t>SUBMISSION CHECKLIST</a:t>
+            </a:r>
+          </a:p>
+        </p:txBody>
+      </p:sp>
+      <p:sp>
+        <p:nvSpPr>
+          <p:cNvPr id="4" name="TextBox 3"/>
+          <p:cNvSpPr txBox="1"/>
+          <p:nvPr/>
+        </p:nvSpPr>
+        <p:spPr>
+          <a:xfrm>
+            <a:off x="731520" y="640080"/>
+            <a:ext cx="10698480" cy="548640"/>
+          </a:xfrm>
+          <a:prstGeom prst="rect">
+            <a:avLst/>
+          </a:prstGeom>
+          <a:noFill/>
+        </p:spPr>
+        <p:txBody>
+          <a:bodyPr wrap="none">
+            <a:spAutoFit/>
+          </a:bodyPr>
+          <a:lstStyle/>
+          <a:p>
+            <a:pPr>
+              <a:defRPr sz="2200" b="1">
+                <a:solidFill>
+                  <a:srgbClr val="0F172A"/>
+                </a:solidFill>
+              </a:defRPr>
+            </a:pPr>
+            <a:r>
+              <a:t>Submission Deliverables</a:t>
+            </a:r>
+          </a:p>
+        </p:txBody>
+      </p:sp>
+      <p:sp>
+        <p:nvSpPr>
+          <p:cNvPr id="5" name="TextBox 4"/>
+          <p:cNvSpPr txBox="1"/>
+          <p:nvPr/>
+        </p:nvSpPr>
+        <p:spPr>
+          <a:xfrm>
+            <a:off x="731520" y="6400800"/>
+            <a:ext cx="10698480" cy="274320"/>
+          </a:xfrm>
+          <a:prstGeom prst="rect">
+            <a:avLst/>
+          </a:prstGeom>
+          <a:noFill/>
+        </p:spPr>
+        <p:txBody>
+          <a:bodyPr wrap="none">
+            <a:spAutoFit/>
+          </a:bodyPr>
+          <a:lstStyle/>
+          <a:p>
+            <a:pPr>
+              <a:defRPr sz="900">
                 <a:solidFill>
                   <a:srgbClr val="94A3B8"/>
                 </a:solidFill>
               </a:defRPr>
             </a:pPr>
             <a:r>
-              <a:t>• Public GitHub Repository: https://github.com/Pownkumar-g/Document-intelligence-platform</a:t>
-            </a:r>
-          </a:p>
-          <a:p>
-            <a:pPr>
-              <a:defRPr sz="1400">
-                <a:solidFill>
-                  <a:srgbClr val="94A3B8"/>
-                </a:solidFill>
-              </a:defRPr>
-            </a:pPr>
-            <a:r>
-              <a:t>• Live Deployed Service: Hosted on Render (Docker containerized)</a:t>
-            </a:r>
-          </a:p>
-          <a:p>
-            <a:pPr>
-              <a:defRPr sz="1400">
-                <a:solidFill>
-                  <a:srgbClr val="94A3B8"/>
-                </a:solidFill>
-              </a:defRPr>
-            </a:pPr>
-            <a:r>
-              <a:t>• Interactive API Documentation: Auto-generated OpenAPI / Swagger docs at /docs</a:t>
-            </a:r>
-          </a:p>
-          <a:p>
-            <a:pPr>
-              <a:defRPr sz="1400">
-                <a:solidFill>
-                  <a:srgbClr val="94A3B8"/>
-                </a:solidFill>
-              </a:defRPr>
-            </a:pPr>
-            <a:r>
-              <a:t>• Automated Test Coverage: 37/37 passing test suite across API, OCR, extraction &amp; validation</a:t>
-            </a:r>
-          </a:p>
-          <a:p>
-            <a:pPr>
-              <a:defRPr sz="1400">
-                <a:solidFill>
-                  <a:srgbClr val="94A3B8"/>
-                </a:solidFill>
-              </a:defRPr>
-            </a:pPr>
-            <a:r>
-              <a:t>• Engineering Discipline: Clean architectural layering, robust error handling, full auditability</a:t>
+              <a:t>Intelligent Document Extraction, Validation &amp; API Platform  |  AI Engineer Internship Technical Case Study</a:t>
+            </a:r>
+          </a:p>
+        </p:txBody>
+      </p:sp>
+      <p:sp>
+        <p:nvSpPr>
+          <p:cNvPr id="6" name="Rounded Rectangle 5"/>
+          <p:cNvSpPr/>
+          <p:nvPr/>
+        </p:nvSpPr>
+        <p:spPr>
+          <a:xfrm>
+            <a:off x="731520" y="1371600"/>
+            <a:ext cx="10698480" cy="4114800"/>
+          </a:xfrm>
+          <a:prstGeom prst="roundRect">
+            <a:avLst/>
+          </a:prstGeom>
+          <a:solidFill>
+            <a:srgbClr val="FFFFFF"/>
+          </a:solidFill>
+          <a:ln w="12700">
+            <a:solidFill>
+              <a:srgbClr val="E2E8F0"/>
+            </a:solidFill>
+          </a:ln>
+        </p:spPr>
+        <p:style>
+          <a:lnRef idx="1">
+            <a:schemeClr val="accent1"/>
+          </a:lnRef>
+          <a:fillRef idx="3">
+            <a:schemeClr val="accent1"/>
+          </a:fillRef>
+          <a:effectRef idx="2">
+            <a:schemeClr val="accent1"/>
+          </a:effectRef>
+          <a:fontRef idx="minor">
+            <a:schemeClr val="lt1"/>
+          </a:fontRef>
+        </p:style>
+        <p:txBody>
+          <a:bodyPr rtlCol="0" anchor="ctr"/>
+          <a:lstStyle/>
+          <a:p>
+            <a:pPr algn="ctr"/>
+          </a:p>
+        </p:txBody>
+      </p:sp>
+      <p:sp>
+        <p:nvSpPr>
+          <p:cNvPr id="7" name="TextBox 6"/>
+          <p:cNvSpPr txBox="1"/>
+          <p:nvPr/>
+        </p:nvSpPr>
+        <p:spPr>
+          <a:xfrm>
+            <a:off x="914400" y="1554480"/>
+            <a:ext cx="10332720" cy="3749039"/>
+          </a:xfrm>
+          <a:prstGeom prst="rect">
+            <a:avLst/>
+          </a:prstGeom>
+          <a:noFill/>
+        </p:spPr>
+        <p:txBody>
+          <a:bodyPr wrap="square">
+            <a:spAutoFit/>
+          </a:bodyPr>
+          <a:lstStyle/>
+          <a:p>
+            <a:pPr>
+              <a:defRPr sz="1600" b="1">
+                <a:solidFill>
+                  <a:srgbClr val="2563EB"/>
+                </a:solidFill>
+              </a:defRPr>
+            </a:pPr>
+            <a:r>
+              <a:t>Comprehensive Case Study Deliverables Checklist</a:t>
+            </a:r>
+          </a:p>
+          <a:p>
+            <a:pPr>
+              <a:defRPr sz="1100">
+                <a:solidFill>
+                  <a:srgbClr val="475569"/>
+                </a:solidFill>
+              </a:defRPr>
+            </a:pPr>
+            <a:r>
+              <a:t>✓ Public GitHub repository                    ✓ Database / persistent storage</a:t>
+            </a:r>
+          </a:p>
+          <a:p>
+            <a:pPr>
+              <a:defRPr sz="1100">
+                <a:solidFill>
+                  <a:srgbClr val="475569"/>
+                </a:solidFill>
+              </a:defRPr>
+            </a:pPr>
+            <a:r>
+              <a:t>✓ Live deployed frontend                      ✓ 37 automated tests passing</a:t>
+            </a:r>
+          </a:p>
+          <a:p>
+            <a:pPr>
+              <a:defRPr sz="1100">
+                <a:solidFill>
+                  <a:srgbClr val="475569"/>
+                </a:solidFill>
+              </a:defRPr>
+            </a:pPr>
+            <a:r>
+              <a:t>✓ Live backend REST API                       ✓ All four supported document types tested</a:t>
+            </a:r>
+          </a:p>
+          <a:p>
+            <a:pPr>
+              <a:defRPr sz="1100">
+                <a:solidFill>
+                  <a:srgbClr val="475569"/>
+                </a:solidFill>
+              </a:defRPr>
+            </a:pPr>
+            <a:r>
+              <a:t>✓ Swagger / OpenAPI URL (/docs)               ✓ Scanned &amp; image-based documents tested</a:t>
+            </a:r>
+          </a:p>
+          <a:p>
+            <a:pPr>
+              <a:defRPr sz="1100">
+                <a:solidFill>
+                  <a:srgbClr val="475569"/>
+                </a:solidFill>
+              </a:defRPr>
+            </a:pPr>
+            <a:r>
+              <a:t>✓ Health endpoint (/api/v1/health)            ✓ Real validation failure discrepancy tested</a:t>
+            </a:r>
+          </a:p>
+          <a:p>
+            <a:pPr>
+              <a:defRPr sz="1100">
+                <a:solidFill>
+                  <a:srgbClr val="475569"/>
+                </a:solidFill>
+              </a:defRPr>
+            </a:pPr>
+            <a:r>
+              <a:t>✓ Comprehensive README documentation          ✓ Invalid / unsupported file handling tested</a:t>
+            </a:r>
+          </a:p>
+          <a:p>
+            <a:pPr>
+              <a:defRPr sz="1100">
+                <a:solidFill>
+                  <a:srgbClr val="475569"/>
+                </a:solidFill>
+              </a:defRPr>
+            </a:pPr>
+            <a:r>
+              <a:t>✓ Architecture diagrams &amp; design rationale    ✓ AI &amp; developer tool usage declared</a:t>
+            </a:r>
+          </a:p>
+          <a:p>
+            <a:pPr>
+              <a:defRPr sz="1100">
+                <a:solidFill>
+                  <a:srgbClr val="475569"/>
+                </a:solidFill>
+              </a:defRPr>
+            </a:pPr>
+            <a:r>
+              <a:t>✓ Technical presentation PDF &amp; PPTX           ✓ Known limitations &amp; production roadmap</a:t>
+            </a:r>
+          </a:p>
+        </p:txBody>
+      </p:sp>
+      <p:sp>
+        <p:nvSpPr>
+          <p:cNvPr id="8" name="Rounded Rectangle 7"/>
+          <p:cNvSpPr/>
+          <p:nvPr/>
+        </p:nvSpPr>
+        <p:spPr>
+          <a:xfrm>
+            <a:off x="731520" y="5669280"/>
+            <a:ext cx="10698480" cy="640080"/>
+          </a:xfrm>
+          <a:prstGeom prst="roundRect">
+            <a:avLst/>
+          </a:prstGeom>
+          <a:solidFill>
+            <a:srgbClr val="EFF6FF"/>
+          </a:solidFill>
+          <a:ln w="12700">
+            <a:solidFill>
+              <a:srgbClr val="2563EB"/>
+            </a:solidFill>
+          </a:ln>
+        </p:spPr>
+        <p:style>
+          <a:lnRef idx="1">
+            <a:schemeClr val="accent1"/>
+          </a:lnRef>
+          <a:fillRef idx="3">
+            <a:schemeClr val="accent1"/>
+          </a:fillRef>
+          <a:effectRef idx="2">
+            <a:schemeClr val="accent1"/>
+          </a:effectRef>
+          <a:fontRef idx="minor">
+            <a:schemeClr val="lt1"/>
+          </a:fontRef>
+        </p:style>
+        <p:txBody>
+          <a:bodyPr rtlCol="0" anchor="ctr"/>
+          <a:lstStyle/>
+          <a:p>
+            <a:pPr algn="ctr"/>
+          </a:p>
+        </p:txBody>
+      </p:sp>
+      <p:sp>
+        <p:nvSpPr>
+          <p:cNvPr id="9" name="TextBox 8"/>
+          <p:cNvSpPr txBox="1"/>
+          <p:nvPr/>
+        </p:nvSpPr>
+        <p:spPr>
+          <a:xfrm>
+            <a:off x="914400" y="5715000"/>
+            <a:ext cx="10332720" cy="548640"/>
+          </a:xfrm>
+          <a:prstGeom prst="rect">
+            <a:avLst/>
+          </a:prstGeom>
+          <a:noFill/>
+        </p:spPr>
+        <p:txBody>
+          <a:bodyPr wrap="none">
+            <a:spAutoFit/>
+          </a:bodyPr>
+          <a:lstStyle/>
+          <a:p>
+            <a:pPr>
+              <a:defRPr sz="1300" b="1">
+                <a:solidFill>
+                  <a:srgbClr val="2563EB"/>
+                </a:solidFill>
+              </a:defRPr>
+            </a:pPr>
+            <a:r>
+              <a:t>Deployed, testable, documented and ready for technical walkthrough.</a:t>
             </a:r>
           </a:p>
         </p:txBody>
@@ -3826,7 +5281,7 @@
             <a:avLst/>
           </a:prstGeom>
           <a:solidFill>
-            <a:srgbClr val="0F172A"/>
+            <a:srgbClr val="F8FAFC"/>
           </a:solidFill>
           <a:ln>
             <a:noFill/>
@@ -3862,8 +5317,8 @@
         </p:nvSpPr>
         <p:spPr>
           <a:xfrm>
-            <a:off x="731520" y="457200"/>
-            <a:ext cx="10698480" cy="365760"/>
+            <a:off x="731520" y="365760"/>
+            <a:ext cx="10698480" cy="274320"/>
           </a:xfrm>
           <a:prstGeom prst="rect">
             <a:avLst/>
@@ -3871,20 +5326,20 @@
           <a:noFill/>
         </p:spPr>
         <p:txBody>
-          <a:bodyPr wrap="square">
+          <a:bodyPr wrap="none">
             <a:spAutoFit/>
           </a:bodyPr>
           <a:lstStyle/>
           <a:p>
             <a:pPr>
-              <a:defRPr sz="1100" b="1">
-                <a:solidFill>
-                  <a:srgbClr val="06B6D4"/>
-                </a:solidFill>
-              </a:defRPr>
-            </a:pPr>
-            <a:r>
-              <a:t>AI ENGINEER INTERNSHIP CASE STUDY</a:t>
+              <a:defRPr sz="1000" b="1">
+                <a:solidFill>
+                  <a:srgbClr val="2563EB"/>
+                </a:solidFill>
+              </a:defRPr>
+            </a:pPr>
+            <a:r>
+              <a:t>PROBLEM STATEMENT &amp; OBJECTIVES</a:t>
             </a:r>
           </a:p>
         </p:txBody>
@@ -3897,8 +5352,8 @@
         </p:nvSpPr>
         <p:spPr>
           <a:xfrm>
-            <a:off x="731520" y="777240"/>
-            <a:ext cx="10698480" cy="731520"/>
+            <a:off x="731520" y="640080"/>
+            <a:ext cx="10698480" cy="548640"/>
           </a:xfrm>
           <a:prstGeom prst="rect">
             <a:avLst/>
@@ -3906,44 +5361,79 @@
           <a:noFill/>
         </p:spPr>
         <p:txBody>
-          <a:bodyPr wrap="square">
+          <a:bodyPr wrap="none">
             <a:spAutoFit/>
           </a:bodyPr>
           <a:lstStyle/>
           <a:p>
             <a:pPr>
-              <a:defRPr sz="2600" b="1">
-                <a:solidFill>
-                  <a:srgbClr val="FFFFFF"/>
-                </a:solidFill>
-              </a:defRPr>
-            </a:pPr>
-            <a:r>
-              <a:t>Executive Summary &amp; Core Objectives</a:t>
-            </a:r>
-          </a:p>
-        </p:txBody>
-      </p:sp>
-      <p:sp>
-        <p:nvSpPr>
-          <p:cNvPr id="5" name="Rounded Rectangle 4"/>
+              <a:defRPr sz="2200" b="1">
+                <a:solidFill>
+                  <a:srgbClr val="0F172A"/>
+                </a:solidFill>
+              </a:defRPr>
+            </a:pPr>
+            <a:r>
+              <a:t>Problem &amp; Objective</a:t>
+            </a:r>
+          </a:p>
+        </p:txBody>
+      </p:sp>
+      <p:sp>
+        <p:nvSpPr>
+          <p:cNvPr id="5" name="TextBox 4"/>
+          <p:cNvSpPr txBox="1"/>
+          <p:nvPr/>
+        </p:nvSpPr>
+        <p:spPr>
+          <a:xfrm>
+            <a:off x="731520" y="6400800"/>
+            <a:ext cx="10698480" cy="274320"/>
+          </a:xfrm>
+          <a:prstGeom prst="rect">
+            <a:avLst/>
+          </a:prstGeom>
+          <a:noFill/>
+        </p:spPr>
+        <p:txBody>
+          <a:bodyPr wrap="none">
+            <a:spAutoFit/>
+          </a:bodyPr>
+          <a:lstStyle/>
+          <a:p>
+            <a:pPr>
+              <a:defRPr sz="900">
+                <a:solidFill>
+                  <a:srgbClr val="94A3B8"/>
+                </a:solidFill>
+              </a:defRPr>
+            </a:pPr>
+            <a:r>
+              <a:t>Intelligent Document Extraction, Validation &amp; API Platform  |  AI Engineer Internship Technical Case Study</a:t>
+            </a:r>
+          </a:p>
+        </p:txBody>
+      </p:sp>
+      <p:sp>
+        <p:nvSpPr>
+          <p:cNvPr id="6" name="Rounded Rectangle 5"/>
           <p:cNvSpPr/>
           <p:nvPr/>
         </p:nvSpPr>
         <p:spPr>
           <a:xfrm>
-            <a:off x="731520" y="1645920"/>
-            <a:ext cx="5120640" cy="2011680"/>
+            <a:off x="731520" y="1371600"/>
+            <a:ext cx="5212080" cy="4754880"/>
           </a:xfrm>
           <a:prstGeom prst="roundRect">
             <a:avLst/>
           </a:prstGeom>
           <a:solidFill>
-            <a:srgbClr val="1E293B"/>
+            <a:srgbClr val="FFFFFF"/>
           </a:solidFill>
           <a:ln w="12700">
             <a:solidFill>
-              <a:srgbClr val="334155"/>
+              <a:srgbClr val="E2E8F0"/>
             </a:solidFill>
           </a:ln>
         </p:spPr>
@@ -3971,14 +5461,14 @@
       </p:sp>
       <p:sp>
         <p:nvSpPr>
-          <p:cNvPr id="6" name="TextBox 5"/>
+          <p:cNvPr id="7" name="TextBox 6"/>
           <p:cNvSpPr txBox="1"/>
           <p:nvPr/>
         </p:nvSpPr>
         <p:spPr>
           <a:xfrm>
-            <a:off x="1005840" y="1874520"/>
-            <a:ext cx="4572000" cy="1554480"/>
+            <a:off x="914400" y="1554480"/>
+            <a:ext cx="4846320" cy="4389120"/>
           </a:xfrm>
           <a:prstGeom prst="rect">
             <a:avLst/>
@@ -3992,50 +5482,110 @@
           <a:lstStyle/>
           <a:p>
             <a:pPr>
-              <a:defRPr sz="1800" b="1">
-                <a:solidFill>
-                  <a:srgbClr val="F59E0B"/>
-                </a:solidFill>
-              </a:defRPr>
-            </a:pPr>
-            <a:r>
-              <a:t>The Challenge</a:t>
-            </a:r>
-          </a:p>
-          <a:p>
-            <a:pPr>
-              <a:defRPr sz="1300">
-                <a:solidFill>
-                  <a:srgbClr val="94A3B8"/>
-                </a:solidFill>
-              </a:defRPr>
-            </a:pPr>
-            <a:r>
-              <a:t>Financial documents arrive as scanned PDFs and retail receipts with varying orientations, non-standard layouts, multi-column bank schedules, and missing/inconsistent labels.</a:t>
-            </a:r>
-          </a:p>
-        </p:txBody>
-      </p:sp>
-      <p:sp>
-        <p:nvSpPr>
-          <p:cNvPr id="7" name="Rounded Rectangle 6"/>
+              <a:defRPr sz="1500" b="1">
+                <a:solidFill>
+                  <a:srgbClr val="2563EB"/>
+                </a:solidFill>
+              </a:defRPr>
+            </a:pPr>
+            <a:r>
+              <a:t>Platform Ingestion &amp; Functional Objectives</a:t>
+            </a:r>
+          </a:p>
+          <a:p>
+            <a:pPr>
+              <a:defRPr sz="1200">
+                <a:solidFill>
+                  <a:srgbClr val="475569"/>
+                </a:solidFill>
+              </a:defRPr>
+            </a:pPr>
+            <a:r>
+              <a:t>• Accept financial documents through both frontend and REST APIs.</a:t>
+            </a:r>
+          </a:p>
+          <a:p>
+            <a:pPr>
+              <a:defRPr sz="1200">
+                <a:solidFill>
+                  <a:srgbClr val="475569"/>
+                </a:solidFill>
+              </a:defRPr>
+            </a:pPr>
+            <a:r>
+              <a:t>• Support PDF, JPG, and PNG formats (native digital &amp; scanned images).</a:t>
+            </a:r>
+          </a:p>
+          <a:p>
+            <a:pPr>
+              <a:defRPr sz="1200">
+                <a:solidFill>
+                  <a:srgbClr val="475569"/>
+                </a:solidFill>
+              </a:defRPr>
+            </a:pPr>
+            <a:r>
+              <a:t>• Support multi-page financial reports up to 3 pages per document.</a:t>
+            </a:r>
+          </a:p>
+          <a:p>
+            <a:pPr>
+              <a:defRPr sz="1200">
+                <a:solidFill>
+                  <a:srgbClr val="475569"/>
+                </a:solidFill>
+              </a:defRPr>
+            </a:pPr>
+            <a:r>
+              <a:t>• Extract all meaningful visible fields, tables, and financial periods.</a:t>
+            </a:r>
+          </a:p>
+          <a:p>
+            <a:pPr>
+              <a:defRPr sz="1200">
+                <a:solidFill>
+                  <a:srgbClr val="475569"/>
+                </a:solidFill>
+              </a:defRPr>
+            </a:pPr>
+            <a:r>
+              <a:t>• Return structured, consistent, deterministic JSON responses.</a:t>
+            </a:r>
+          </a:p>
+          <a:p>
+            <a:pPr>
+              <a:defRPr sz="1200">
+                <a:solidFill>
+                  <a:srgbClr val="475569"/>
+                </a:solidFill>
+              </a:defRPr>
+            </a:pPr>
+            <a:r>
+              <a:t>• Validate internal financial calculations and accounting relationships.</a:t>
+            </a:r>
+          </a:p>
+        </p:txBody>
+      </p:sp>
+      <p:sp>
+        <p:nvSpPr>
+          <p:cNvPr id="8" name="Rounded Rectangle 7"/>
           <p:cNvSpPr/>
           <p:nvPr/>
         </p:nvSpPr>
         <p:spPr>
           <a:xfrm>
-            <a:off x="6126480" y="1645920"/>
-            <a:ext cx="5120640" cy="2011680"/>
+            <a:off x="6217920" y="1371600"/>
+            <a:ext cx="5212080" cy="4754880"/>
           </a:xfrm>
           <a:prstGeom prst="roundRect">
             <a:avLst/>
           </a:prstGeom>
           <a:solidFill>
-            <a:srgbClr val="1E293B"/>
+            <a:srgbClr val="FFFFFF"/>
           </a:solidFill>
           <a:ln w="12700">
             <a:solidFill>
-              <a:srgbClr val="334155"/>
+              <a:srgbClr val="E2E8F0"/>
             </a:solidFill>
           </a:ln>
         </p:spPr>
@@ -4063,14 +5613,14 @@
       </p:sp>
       <p:sp>
         <p:nvSpPr>
-          <p:cNvPr id="8" name="TextBox 7"/>
+          <p:cNvPr id="9" name="TextBox 8"/>
           <p:cNvSpPr txBox="1"/>
           <p:nvPr/>
         </p:nvSpPr>
         <p:spPr>
           <a:xfrm>
-            <a:off x="6400800" y="1874520"/>
-            <a:ext cx="4572000" cy="1554480"/>
+            <a:off x="6400800" y="1554480"/>
+            <a:ext cx="4846320" cy="4389120"/>
           </a:xfrm>
           <a:prstGeom prst="rect">
             <a:avLst/>
@@ -4084,210 +5634,87 @@
           <a:lstStyle/>
           <a:p>
             <a:pPr>
-              <a:defRPr sz="1800" b="1">
-                <a:solidFill>
-                  <a:srgbClr val="3B82F6"/>
-                </a:solidFill>
-              </a:defRPr>
-            </a:pPr>
-            <a:r>
-              <a:t>The AI Solution</a:t>
-            </a:r>
-          </a:p>
-          <a:p>
-            <a:pPr>
-              <a:defRPr sz="1300">
-                <a:solidFill>
-                  <a:srgbClr val="94A3B8"/>
-                </a:solidFill>
-              </a:defRPr>
-            </a:pPr>
-            <a:r>
-              <a:t>Multimodal AI pipeline combining PyMuPDF high-DPI rasterization and Gemini 3.6 Flash vision with strict JSON schema constraints for guaranteed zero-hallucination structured outputs.</a:t>
-            </a:r>
-          </a:p>
-        </p:txBody>
-      </p:sp>
-      <p:sp>
-        <p:nvSpPr>
-          <p:cNvPr id="9" name="Rounded Rectangle 8"/>
-          <p:cNvSpPr/>
-          <p:nvPr/>
-        </p:nvSpPr>
-        <p:spPr>
-          <a:xfrm>
-            <a:off x="731520" y="3931920"/>
-            <a:ext cx="5120640" cy="2011680"/>
-          </a:xfrm>
-          <a:prstGeom prst="roundRect">
-            <a:avLst/>
-          </a:prstGeom>
-          <a:solidFill>
-            <a:srgbClr val="1E293B"/>
-          </a:solidFill>
-          <a:ln w="12700">
-            <a:solidFill>
-              <a:srgbClr val="334155"/>
-            </a:solidFill>
-          </a:ln>
-        </p:spPr>
-        <p:style>
-          <a:lnRef idx="1">
-            <a:schemeClr val="accent1"/>
-          </a:lnRef>
-          <a:fillRef idx="3">
-            <a:schemeClr val="accent1"/>
-          </a:fillRef>
-          <a:effectRef idx="2">
-            <a:schemeClr val="accent1"/>
-          </a:effectRef>
-          <a:fontRef idx="minor">
-            <a:schemeClr val="lt1"/>
-          </a:fontRef>
-        </p:style>
-        <p:txBody>
-          <a:bodyPr rtlCol="0" anchor="ctr"/>
-          <a:lstStyle/>
-          <a:p>
-            <a:pPr algn="ctr"/>
-          </a:p>
-        </p:txBody>
-      </p:sp>
-      <p:sp>
-        <p:nvSpPr>
-          <p:cNvPr id="10" name="TextBox 9"/>
-          <p:cNvSpPr txBox="1"/>
-          <p:nvPr/>
-        </p:nvSpPr>
-        <p:spPr>
-          <a:xfrm>
-            <a:off x="1005840" y="4160520"/>
-            <a:ext cx="4572000" cy="1554480"/>
-          </a:xfrm>
-          <a:prstGeom prst="rect">
-            <a:avLst/>
-          </a:prstGeom>
-          <a:noFill/>
-        </p:spPr>
-        <p:txBody>
-          <a:bodyPr wrap="square">
-            <a:spAutoFit/>
-          </a:bodyPr>
-          <a:lstStyle/>
-          <a:p>
-            <a:pPr>
-              <a:defRPr sz="1800" b="1">
-                <a:solidFill>
-                  <a:srgbClr val="22C55E"/>
-                </a:solidFill>
-              </a:defRPr>
-            </a:pPr>
-            <a:r>
-              <a:t>Automated Validation</a:t>
-            </a:r>
-          </a:p>
-          <a:p>
-            <a:pPr>
-              <a:defRPr sz="1300">
-                <a:solidFill>
-                  <a:srgbClr val="94A3B8"/>
-                </a:solidFill>
-              </a:defRPr>
-            </a:pPr>
-            <a:r>
-              <a:t>Built-in mathematical reconciliation engine checking line items, balance sheet asset-liability parity, profit derivations, and cash flow continuity with variance audit trails.</a:t>
-            </a:r>
-          </a:p>
-        </p:txBody>
-      </p:sp>
-      <p:sp>
-        <p:nvSpPr>
-          <p:cNvPr id="11" name="Rounded Rectangle 10"/>
-          <p:cNvSpPr/>
-          <p:nvPr/>
-        </p:nvSpPr>
-        <p:spPr>
-          <a:xfrm>
-            <a:off x="6126480" y="3931920"/>
-            <a:ext cx="5120640" cy="2011680"/>
-          </a:xfrm>
-          <a:prstGeom prst="roundRect">
-            <a:avLst/>
-          </a:prstGeom>
-          <a:solidFill>
-            <a:srgbClr val="1E293B"/>
-          </a:solidFill>
-          <a:ln w="12700">
-            <a:solidFill>
-              <a:srgbClr val="334155"/>
-            </a:solidFill>
-          </a:ln>
-        </p:spPr>
-        <p:style>
-          <a:lnRef idx="1">
-            <a:schemeClr val="accent1"/>
-          </a:lnRef>
-          <a:fillRef idx="3">
-            <a:schemeClr val="accent1"/>
-          </a:fillRef>
-          <a:effectRef idx="2">
-            <a:schemeClr val="accent1"/>
-          </a:effectRef>
-          <a:fontRef idx="minor">
-            <a:schemeClr val="lt1"/>
-          </a:fontRef>
-        </p:style>
-        <p:txBody>
-          <a:bodyPr rtlCol="0" anchor="ctr"/>
-          <a:lstStyle/>
-          <a:p>
-            <a:pPr algn="ctr"/>
-          </a:p>
-        </p:txBody>
-      </p:sp>
-      <p:sp>
-        <p:nvSpPr>
-          <p:cNvPr id="12" name="TextBox 11"/>
-          <p:cNvSpPr txBox="1"/>
-          <p:nvPr/>
-        </p:nvSpPr>
-        <p:spPr>
-          <a:xfrm>
-            <a:off x="6400800" y="4160520"/>
-            <a:ext cx="4572000" cy="1554480"/>
-          </a:xfrm>
-          <a:prstGeom prst="rect">
-            <a:avLst/>
-          </a:prstGeom>
-          <a:noFill/>
-        </p:spPr>
-        <p:txBody>
-          <a:bodyPr wrap="square">
-            <a:spAutoFit/>
-          </a:bodyPr>
-          <a:lstStyle/>
-          <a:p>
-            <a:pPr>
-              <a:defRPr sz="1800" b="1">
-                <a:solidFill>
-                  <a:srgbClr val="06B6D4"/>
-                </a:solidFill>
-              </a:defRPr>
-            </a:pPr>
-            <a:r>
-              <a:t>Production Platform</a:t>
-            </a:r>
-          </a:p>
-          <a:p>
-            <a:pPr>
-              <a:defRPr sz="1300">
-                <a:solidFill>
-                  <a:srgbClr val="94A3B8"/>
-                </a:solidFill>
-              </a:defRPr>
-            </a:pPr>
-            <a:r>
-              <a:t>High-throughput FastAPI backend with 4 REST endpoints, Jinja2 responsive dashboard, 37 passing test suites, Docker containerization, and deployed cloud architecture on Render.</a:t>
+              <a:defRPr sz="1500" b="1">
+                <a:solidFill>
+                  <a:srgbClr val="0284C7"/>
+                </a:solidFill>
+              </a:defRPr>
+            </a:pPr>
+            <a:r>
+              <a:t>Operational &amp; Core Extraction Principles</a:t>
+            </a:r>
+          </a:p>
+          <a:p>
+            <a:pPr>
+              <a:defRPr sz="1200">
+                <a:solidFill>
+                  <a:srgbClr val="475569"/>
+                </a:solidFill>
+              </a:defRPr>
+            </a:pPr>
+            <a:r>
+              <a:t>• Store all processed results in a queryable database.</a:t>
+            </a:r>
+          </a:p>
+          <a:p>
+            <a:pPr>
+              <a:defRPr sz="1200">
+                <a:solidFill>
+                  <a:srgbClr val="475569"/>
+                </a:solidFill>
+              </a:defRPr>
+            </a:pPr>
+            <a:r>
+              <a:t>• Allow structured retrieval through dedicated REST APIs.</a:t>
+            </a:r>
+          </a:p>
+          <a:p>
+            <a:pPr>
+              <a:defRPr sz="1200">
+                <a:solidFill>
+                  <a:srgbClr val="475569"/>
+                </a:solidFill>
+              </a:defRPr>
+            </a:pPr>
+            <a:r>
+              <a:t>• Provide a web dashboard for viewing and inspecting documents.</a:t>
+            </a:r>
+          </a:p>
+          <a:p>
+            <a:pPr>
+              <a:defRPr sz="1200">
+                <a:solidFill>
+                  <a:srgbClr val="475569"/>
+                </a:solidFill>
+              </a:defRPr>
+            </a:pPr>
+            <a:r>
+              <a:t>• Deliver a fully working deployed solution for live technical evaluation.</a:t>
+            </a:r>
+          </a:p>
+          <a:p>
+            <a:br/>
+            <a:pPr>
+              <a:defRPr sz="1300" b="1">
+                <a:solidFill>
+                  <a:srgbClr val="D97706"/>
+                </a:solidFill>
+              </a:defRPr>
+            </a:pPr>
+            <a:r>
+              <a:t>Core Extraction Principle:</a:t>
+            </a:r>
+          </a:p>
+          <a:p>
+            <a:pPr>
+              <a:defRPr sz="1200" i="1">
+                <a:solidFill>
+                  <a:srgbClr val="0F172A"/>
+                </a:solidFill>
+              </a:defRPr>
+            </a:pPr>
+            <a:r>
+              <a:t>"Missing information must be represented as null. The system must not invent or infer values."</a:t>
             </a:r>
           </a:p>
         </p:txBody>
@@ -4325,7 +5752,7 @@
             <a:avLst/>
           </a:prstGeom>
           <a:solidFill>
-            <a:srgbClr val="0F172A"/>
+            <a:srgbClr val="F8FAFC"/>
           </a:solidFill>
           <a:ln>
             <a:noFill/>
@@ -4361,8 +5788,8 @@
         </p:nvSpPr>
         <p:spPr>
           <a:xfrm>
-            <a:off x="731520" y="457200"/>
-            <a:ext cx="10698480" cy="365760"/>
+            <a:off x="731520" y="365760"/>
+            <a:ext cx="10698480" cy="274320"/>
           </a:xfrm>
           <a:prstGeom prst="rect">
             <a:avLst/>
@@ -4370,20 +5797,20 @@
           <a:noFill/>
         </p:spPr>
         <p:txBody>
-          <a:bodyPr wrap="square">
+          <a:bodyPr wrap="none">
             <a:spAutoFit/>
           </a:bodyPr>
           <a:lstStyle/>
           <a:p>
             <a:pPr>
-              <a:defRPr sz="1100" b="1">
-                <a:solidFill>
-                  <a:srgbClr val="06B6D4"/>
-                </a:solidFill>
-              </a:defRPr>
-            </a:pPr>
-            <a:r>
-              <a:t>AI ENGINEER INTERNSHIP CASE STUDY</a:t>
+              <a:defRPr sz="1000" b="1">
+                <a:solidFill>
+                  <a:srgbClr val="2563EB"/>
+                </a:solidFill>
+              </a:defRPr>
+            </a:pPr>
+            <a:r>
+              <a:t>SYSTEM ARCHITECTURE</a:t>
             </a:r>
           </a:p>
         </p:txBody>
@@ -4396,8 +5823,8 @@
         </p:nvSpPr>
         <p:spPr>
           <a:xfrm>
-            <a:off x="731520" y="777240"/>
-            <a:ext cx="10698480" cy="731520"/>
+            <a:off x="731520" y="640080"/>
+            <a:ext cx="10698480" cy="548640"/>
           </a:xfrm>
           <a:prstGeom prst="rect">
             <a:avLst/>
@@ -4405,44 +5832,79 @@
           <a:noFill/>
         </p:spPr>
         <p:txBody>
-          <a:bodyPr wrap="square">
+          <a:bodyPr wrap="none">
             <a:spAutoFit/>
           </a:bodyPr>
           <a:lstStyle/>
           <a:p>
             <a:pPr>
-              <a:defRPr sz="2600" b="1">
-                <a:solidFill>
-                  <a:srgbClr val="FFFFFF"/>
-                </a:solidFill>
-              </a:defRPr>
-            </a:pPr>
-            <a:r>
-              <a:t>System Architecture &amp; End-to-End Pipeline</a:t>
-            </a:r>
-          </a:p>
-        </p:txBody>
-      </p:sp>
-      <p:sp>
-        <p:nvSpPr>
-          <p:cNvPr id="5" name="Rounded Rectangle 4"/>
+              <a:defRPr sz="2200" b="1">
+                <a:solidFill>
+                  <a:srgbClr val="0F172A"/>
+                </a:solidFill>
+              </a:defRPr>
+            </a:pPr>
+            <a:r>
+              <a:t>Solution Architecture</a:t>
+            </a:r>
+          </a:p>
+        </p:txBody>
+      </p:sp>
+      <p:sp>
+        <p:nvSpPr>
+          <p:cNvPr id="5" name="TextBox 4"/>
+          <p:cNvSpPr txBox="1"/>
+          <p:nvPr/>
+        </p:nvSpPr>
+        <p:spPr>
+          <a:xfrm>
+            <a:off x="731520" y="6400800"/>
+            <a:ext cx="10698480" cy="274320"/>
+          </a:xfrm>
+          <a:prstGeom prst="rect">
+            <a:avLst/>
+          </a:prstGeom>
+          <a:noFill/>
+        </p:spPr>
+        <p:txBody>
+          <a:bodyPr wrap="none">
+            <a:spAutoFit/>
+          </a:bodyPr>
+          <a:lstStyle/>
+          <a:p>
+            <a:pPr>
+              <a:defRPr sz="900">
+                <a:solidFill>
+                  <a:srgbClr val="94A3B8"/>
+                </a:solidFill>
+              </a:defRPr>
+            </a:pPr>
+            <a:r>
+              <a:t>Intelligent Document Extraction, Validation &amp; API Platform  |  AI Engineer Internship Technical Case Study</a:t>
+            </a:r>
+          </a:p>
+        </p:txBody>
+      </p:sp>
+      <p:sp>
+        <p:nvSpPr>
+          <p:cNvPr id="6" name="Rounded Rectangle 5"/>
           <p:cNvSpPr/>
           <p:nvPr/>
         </p:nvSpPr>
         <p:spPr>
           <a:xfrm>
-            <a:off x="731520" y="1645920"/>
-            <a:ext cx="2514600" cy="4572000"/>
+            <a:off x="731520" y="1371600"/>
+            <a:ext cx="2560320" cy="4754880"/>
           </a:xfrm>
           <a:prstGeom prst="roundRect">
             <a:avLst/>
           </a:prstGeom>
           <a:solidFill>
-            <a:srgbClr val="1E293B"/>
+            <a:srgbClr val="FFFFFF"/>
           </a:solidFill>
           <a:ln w="12700">
             <a:solidFill>
-              <a:srgbClr val="334155"/>
+              <a:srgbClr val="E2E8F0"/>
             </a:solidFill>
           </a:ln>
         </p:spPr>
@@ -4470,14 +5932,14 @@
       </p:sp>
       <p:sp>
         <p:nvSpPr>
-          <p:cNvPr id="6" name="TextBox 5"/>
+          <p:cNvPr id="7" name="TextBox 6"/>
           <p:cNvSpPr txBox="1"/>
           <p:nvPr/>
         </p:nvSpPr>
         <p:spPr>
           <a:xfrm>
-            <a:off x="914400" y="1828800"/>
-            <a:ext cx="2148840" cy="4114800"/>
+            <a:off x="868680" y="1554480"/>
+            <a:ext cx="2286000" cy="4389120"/>
           </a:xfrm>
           <a:prstGeom prst="rect">
             <a:avLst/>
@@ -4491,63 +5953,67 @@
           <a:lstStyle/>
           <a:p>
             <a:pPr>
-              <a:defRPr sz="1500" b="1">
-                <a:solidFill>
-                  <a:srgbClr val="06B6D4"/>
-                </a:solidFill>
-              </a:defRPr>
-            </a:pPr>
-            <a:r>
-              <a:t>1. Presentation &amp; API Layer</a:t>
-            </a:r>
-          </a:p>
-          <a:p>
-            <a:br/>
-            <a:pPr>
-              <a:defRPr sz="1200">
-                <a:solidFill>
-                  <a:srgbClr val="94A3B8"/>
-                </a:solidFill>
-              </a:defRPr>
-            </a:pPr>
-            <a:r>
-              <a:t>• Web Dashboard (HTML5/Jinja2/CSS3)</a:t>
-            </a:r>
-            <a:br/>
-            <a:r>
-              <a:t>• RESTful API (FastAPI)</a:t>
-            </a:r>
-            <a:br/>
-            <a:r>
-              <a:t>• Interactive Swagger/OpenAPI UI (/docs)</a:t>
-            </a:r>
-            <a:br/>
-            <a:r>
-              <a:t>• Real-time processing progress &amp; status</a:t>
-            </a:r>
-          </a:p>
-        </p:txBody>
-      </p:sp>
-      <p:sp>
-        <p:nvSpPr>
-          <p:cNvPr id="7" name="Rounded Rectangle 6"/>
+              <a:defRPr sz="1600" b="1">
+                <a:solidFill>
+                  <a:srgbClr val="2563EB"/>
+                </a:solidFill>
+              </a:defRPr>
+            </a:pPr>
+            <a:r>
+              <a:t>Frontend</a:t>
+            </a:r>
+          </a:p>
+          <a:p>
+            <a:br/>
+            <a:pPr>
+              <a:defRPr sz="1150">
+                <a:solidFill>
+                  <a:srgbClr val="475569"/>
+                </a:solidFill>
+              </a:defRPr>
+            </a:pPr>
+            <a:r>
+              <a:t>• HTML5, CSS3, JavaScript</a:t>
+            </a:r>
+            <a:br/>
+            <a:r>
+              <a:t>• Upload &amp; doc-type selector</a:t>
+            </a:r>
+            <a:br/>
+            <a:r>
+              <a:t>• Dashboard table</a:t>
+            </a:r>
+            <a:br/>
+            <a:r>
+              <a:t>• Comprehensive result viewer</a:t>
+            </a:r>
+            <a:br/>
+            <a:r>
+              <a:t>• Raw JSON toggle</a:t>
+            </a:r>
+          </a:p>
+        </p:txBody>
+      </p:sp>
+      <p:sp>
+        <p:nvSpPr>
+          <p:cNvPr id="8" name="Rounded Rectangle 7"/>
           <p:cNvSpPr/>
           <p:nvPr/>
         </p:nvSpPr>
         <p:spPr>
           <a:xfrm>
-            <a:off x="3474720" y="1645920"/>
-            <a:ext cx="2514600" cy="4572000"/>
+            <a:off x="3429000" y="1371600"/>
+            <a:ext cx="2560320" cy="4754880"/>
           </a:xfrm>
           <a:prstGeom prst="roundRect">
             <a:avLst/>
           </a:prstGeom>
           <a:solidFill>
-            <a:srgbClr val="1E293B"/>
+            <a:srgbClr val="FFFFFF"/>
           </a:solidFill>
           <a:ln w="12700">
             <a:solidFill>
-              <a:srgbClr val="334155"/>
+              <a:srgbClr val="E2E8F0"/>
             </a:solidFill>
           </a:ln>
         </p:spPr>
@@ -4575,14 +6041,14 @@
       </p:sp>
       <p:sp>
         <p:nvSpPr>
-          <p:cNvPr id="8" name="TextBox 7"/>
+          <p:cNvPr id="9" name="TextBox 8"/>
           <p:cNvSpPr txBox="1"/>
           <p:nvPr/>
         </p:nvSpPr>
         <p:spPr>
           <a:xfrm>
-            <a:off x="3657600" y="1828800"/>
-            <a:ext cx="2148840" cy="4114800"/>
+            <a:off x="3566160" y="1554480"/>
+            <a:ext cx="2286000" cy="4389120"/>
           </a:xfrm>
           <a:prstGeom prst="rect">
             <a:avLst/>
@@ -4596,63 +6062,67 @@
           <a:lstStyle/>
           <a:p>
             <a:pPr>
-              <a:defRPr sz="1500" b="1">
-                <a:solidFill>
-                  <a:srgbClr val="06B6D4"/>
-                </a:solidFill>
-              </a:defRPr>
-            </a:pPr>
-            <a:r>
-              <a:t>2. Ingestion &amp; Preprocessing</a:t>
-            </a:r>
-          </a:p>
-          <a:p>
-            <a:br/>
-            <a:pPr>
-              <a:defRPr sz="1200">
-                <a:solidFill>
-                  <a:srgbClr val="94A3B8"/>
-                </a:solidFill>
-              </a:defRPr>
-            </a:pPr>
-            <a:r>
-              <a:t>• Document Validation Service (Format/size/integrity)</a:t>
-            </a:r>
-            <a:br/>
-            <a:r>
-              <a:t>• PyMuPDF Dual Mode: Native PDF text extraction</a:t>
-            </a:r>
-            <a:br/>
-            <a:r>
-              <a:t>• High-resolution 200 DPI page image rendering</a:t>
-            </a:r>
-            <a:br/>
-            <a:r>
-              <a:t>• Scanned document detection heuristic</a:t>
-            </a:r>
-          </a:p>
-        </p:txBody>
-      </p:sp>
-      <p:sp>
-        <p:nvSpPr>
-          <p:cNvPr id="9" name="Rounded Rectangle 8"/>
+              <a:defRPr sz="1600" b="1">
+                <a:solidFill>
+                  <a:srgbClr val="2563EB"/>
+                </a:solidFill>
+              </a:defRPr>
+            </a:pPr>
+            <a:r>
+              <a:t>Backend</a:t>
+            </a:r>
+          </a:p>
+          <a:p>
+            <a:br/>
+            <a:pPr>
+              <a:defRPr sz="1150">
+                <a:solidFill>
+                  <a:srgbClr val="475569"/>
+                </a:solidFill>
+              </a:defRPr>
+            </a:pPr>
+            <a:r>
+              <a:t>• FastAPI async framework</a:t>
+            </a:r>
+            <a:br/>
+            <a:r>
+              <a:t>• Modular REST APIs</a:t>
+            </a:r>
+            <a:br/>
+            <a:r>
+              <a:t>• Auto Swagger/OpenAPI docs</a:t>
+            </a:r>
+            <a:br/>
+            <a:r>
+              <a:t>• Pydantic validation models</a:t>
+            </a:r>
+            <a:br/>
+            <a:r>
+              <a:t>• Structured logging &amp; errors</a:t>
+            </a:r>
+          </a:p>
+        </p:txBody>
+      </p:sp>
+      <p:sp>
+        <p:nvSpPr>
+          <p:cNvPr id="10" name="Rounded Rectangle 9"/>
           <p:cNvSpPr/>
           <p:nvPr/>
         </p:nvSpPr>
         <p:spPr>
           <a:xfrm>
-            <a:off x="6217920" y="1645920"/>
-            <a:ext cx="2514600" cy="4572000"/>
+            <a:off x="6126480" y="1371600"/>
+            <a:ext cx="2560320" cy="4754880"/>
           </a:xfrm>
           <a:prstGeom prst="roundRect">
             <a:avLst/>
           </a:prstGeom>
           <a:solidFill>
-            <a:srgbClr val="1E293B"/>
+            <a:srgbClr val="FFFFFF"/>
           </a:solidFill>
           <a:ln w="12700">
             <a:solidFill>
-              <a:srgbClr val="334155"/>
+              <a:srgbClr val="E2E8F0"/>
             </a:solidFill>
           </a:ln>
         </p:spPr>
@@ -4680,14 +6150,14 @@
       </p:sp>
       <p:sp>
         <p:nvSpPr>
-          <p:cNvPr id="10" name="TextBox 9"/>
+          <p:cNvPr id="11" name="TextBox 10"/>
           <p:cNvSpPr txBox="1"/>
           <p:nvPr/>
         </p:nvSpPr>
         <p:spPr>
           <a:xfrm>
-            <a:off x="6400800" y="1828800"/>
-            <a:ext cx="2148840" cy="4114800"/>
+            <a:off x="6263640" y="1554480"/>
+            <a:ext cx="2286000" cy="4389120"/>
           </a:xfrm>
           <a:prstGeom prst="rect">
             <a:avLst/>
@@ -4701,63 +6171,67 @@
           <a:lstStyle/>
           <a:p>
             <a:pPr>
-              <a:defRPr sz="1500" b="1">
-                <a:solidFill>
-                  <a:srgbClr val="06B6D4"/>
-                </a:solidFill>
-              </a:defRPr>
-            </a:pPr>
-            <a:r>
-              <a:t>3. AI Extraction &amp; Reasoning</a:t>
-            </a:r>
-          </a:p>
-          <a:p>
-            <a:br/>
-            <a:pPr>
-              <a:defRPr sz="1200">
-                <a:solidFill>
-                  <a:srgbClr val="94A3B8"/>
-                </a:solidFill>
-              </a:defRPr>
-            </a:pPr>
-            <a:r>
-              <a:t>• Gemini 3.6 Flash multimodal engine</a:t>
-            </a:r>
-            <a:br/>
-            <a:r>
-              <a:t>• Domain-specialized zero-shot prompt schemas</a:t>
-            </a:r>
-            <a:br/>
-            <a:r>
-              <a:t>• Extraction of values, confidence &amp; source text</a:t>
-            </a:r>
-            <a:br/>
-            <a:r>
-              <a:t>• Normalized tabular line-item &amp; period arrays</a:t>
-            </a:r>
-          </a:p>
-        </p:txBody>
-      </p:sp>
-      <p:sp>
-        <p:nvSpPr>
-          <p:cNvPr id="11" name="Rounded Rectangle 10"/>
+              <a:defRPr sz="1600" b="1">
+                <a:solidFill>
+                  <a:srgbClr val="2563EB"/>
+                </a:solidFill>
+              </a:defRPr>
+            </a:pPr>
+            <a:r>
+              <a:t>Processing</a:t>
+            </a:r>
+          </a:p>
+          <a:p>
+            <a:br/>
+            <a:pPr>
+              <a:defRPr sz="1150">
+                <a:solidFill>
+                  <a:srgbClr val="475569"/>
+                </a:solidFill>
+              </a:defRPr>
+            </a:pPr>
+            <a:r>
+              <a:t>• Document format/integrity validation</a:t>
+            </a:r>
+            <a:br/>
+            <a:r>
+              <a:t>• PyMuPDF text &amp; 200 DPI OCR images</a:t>
+            </a:r>
+            <a:br/>
+            <a:r>
+              <a:t>• Gemini 3.6 Flash multimodal AI</a:t>
+            </a:r>
+            <a:br/>
+            <a:r>
+              <a:t>• Independent Financial Validation</a:t>
+            </a:r>
+            <a:br/>
+            <a:r>
+              <a:t>• Strict JSON schema constraints</a:t>
+            </a:r>
+          </a:p>
+        </p:txBody>
+      </p:sp>
+      <p:sp>
+        <p:nvSpPr>
+          <p:cNvPr id="12" name="Rounded Rectangle 11"/>
           <p:cNvSpPr/>
           <p:nvPr/>
         </p:nvSpPr>
         <p:spPr>
           <a:xfrm>
-            <a:off x="8961120" y="1645920"/>
-            <a:ext cx="2514600" cy="4572000"/>
+            <a:off x="8823960" y="1371600"/>
+            <a:ext cx="2560320" cy="4754880"/>
           </a:xfrm>
           <a:prstGeom prst="roundRect">
             <a:avLst/>
           </a:prstGeom>
           <a:solidFill>
-            <a:srgbClr val="1E293B"/>
+            <a:srgbClr val="FFFFFF"/>
           </a:solidFill>
           <a:ln w="12700">
             <a:solidFill>
-              <a:srgbClr val="334155"/>
+              <a:srgbClr val="E2E8F0"/>
             </a:solidFill>
           </a:ln>
         </p:spPr>
@@ -4785,14 +6259,14 @@
       </p:sp>
       <p:sp>
         <p:nvSpPr>
-          <p:cNvPr id="12" name="TextBox 11"/>
+          <p:cNvPr id="13" name="TextBox 12"/>
           <p:cNvSpPr txBox="1"/>
           <p:nvPr/>
         </p:nvSpPr>
         <p:spPr>
           <a:xfrm>
-            <a:off x="9144000" y="1828800"/>
-            <a:ext cx="2148840" cy="4114800"/>
+            <a:off x="8961120" y="1554480"/>
+            <a:ext cx="2286000" cy="4389120"/>
           </a:xfrm>
           <a:prstGeom prst="rect">
             <a:avLst/>
@@ -4806,39 +6280,43 @@
           <a:lstStyle/>
           <a:p>
             <a:pPr>
-              <a:defRPr sz="1500" b="1">
-                <a:solidFill>
-                  <a:srgbClr val="06B6D4"/>
-                </a:solidFill>
-              </a:defRPr>
-            </a:pPr>
-            <a:r>
-              <a:t>4. Validation &amp; Persistence</a:t>
-            </a:r>
-          </a:p>
-          <a:p>
-            <a:br/>
-            <a:pPr>
-              <a:defRPr sz="1200">
-                <a:solidFill>
-                  <a:srgbClr val="94A3B8"/>
-                </a:solidFill>
-              </a:defRPr>
-            </a:pPr>
-            <a:r>
-              <a:t>• Financial Validation Engine (11 audit rules)</a:t>
-            </a:r>
-            <a:br/>
-            <a:r>
-              <a:t>• Mathematical variance calculation &amp; status</a:t>
-            </a:r>
-            <a:br/>
-            <a:r>
-              <a:t>• SQLite persistence via SQLAlchemy ORM</a:t>
-            </a:r>
-            <a:br/>
-            <a:r>
-              <a:t>• Upsert-by-filename semantics for re-processing</a:t>
+              <a:defRPr sz="1600" b="1">
+                <a:solidFill>
+                  <a:srgbClr val="2563EB"/>
+                </a:solidFill>
+              </a:defRPr>
+            </a:pPr>
+            <a:r>
+              <a:t>Persistence</a:t>
+            </a:r>
+          </a:p>
+          <a:p>
+            <a:br/>
+            <a:pPr>
+              <a:defRPr sz="1150">
+                <a:solidFill>
+                  <a:srgbClr val="475569"/>
+                </a:solidFill>
+              </a:defRPr>
+            </a:pPr>
+            <a:r>
+              <a:t>• SQLAlchemy 2.0 ORM</a:t>
+            </a:r>
+            <a:br/>
+            <a:r>
+              <a:t>• SQLite queryable database</a:t>
+            </a:r>
+            <a:br/>
+            <a:r>
+              <a:t>• Indexed document_name</a:t>
+            </a:r>
+            <a:br/>
+            <a:r>
+              <a:t>• Full result_json persistence</a:t>
+            </a:r>
+            <a:br/>
+            <a:r>
+              <a:t>• Upsert semantics (latest wins)</a:t>
             </a:r>
           </a:p>
         </p:txBody>
@@ -4876,7 +6354,7 @@
             <a:avLst/>
           </a:prstGeom>
           <a:solidFill>
-            <a:srgbClr val="0F172A"/>
+            <a:srgbClr val="F8FAFC"/>
           </a:solidFill>
           <a:ln>
             <a:noFill/>
@@ -4912,8 +6390,8 @@
         </p:nvSpPr>
         <p:spPr>
           <a:xfrm>
-            <a:off x="731520" y="457200"/>
-            <a:ext cx="10698480" cy="365760"/>
+            <a:off x="731520" y="365760"/>
+            <a:ext cx="10698480" cy="274320"/>
           </a:xfrm>
           <a:prstGeom prst="rect">
             <a:avLst/>
@@ -4921,20 +6399,20 @@
           <a:noFill/>
         </p:spPr>
         <p:txBody>
-          <a:bodyPr wrap="square">
+          <a:bodyPr wrap="none">
             <a:spAutoFit/>
           </a:bodyPr>
           <a:lstStyle/>
           <a:p>
             <a:pPr>
-              <a:defRPr sz="1100" b="1">
-                <a:solidFill>
-                  <a:srgbClr val="06B6D4"/>
-                </a:solidFill>
-              </a:defRPr>
-            </a:pPr>
-            <a:r>
-              <a:t>AI ENGINEER INTERNSHIP CASE STUDY</a:t>
+              <a:defRPr sz="1000" b="1">
+                <a:solidFill>
+                  <a:srgbClr val="2563EB"/>
+                </a:solidFill>
+              </a:defRPr>
+            </a:pPr>
+            <a:r>
+              <a:t>EXECUTION LIFECYCLE</a:t>
             </a:r>
           </a:p>
         </p:txBody>
@@ -4947,8 +6425,8 @@
         </p:nvSpPr>
         <p:spPr>
           <a:xfrm>
-            <a:off x="731520" y="777240"/>
-            <a:ext cx="10698480" cy="731520"/>
+            <a:off x="731520" y="640080"/>
+            <a:ext cx="10698480" cy="548640"/>
           </a:xfrm>
           <a:prstGeom prst="rect">
             <a:avLst/>
@@ -4956,44 +6434,79 @@
           <a:noFill/>
         </p:spPr>
         <p:txBody>
-          <a:bodyPr wrap="square">
+          <a:bodyPr wrap="none">
             <a:spAutoFit/>
           </a:bodyPr>
           <a:lstStyle/>
           <a:p>
             <a:pPr>
-              <a:defRPr sz="2600" b="1">
-                <a:solidFill>
-                  <a:srgbClr val="FFFFFF"/>
-                </a:solidFill>
-              </a:defRPr>
-            </a:pPr>
-            <a:r>
-              <a:t>Technology Stack &amp; Architectural Decisions</a:t>
-            </a:r>
-          </a:p>
-        </p:txBody>
-      </p:sp>
-      <p:sp>
-        <p:nvSpPr>
-          <p:cNvPr id="5" name="Rounded Rectangle 4"/>
+              <a:defRPr sz="2200" b="1">
+                <a:solidFill>
+                  <a:srgbClr val="0F172A"/>
+                </a:solidFill>
+              </a:defRPr>
+            </a:pPr>
+            <a:r>
+              <a:t>End-to-End Processing Pipeline</a:t>
+            </a:r>
+          </a:p>
+        </p:txBody>
+      </p:sp>
+      <p:sp>
+        <p:nvSpPr>
+          <p:cNvPr id="5" name="TextBox 4"/>
+          <p:cNvSpPr txBox="1"/>
+          <p:nvPr/>
+        </p:nvSpPr>
+        <p:spPr>
+          <a:xfrm>
+            <a:off x="731520" y="6400800"/>
+            <a:ext cx="10698480" cy="274320"/>
+          </a:xfrm>
+          <a:prstGeom prst="rect">
+            <a:avLst/>
+          </a:prstGeom>
+          <a:noFill/>
+        </p:spPr>
+        <p:txBody>
+          <a:bodyPr wrap="none">
+            <a:spAutoFit/>
+          </a:bodyPr>
+          <a:lstStyle/>
+          <a:p>
+            <a:pPr>
+              <a:defRPr sz="900">
+                <a:solidFill>
+                  <a:srgbClr val="94A3B8"/>
+                </a:solidFill>
+              </a:defRPr>
+            </a:pPr>
+            <a:r>
+              <a:t>Intelligent Document Extraction, Validation &amp; API Platform  |  AI Engineer Internship Technical Case Study</a:t>
+            </a:r>
+          </a:p>
+        </p:txBody>
+      </p:sp>
+      <p:sp>
+        <p:nvSpPr>
+          <p:cNvPr id="6" name="Rounded Rectangle 5"/>
           <p:cNvSpPr/>
           <p:nvPr/>
         </p:nvSpPr>
         <p:spPr>
           <a:xfrm>
-            <a:off x="731520" y="1645920"/>
-            <a:ext cx="3383280" cy="2011680"/>
+            <a:off x="731520" y="1371600"/>
+            <a:ext cx="5212080" cy="868680"/>
           </a:xfrm>
           <a:prstGeom prst="roundRect">
             <a:avLst/>
           </a:prstGeom>
           <a:solidFill>
-            <a:srgbClr val="1E293B"/>
+            <a:srgbClr val="FFFFFF"/>
           </a:solidFill>
           <a:ln w="12700">
             <a:solidFill>
-              <a:srgbClr val="334155"/>
+              <a:srgbClr val="E2E8F0"/>
             </a:solidFill>
           </a:ln>
         </p:spPr>
@@ -5021,14 +6534,14 @@
       </p:sp>
       <p:sp>
         <p:nvSpPr>
-          <p:cNvPr id="6" name="TextBox 5"/>
+          <p:cNvPr id="7" name="TextBox 6"/>
           <p:cNvSpPr txBox="1"/>
           <p:nvPr/>
         </p:nvSpPr>
         <p:spPr>
           <a:xfrm>
-            <a:off x="914400" y="1828800"/>
-            <a:ext cx="3017520" cy="1645920"/>
+            <a:off x="914400" y="1444752"/>
+            <a:ext cx="4846320" cy="731520"/>
           </a:xfrm>
           <a:prstGeom prst="rect">
             <a:avLst/>
@@ -5042,62 +6555,38 @@
           <a:lstStyle/>
           <a:p>
             <a:pPr>
-              <a:defRPr sz="1000" b="1">
-                <a:solidFill>
-                  <a:srgbClr val="06B6D4"/>
-                </a:solidFill>
-              </a:defRPr>
-            </a:pPr>
-            <a:r>
-              <a:t>BACKEND FRAMEWORK</a:t>
-            </a:r>
-          </a:p>
-          <a:p>
-            <a:pPr>
-              <a:defRPr sz="1700" b="1">
-                <a:solidFill>
-                  <a:srgbClr val="FFFFFF"/>
-                </a:solidFill>
-              </a:defRPr>
-            </a:pPr>
-            <a:r>
-              <a:t>FastAPI</a:t>
-            </a:r>
-          </a:p>
-          <a:p>
-            <a:pPr>
-              <a:defRPr sz="1150">
-                <a:solidFill>
-                  <a:srgbClr val="94A3B8"/>
-                </a:solidFill>
-              </a:defRPr>
-            </a:pPr>
-            <a:r>
-              <a:t>High-performance asynchronous Python framework with native Pydantic validation and auto-generated Swagger UI.</a:t>
-            </a:r>
-          </a:p>
-        </p:txBody>
-      </p:sp>
-      <p:sp>
-        <p:nvSpPr>
-          <p:cNvPr id="7" name="Rounded Rectangle 6"/>
+              <a:defRPr sz="1050">
+                <a:solidFill>
+                  <a:srgbClr val="0F172A"/>
+                </a:solidFill>
+              </a:defRPr>
+            </a:pPr>
+            <a:r>
+              <a:t>1. Upload: User selects document type and uploads PDF/JPG/PNG via Web UI or API.</a:t>
+            </a:r>
+          </a:p>
+        </p:txBody>
+      </p:sp>
+      <p:sp>
+        <p:nvSpPr>
+          <p:cNvPr id="8" name="Rounded Rectangle 7"/>
           <p:cNvSpPr/>
           <p:nvPr/>
         </p:nvSpPr>
         <p:spPr>
           <a:xfrm>
-            <a:off x="4297680" y="1645920"/>
-            <a:ext cx="3383280" cy="2011680"/>
+            <a:off x="6126480" y="1371600"/>
+            <a:ext cx="5212080" cy="868680"/>
           </a:xfrm>
           <a:prstGeom prst="roundRect">
             <a:avLst/>
           </a:prstGeom>
           <a:solidFill>
-            <a:srgbClr val="1E293B"/>
+            <a:srgbClr val="FFFFFF"/>
           </a:solidFill>
           <a:ln w="12700">
             <a:solidFill>
-              <a:srgbClr val="334155"/>
+              <a:srgbClr val="E2E8F0"/>
             </a:solidFill>
           </a:ln>
         </p:spPr>
@@ -5125,14 +6614,14 @@
       </p:sp>
       <p:sp>
         <p:nvSpPr>
-          <p:cNvPr id="8" name="TextBox 7"/>
+          <p:cNvPr id="9" name="TextBox 8"/>
           <p:cNvSpPr txBox="1"/>
           <p:nvPr/>
         </p:nvSpPr>
         <p:spPr>
           <a:xfrm>
-            <a:off x="4480560" y="1828800"/>
-            <a:ext cx="3017520" cy="1645920"/>
+            <a:off x="6309360" y="1444752"/>
+            <a:ext cx="4846320" cy="731520"/>
           </a:xfrm>
           <a:prstGeom prst="rect">
             <a:avLst/>
@@ -5146,62 +6635,38 @@
           <a:lstStyle/>
           <a:p>
             <a:pPr>
-              <a:defRPr sz="1000" b="1">
-                <a:solidFill>
-                  <a:srgbClr val="06B6D4"/>
-                </a:solidFill>
-              </a:defRPr>
-            </a:pPr>
-            <a:r>
-              <a:t>AI &amp; OCR ENGINE</a:t>
-            </a:r>
-          </a:p>
-          <a:p>
-            <a:pPr>
-              <a:defRPr sz="1700" b="1">
-                <a:solidFill>
-                  <a:srgbClr val="FFFFFF"/>
-                </a:solidFill>
-              </a:defRPr>
-            </a:pPr>
-            <a:r>
-              <a:t>Gemini 3.6 Flash</a:t>
-            </a:r>
-          </a:p>
-          <a:p>
-            <a:pPr>
-              <a:defRPr sz="1150">
-                <a:solidFill>
-                  <a:srgbClr val="94A3B8"/>
-                </a:solidFill>
-              </a:defRPr>
-            </a:pPr>
-            <a:r>
-              <a:t>State-of-the-art vision LLM with multimodal input and strict JSON output mode; eliminates fragile Tesseract OCR setups.</a:t>
-            </a:r>
-          </a:p>
-        </p:txBody>
-      </p:sp>
-      <p:sp>
-        <p:nvSpPr>
-          <p:cNvPr id="9" name="Rounded Rectangle 8"/>
+              <a:defRPr sz="1050">
+                <a:solidFill>
+                  <a:srgbClr val="0F172A"/>
+                </a:solidFill>
+              </a:defRPr>
+            </a:pPr>
+            <a:r>
+              <a:t>2. Document Validation: Validates format, readability, file integrity, and enforces max 3 pages limit.</a:t>
+            </a:r>
+          </a:p>
+        </p:txBody>
+      </p:sp>
+      <p:sp>
+        <p:nvSpPr>
+          <p:cNvPr id="10" name="Rounded Rectangle 9"/>
           <p:cNvSpPr/>
           <p:nvPr/>
         </p:nvSpPr>
         <p:spPr>
           <a:xfrm>
-            <a:off x="7863840" y="1645920"/>
-            <a:ext cx="3383280" cy="2011680"/>
+            <a:off x="731520" y="2331720"/>
+            <a:ext cx="5212080" cy="868680"/>
           </a:xfrm>
           <a:prstGeom prst="roundRect">
             <a:avLst/>
           </a:prstGeom>
           <a:solidFill>
-            <a:srgbClr val="1E293B"/>
+            <a:srgbClr val="FFFFFF"/>
           </a:solidFill>
           <a:ln w="12700">
             <a:solidFill>
-              <a:srgbClr val="334155"/>
+              <a:srgbClr val="E2E8F0"/>
             </a:solidFill>
           </a:ln>
         </p:spPr>
@@ -5229,14 +6694,14 @@
       </p:sp>
       <p:sp>
         <p:nvSpPr>
-          <p:cNvPr id="10" name="TextBox 9"/>
+          <p:cNvPr id="11" name="TextBox 10"/>
           <p:cNvSpPr txBox="1"/>
           <p:nvPr/>
         </p:nvSpPr>
         <p:spPr>
           <a:xfrm>
-            <a:off x="8046720" y="1828800"/>
-            <a:ext cx="3017520" cy="1645920"/>
+            <a:off x="914400" y="2404872"/>
+            <a:ext cx="4846320" cy="731520"/>
           </a:xfrm>
           <a:prstGeom prst="rect">
             <a:avLst/>
@@ -5250,62 +6715,38 @@
           <a:lstStyle/>
           <a:p>
             <a:pPr>
-              <a:defRPr sz="1000" b="1">
-                <a:solidFill>
-                  <a:srgbClr val="06B6D4"/>
-                </a:solidFill>
-              </a:defRPr>
-            </a:pPr>
-            <a:r>
-              <a:t>PDF ENGINE</a:t>
-            </a:r>
-          </a:p>
-          <a:p>
-            <a:pPr>
-              <a:defRPr sz="1700" b="1">
-                <a:solidFill>
-                  <a:srgbClr val="FFFFFF"/>
-                </a:solidFill>
-              </a:defRPr>
-            </a:pPr>
-            <a:r>
-              <a:t>PyMuPDF (fitz)</a:t>
-            </a:r>
-          </a:p>
-          <a:p>
-            <a:pPr>
-              <a:defRPr sz="1150">
-                <a:solidFill>
-                  <a:srgbClr val="94A3B8"/>
-                </a:solidFill>
-              </a:defRPr>
-            </a:pPr>
-            <a:r>
-              <a:t>Ultra-fast PDF parser that extracts embedded text and renders page images at 200 DPI without external poppler binary dependencies.</a:t>
-            </a:r>
-          </a:p>
-        </p:txBody>
-      </p:sp>
-      <p:sp>
-        <p:nvSpPr>
-          <p:cNvPr id="11" name="Rounded Rectangle 10"/>
+              <a:defRPr sz="1050">
+                <a:solidFill>
+                  <a:srgbClr val="0F172A"/>
+                </a:solidFill>
+              </a:defRPr>
+            </a:pPr>
+            <a:r>
+              <a:t>3. Text Extraction / OCR: PyMuPDF extracts embedded text and renders 200 DPI page images for vision.</a:t>
+            </a:r>
+          </a:p>
+        </p:txBody>
+      </p:sp>
+      <p:sp>
+        <p:nvSpPr>
+          <p:cNvPr id="12" name="Rounded Rectangle 11"/>
           <p:cNvSpPr/>
           <p:nvPr/>
         </p:nvSpPr>
         <p:spPr>
           <a:xfrm>
-            <a:off x="731520" y="3931920"/>
-            <a:ext cx="3383280" cy="2011680"/>
+            <a:off x="6126480" y="2331720"/>
+            <a:ext cx="5212080" cy="868680"/>
           </a:xfrm>
           <a:prstGeom prst="roundRect">
             <a:avLst/>
           </a:prstGeom>
           <a:solidFill>
-            <a:srgbClr val="1E293B"/>
+            <a:srgbClr val="FFFFFF"/>
           </a:solidFill>
           <a:ln w="12700">
             <a:solidFill>
-              <a:srgbClr val="334155"/>
+              <a:srgbClr val="E2E8F0"/>
             </a:solidFill>
           </a:ln>
         </p:spPr>
@@ -5333,14 +6774,14 @@
       </p:sp>
       <p:sp>
         <p:nvSpPr>
-          <p:cNvPr id="12" name="TextBox 11"/>
+          <p:cNvPr id="13" name="TextBox 12"/>
           <p:cNvSpPr txBox="1"/>
           <p:nvPr/>
         </p:nvSpPr>
         <p:spPr>
           <a:xfrm>
-            <a:off x="914400" y="4114800"/>
-            <a:ext cx="3017520" cy="1645920"/>
+            <a:off x="6309360" y="2404872"/>
+            <a:ext cx="4846320" cy="731520"/>
           </a:xfrm>
           <a:prstGeom prst="rect">
             <a:avLst/>
@@ -5354,62 +6795,38 @@
           <a:lstStyle/>
           <a:p>
             <a:pPr>
-              <a:defRPr sz="1000" b="1">
-                <a:solidFill>
-                  <a:srgbClr val="06B6D4"/>
-                </a:solidFill>
-              </a:defRPr>
-            </a:pPr>
-            <a:r>
-              <a:t>PERSISTENCE LAYER</a:t>
-            </a:r>
-          </a:p>
-          <a:p>
-            <a:pPr>
-              <a:defRPr sz="1700" b="1">
-                <a:solidFill>
-                  <a:srgbClr val="FFFFFF"/>
-                </a:solidFill>
-              </a:defRPr>
-            </a:pPr>
-            <a:r>
-              <a:t>SQLAlchemy + SQLite</a:t>
-            </a:r>
-          </a:p>
-          <a:p>
-            <a:pPr>
-              <a:defRPr sz="1150">
-                <a:solidFill>
-                  <a:srgbClr val="94A3B8"/>
-                </a:solidFill>
-              </a:defRPr>
-            </a:pPr>
-            <a:r>
-              <a:t>Zero-config embedded relational database enabling instant portability and reproducible local and cloud evaluation.</a:t>
-            </a:r>
-          </a:p>
-        </p:txBody>
-      </p:sp>
-      <p:sp>
-        <p:nvSpPr>
-          <p:cNvPr id="13" name="Rounded Rectangle 12"/>
+              <a:defRPr sz="1050">
+                <a:solidFill>
+                  <a:srgbClr val="0F172A"/>
+                </a:solidFill>
+              </a:defRPr>
+            </a:pPr>
+            <a:r>
+              <a:t>4. AI Field &amp; Table Extraction: Gemini 3.6 Flash extracts meaningful visible data with JSON mode.</a:t>
+            </a:r>
+          </a:p>
+        </p:txBody>
+      </p:sp>
+      <p:sp>
+        <p:nvSpPr>
+          <p:cNvPr id="14" name="Rounded Rectangle 13"/>
           <p:cNvSpPr/>
           <p:nvPr/>
         </p:nvSpPr>
         <p:spPr>
           <a:xfrm>
-            <a:off x="4297680" y="3931920"/>
-            <a:ext cx="3383280" cy="2011680"/>
+            <a:off x="731520" y="3291840"/>
+            <a:ext cx="5212080" cy="868680"/>
           </a:xfrm>
           <a:prstGeom prst="roundRect">
             <a:avLst/>
           </a:prstGeom>
           <a:solidFill>
-            <a:srgbClr val="1E293B"/>
+            <a:srgbClr val="FFFFFF"/>
           </a:solidFill>
           <a:ln w="12700">
             <a:solidFill>
-              <a:srgbClr val="334155"/>
+              <a:srgbClr val="E2E8F0"/>
             </a:solidFill>
           </a:ln>
         </p:spPr>
@@ -5437,14 +6854,14 @@
       </p:sp>
       <p:sp>
         <p:nvSpPr>
-          <p:cNvPr id="14" name="TextBox 13"/>
+          <p:cNvPr id="15" name="TextBox 14"/>
           <p:cNvSpPr txBox="1"/>
           <p:nvPr/>
         </p:nvSpPr>
         <p:spPr>
           <a:xfrm>
-            <a:off x="4480560" y="4114800"/>
-            <a:ext cx="3017520" cy="1645920"/>
+            <a:off x="914400" y="3364992"/>
+            <a:ext cx="4846320" cy="731520"/>
           </a:xfrm>
           <a:prstGeom prst="rect">
             <a:avLst/>
@@ -5458,62 +6875,38 @@
           <a:lstStyle/>
           <a:p>
             <a:pPr>
-              <a:defRPr sz="1000" b="1">
-                <a:solidFill>
-                  <a:srgbClr val="06B6D4"/>
-                </a:solidFill>
-              </a:defRPr>
-            </a:pPr>
-            <a:r>
-              <a:t>FRONTEND DASHBOARD</a:t>
-            </a:r>
-          </a:p>
-          <a:p>
-            <a:pPr>
-              <a:defRPr sz="1700" b="1">
-                <a:solidFill>
-                  <a:srgbClr val="FFFFFF"/>
-                </a:solidFill>
-              </a:defRPr>
-            </a:pPr>
-            <a:r>
-              <a:t>Jinja2 + Pure CSS</a:t>
-            </a:r>
-          </a:p>
-          <a:p>
-            <a:pPr>
-              <a:defRPr sz="1150">
-                <a:solidFill>
-                  <a:srgbClr val="94A3B8"/>
-                </a:solidFill>
-              </a:defRPr>
-            </a:pPr>
-            <a:r>
-              <a:t>Server-rendered responsive UI with no npm/webpack build step, ensuring lightweight, lightning-fast dashboard rendering.</a:t>
-            </a:r>
-          </a:p>
-        </p:txBody>
-      </p:sp>
-      <p:sp>
-        <p:nvSpPr>
-          <p:cNvPr id="15" name="Rounded Rectangle 14"/>
+              <a:defRPr sz="1050">
+                <a:solidFill>
+                  <a:srgbClr val="0F172A"/>
+                </a:solidFill>
+              </a:defRPr>
+            </a:pPr>
+            <a:r>
+              <a:t>5. Structured JSON Generation: Builds normalized schema: values, confidence scores, and source evidence.</a:t>
+            </a:r>
+          </a:p>
+        </p:txBody>
+      </p:sp>
+      <p:sp>
+        <p:nvSpPr>
+          <p:cNvPr id="16" name="Rounded Rectangle 15"/>
           <p:cNvSpPr/>
           <p:nvPr/>
         </p:nvSpPr>
         <p:spPr>
           <a:xfrm>
-            <a:off x="7863840" y="3931920"/>
-            <a:ext cx="3383280" cy="2011680"/>
+            <a:off x="6126480" y="3291840"/>
+            <a:ext cx="5212080" cy="868680"/>
           </a:xfrm>
           <a:prstGeom prst="roundRect">
             <a:avLst/>
           </a:prstGeom>
           <a:solidFill>
-            <a:srgbClr val="1E293B"/>
+            <a:srgbClr val="FFFFFF"/>
           </a:solidFill>
           <a:ln w="12700">
             <a:solidFill>
-              <a:srgbClr val="334155"/>
+              <a:srgbClr val="E2E8F0"/>
             </a:solidFill>
           </a:ln>
         </p:spPr>
@@ -5541,14 +6934,14 @@
       </p:sp>
       <p:sp>
         <p:nvSpPr>
-          <p:cNvPr id="16" name="TextBox 15"/>
+          <p:cNvPr id="17" name="TextBox 16"/>
           <p:cNvSpPr txBox="1"/>
           <p:nvPr/>
         </p:nvSpPr>
         <p:spPr>
           <a:xfrm>
-            <a:off x="8046720" y="4114800"/>
-            <a:ext cx="3017520" cy="1645920"/>
+            <a:off x="6309360" y="3364992"/>
+            <a:ext cx="4846320" cy="731520"/>
           </a:xfrm>
           <a:prstGeom prst="rect">
             <a:avLst/>
@@ -5562,38 +6955,334 @@
           <a:lstStyle/>
           <a:p>
             <a:pPr>
-              <a:defRPr sz="1000" b="1">
-                <a:solidFill>
-                  <a:srgbClr val="06B6D4"/>
-                </a:solidFill>
-              </a:defRPr>
-            </a:pPr>
-            <a:r>
-              <a:t>DEPLOYMENT &amp; CLOUD</a:t>
-            </a:r>
-          </a:p>
-          <a:p>
-            <a:pPr>
-              <a:defRPr sz="1700" b="1">
-                <a:solidFill>
-                  <a:srgbClr val="FFFFFF"/>
-                </a:solidFill>
-              </a:defRPr>
-            </a:pPr>
-            <a:r>
-              <a:t>Docker on Render</a:t>
-            </a:r>
-          </a:p>
-          <a:p>
-            <a:pPr>
-              <a:defRPr sz="1150">
-                <a:solidFill>
-                  <a:srgbClr val="94A3B8"/>
-                </a:solidFill>
-              </a:defRPr>
-            </a:pPr>
-            <a:r>
-              <a:t>Hermetic container deployment based on python:3.12-slim with dynamic port mapping for one-click cloud hosting.</a:t>
+              <a:defRPr sz="1050">
+                <a:solidFill>
+                  <a:srgbClr val="0F172A"/>
+                </a:solidFill>
+              </a:defRPr>
+            </a:pPr>
+            <a:r>
+              <a:t>6. Financial Validation: Independent calculation engine reconciles document-specific accounting formulas.</a:t>
+            </a:r>
+          </a:p>
+        </p:txBody>
+      </p:sp>
+      <p:sp>
+        <p:nvSpPr>
+          <p:cNvPr id="18" name="Rounded Rectangle 17"/>
+          <p:cNvSpPr/>
+          <p:nvPr/>
+        </p:nvSpPr>
+        <p:spPr>
+          <a:xfrm>
+            <a:off x="731520" y="4251960"/>
+            <a:ext cx="5212080" cy="868680"/>
+          </a:xfrm>
+          <a:prstGeom prst="roundRect">
+            <a:avLst/>
+          </a:prstGeom>
+          <a:solidFill>
+            <a:srgbClr val="FFFFFF"/>
+          </a:solidFill>
+          <a:ln w="12700">
+            <a:solidFill>
+              <a:srgbClr val="E2E8F0"/>
+            </a:solidFill>
+          </a:ln>
+        </p:spPr>
+        <p:style>
+          <a:lnRef idx="1">
+            <a:schemeClr val="accent1"/>
+          </a:lnRef>
+          <a:fillRef idx="3">
+            <a:schemeClr val="accent1"/>
+          </a:fillRef>
+          <a:effectRef idx="2">
+            <a:schemeClr val="accent1"/>
+          </a:effectRef>
+          <a:fontRef idx="minor">
+            <a:schemeClr val="lt1"/>
+          </a:fontRef>
+        </p:style>
+        <p:txBody>
+          <a:bodyPr rtlCol="0" anchor="ctr"/>
+          <a:lstStyle/>
+          <a:p>
+            <a:pPr algn="ctr"/>
+          </a:p>
+        </p:txBody>
+      </p:sp>
+      <p:sp>
+        <p:nvSpPr>
+          <p:cNvPr id="19" name="TextBox 18"/>
+          <p:cNvSpPr txBox="1"/>
+          <p:nvPr/>
+        </p:nvSpPr>
+        <p:spPr>
+          <a:xfrm>
+            <a:off x="914400" y="4325112"/>
+            <a:ext cx="4846320" cy="731520"/>
+          </a:xfrm>
+          <a:prstGeom prst="rect">
+            <a:avLst/>
+          </a:prstGeom>
+          <a:noFill/>
+        </p:spPr>
+        <p:txBody>
+          <a:bodyPr wrap="square">
+            <a:spAutoFit/>
+          </a:bodyPr>
+          <a:lstStyle/>
+          <a:p>
+            <a:pPr>
+              <a:defRPr sz="1050">
+                <a:solidFill>
+                  <a:srgbClr val="0F172A"/>
+                </a:solidFill>
+              </a:defRPr>
+            </a:pPr>
+            <a:r>
+              <a:t>7. Evidence &amp; Confidence: Calculates overall confidence and maps exact text quotes per field.</a:t>
+            </a:r>
+          </a:p>
+        </p:txBody>
+      </p:sp>
+      <p:sp>
+        <p:nvSpPr>
+          <p:cNvPr id="20" name="Rounded Rectangle 19"/>
+          <p:cNvSpPr/>
+          <p:nvPr/>
+        </p:nvSpPr>
+        <p:spPr>
+          <a:xfrm>
+            <a:off x="6126480" y="4251960"/>
+            <a:ext cx="5212080" cy="868680"/>
+          </a:xfrm>
+          <a:prstGeom prst="roundRect">
+            <a:avLst/>
+          </a:prstGeom>
+          <a:solidFill>
+            <a:srgbClr val="FFFFFF"/>
+          </a:solidFill>
+          <a:ln w="12700">
+            <a:solidFill>
+              <a:srgbClr val="E2E8F0"/>
+            </a:solidFill>
+          </a:ln>
+        </p:spPr>
+        <p:style>
+          <a:lnRef idx="1">
+            <a:schemeClr val="accent1"/>
+          </a:lnRef>
+          <a:fillRef idx="3">
+            <a:schemeClr val="accent1"/>
+          </a:fillRef>
+          <a:effectRef idx="2">
+            <a:schemeClr val="accent1"/>
+          </a:effectRef>
+          <a:fontRef idx="minor">
+            <a:schemeClr val="lt1"/>
+          </a:fontRef>
+        </p:style>
+        <p:txBody>
+          <a:bodyPr rtlCol="0" anchor="ctr"/>
+          <a:lstStyle/>
+          <a:p>
+            <a:pPr algn="ctr"/>
+          </a:p>
+        </p:txBody>
+      </p:sp>
+      <p:sp>
+        <p:nvSpPr>
+          <p:cNvPr id="21" name="TextBox 20"/>
+          <p:cNvSpPr txBox="1"/>
+          <p:nvPr/>
+        </p:nvSpPr>
+        <p:spPr>
+          <a:xfrm>
+            <a:off x="6309360" y="4325112"/>
+            <a:ext cx="4846320" cy="731520"/>
+          </a:xfrm>
+          <a:prstGeom prst="rect">
+            <a:avLst/>
+          </a:prstGeom>
+          <a:noFill/>
+        </p:spPr>
+        <p:txBody>
+          <a:bodyPr wrap="square">
+            <a:spAutoFit/>
+          </a:bodyPr>
+          <a:lstStyle/>
+          <a:p>
+            <a:pPr>
+              <a:defRPr sz="1050">
+                <a:solidFill>
+                  <a:srgbClr val="0F172A"/>
+                </a:solidFill>
+              </a:defRPr>
+            </a:pPr>
+            <a:r>
+              <a:t>8. Store Result: Persists full JSON payload and indexed metadata into SQLite database.</a:t>
+            </a:r>
+          </a:p>
+        </p:txBody>
+      </p:sp>
+      <p:sp>
+        <p:nvSpPr>
+          <p:cNvPr id="22" name="Rounded Rectangle 21"/>
+          <p:cNvSpPr/>
+          <p:nvPr/>
+        </p:nvSpPr>
+        <p:spPr>
+          <a:xfrm>
+            <a:off x="731520" y="5212080"/>
+            <a:ext cx="5212080" cy="868680"/>
+          </a:xfrm>
+          <a:prstGeom prst="roundRect">
+            <a:avLst/>
+          </a:prstGeom>
+          <a:solidFill>
+            <a:srgbClr val="FFFFFF"/>
+          </a:solidFill>
+          <a:ln w="12700">
+            <a:solidFill>
+              <a:srgbClr val="E2E8F0"/>
+            </a:solidFill>
+          </a:ln>
+        </p:spPr>
+        <p:style>
+          <a:lnRef idx="1">
+            <a:schemeClr val="accent1"/>
+          </a:lnRef>
+          <a:fillRef idx="3">
+            <a:schemeClr val="accent1"/>
+          </a:fillRef>
+          <a:effectRef idx="2">
+            <a:schemeClr val="accent1"/>
+          </a:effectRef>
+          <a:fontRef idx="minor">
+            <a:schemeClr val="lt1"/>
+          </a:fontRef>
+        </p:style>
+        <p:txBody>
+          <a:bodyPr rtlCol="0" anchor="ctr"/>
+          <a:lstStyle/>
+          <a:p>
+            <a:pPr algn="ctr"/>
+          </a:p>
+        </p:txBody>
+      </p:sp>
+      <p:sp>
+        <p:nvSpPr>
+          <p:cNvPr id="23" name="TextBox 22"/>
+          <p:cNvSpPr txBox="1"/>
+          <p:nvPr/>
+        </p:nvSpPr>
+        <p:spPr>
+          <a:xfrm>
+            <a:off x="914400" y="5285232"/>
+            <a:ext cx="4846320" cy="731520"/>
+          </a:xfrm>
+          <a:prstGeom prst="rect">
+            <a:avLst/>
+          </a:prstGeom>
+          <a:noFill/>
+        </p:spPr>
+        <p:txBody>
+          <a:bodyPr wrap="square">
+            <a:spAutoFit/>
+          </a:bodyPr>
+          <a:lstStyle/>
+          <a:p>
+            <a:pPr>
+              <a:defRPr sz="1050">
+                <a:solidFill>
+                  <a:srgbClr val="0F172A"/>
+                </a:solidFill>
+              </a:defRPr>
+            </a:pPr>
+            <a:r>
+              <a:t>9. PASS / FAILED Status: Assigns processing status based on file readability and pipeline success.</a:t>
+            </a:r>
+          </a:p>
+        </p:txBody>
+      </p:sp>
+      <p:sp>
+        <p:nvSpPr>
+          <p:cNvPr id="24" name="Rounded Rectangle 23"/>
+          <p:cNvSpPr/>
+          <p:nvPr/>
+        </p:nvSpPr>
+        <p:spPr>
+          <a:xfrm>
+            <a:off x="6126480" y="5212080"/>
+            <a:ext cx="5212080" cy="868680"/>
+          </a:xfrm>
+          <a:prstGeom prst="roundRect">
+            <a:avLst/>
+          </a:prstGeom>
+          <a:solidFill>
+            <a:srgbClr val="FFFFFF"/>
+          </a:solidFill>
+          <a:ln w="12700">
+            <a:solidFill>
+              <a:srgbClr val="E2E8F0"/>
+            </a:solidFill>
+          </a:ln>
+        </p:spPr>
+        <p:style>
+          <a:lnRef idx="1">
+            <a:schemeClr val="accent1"/>
+          </a:lnRef>
+          <a:fillRef idx="3">
+            <a:schemeClr val="accent1"/>
+          </a:fillRef>
+          <a:effectRef idx="2">
+            <a:schemeClr val="accent1"/>
+          </a:effectRef>
+          <a:fontRef idx="minor">
+            <a:schemeClr val="lt1"/>
+          </a:fontRef>
+        </p:style>
+        <p:txBody>
+          <a:bodyPr rtlCol="0" anchor="ctr"/>
+          <a:lstStyle/>
+          <a:p>
+            <a:pPr algn="ctr"/>
+          </a:p>
+        </p:txBody>
+      </p:sp>
+      <p:sp>
+        <p:nvSpPr>
+          <p:cNvPr id="25" name="TextBox 24"/>
+          <p:cNvSpPr txBox="1"/>
+          <p:nvPr/>
+        </p:nvSpPr>
+        <p:spPr>
+          <a:xfrm>
+            <a:off x="6309360" y="5285232"/>
+            <a:ext cx="4846320" cy="731520"/>
+          </a:xfrm>
+          <a:prstGeom prst="rect">
+            <a:avLst/>
+          </a:prstGeom>
+          <a:noFill/>
+        </p:spPr>
+        <p:txBody>
+          <a:bodyPr wrap="square">
+            <a:spAutoFit/>
+          </a:bodyPr>
+          <a:lstStyle/>
+          <a:p>
+            <a:pPr>
+              <a:defRPr sz="1050">
+                <a:solidFill>
+                  <a:srgbClr val="0F172A"/>
+                </a:solidFill>
+              </a:defRPr>
+            </a:pPr>
+            <a:r>
+              <a:t>10. Dashboard &amp; API Delivery: Serves structured JSON to API caller and renders interactive view on dashboard.</a:t>
             </a:r>
           </a:p>
         </p:txBody>
@@ -5631,7 +7320,7 @@
             <a:avLst/>
           </a:prstGeom>
           <a:solidFill>
-            <a:srgbClr val="0F172A"/>
+            <a:srgbClr val="F8FAFC"/>
           </a:solidFill>
           <a:ln>
             <a:noFill/>
@@ -5667,8 +7356,8 @@
         </p:nvSpPr>
         <p:spPr>
           <a:xfrm>
-            <a:off x="731520" y="457200"/>
-            <a:ext cx="10698480" cy="365760"/>
+            <a:off x="731520" y="365760"/>
+            <a:ext cx="10698480" cy="274320"/>
           </a:xfrm>
           <a:prstGeom prst="rect">
             <a:avLst/>
@@ -5676,20 +7365,20 @@
           <a:noFill/>
         </p:spPr>
         <p:txBody>
-          <a:bodyPr wrap="square">
+          <a:bodyPr wrap="none">
             <a:spAutoFit/>
           </a:bodyPr>
           <a:lstStyle/>
           <a:p>
             <a:pPr>
-              <a:defRPr sz="1100" b="1">
-                <a:solidFill>
-                  <a:srgbClr val="06B6D4"/>
-                </a:solidFill>
-              </a:defRPr>
-            </a:pPr>
-            <a:r>
-              <a:t>AI ENGINEER INTERNSHIP CASE STUDY</a:t>
+              <a:defRPr sz="1000" b="1">
+                <a:solidFill>
+                  <a:srgbClr val="2563EB"/>
+                </a:solidFill>
+              </a:defRPr>
+            </a:pPr>
+            <a:r>
+              <a:t>DOCUMENT TYPES &amp; EXTRACTION</a:t>
             </a:r>
           </a:p>
         </p:txBody>
@@ -5702,8 +7391,8 @@
         </p:nvSpPr>
         <p:spPr>
           <a:xfrm>
-            <a:off x="731520" y="777240"/>
-            <a:ext cx="10698480" cy="731520"/>
+            <a:off x="731520" y="640080"/>
+            <a:ext cx="10698480" cy="548640"/>
           </a:xfrm>
           <a:prstGeom prst="rect">
             <a:avLst/>
@@ -5711,44 +7400,79 @@
           <a:noFill/>
         </p:spPr>
         <p:txBody>
-          <a:bodyPr wrap="square">
+          <a:bodyPr wrap="none">
             <a:spAutoFit/>
           </a:bodyPr>
           <a:lstStyle/>
           <a:p>
             <a:pPr>
-              <a:defRPr sz="2600" b="1">
-                <a:solidFill>
-                  <a:srgbClr val="FFFFFF"/>
-                </a:solidFill>
-              </a:defRPr>
-            </a:pPr>
-            <a:r>
-              <a:t>Document Extraction Strategy Across 4 Document Types</a:t>
-            </a:r>
-          </a:p>
-        </p:txBody>
-      </p:sp>
-      <p:sp>
-        <p:nvSpPr>
-          <p:cNvPr id="5" name="Rounded Rectangle 4"/>
+              <a:defRPr sz="2200" b="1">
+                <a:solidFill>
+                  <a:srgbClr val="0F172A"/>
+                </a:solidFill>
+              </a:defRPr>
+            </a:pPr>
+            <a:r>
+              <a:t>Supported Financial Documents</a:t>
+            </a:r>
+          </a:p>
+        </p:txBody>
+      </p:sp>
+      <p:sp>
+        <p:nvSpPr>
+          <p:cNvPr id="5" name="TextBox 4"/>
+          <p:cNvSpPr txBox="1"/>
+          <p:nvPr/>
+        </p:nvSpPr>
+        <p:spPr>
+          <a:xfrm>
+            <a:off x="731520" y="6400800"/>
+            <a:ext cx="10698480" cy="274320"/>
+          </a:xfrm>
+          <a:prstGeom prst="rect">
+            <a:avLst/>
+          </a:prstGeom>
+          <a:noFill/>
+        </p:spPr>
+        <p:txBody>
+          <a:bodyPr wrap="none">
+            <a:spAutoFit/>
+          </a:bodyPr>
+          <a:lstStyle/>
+          <a:p>
+            <a:pPr>
+              <a:defRPr sz="900">
+                <a:solidFill>
+                  <a:srgbClr val="94A3B8"/>
+                </a:solidFill>
+              </a:defRPr>
+            </a:pPr>
+            <a:r>
+              <a:t>Intelligent Document Extraction, Validation &amp; API Platform  |  AI Engineer Internship Technical Case Study</a:t>
+            </a:r>
+          </a:p>
+        </p:txBody>
+      </p:sp>
+      <p:sp>
+        <p:nvSpPr>
+          <p:cNvPr id="6" name="Rounded Rectangle 5"/>
           <p:cNvSpPr/>
           <p:nvPr/>
         </p:nvSpPr>
         <p:spPr>
           <a:xfrm>
-            <a:off x="731520" y="1645920"/>
-            <a:ext cx="2560320" cy="4572000"/>
+            <a:off x="731520" y="1371600"/>
+            <a:ext cx="2560320" cy="4754880"/>
           </a:xfrm>
           <a:prstGeom prst="roundRect">
             <a:avLst/>
           </a:prstGeom>
           <a:solidFill>
-            <a:srgbClr val="1E293B"/>
+            <a:srgbClr val="FFFFFF"/>
           </a:solidFill>
           <a:ln w="12700">
             <a:solidFill>
-              <a:srgbClr val="334155"/>
+              <a:srgbClr val="E2E8F0"/>
             </a:solidFill>
           </a:ln>
         </p:spPr>
@@ -5776,14 +7500,14 @@
       </p:sp>
       <p:sp>
         <p:nvSpPr>
-          <p:cNvPr id="6" name="TextBox 5"/>
+          <p:cNvPr id="7" name="TextBox 6"/>
           <p:cNvSpPr txBox="1"/>
           <p:nvPr/>
         </p:nvSpPr>
         <p:spPr>
           <a:xfrm>
-            <a:off x="914400" y="1828800"/>
-            <a:ext cx="2194560" cy="4114800"/>
+            <a:off x="868680" y="1554480"/>
+            <a:ext cx="2286000" cy="4389120"/>
           </a:xfrm>
           <a:prstGeom prst="rect">
             <a:avLst/>
@@ -5799,66 +7523,82 @@
             <a:pPr>
               <a:defRPr sz="1600" b="1">
                 <a:solidFill>
-                  <a:srgbClr val="3B82F6"/>
-                </a:solidFill>
-              </a:defRPr>
-            </a:pPr>
-            <a:r>
-              <a:t>Invoice / Receipt</a:t>
-            </a:r>
-          </a:p>
-          <a:p>
-            <a:br/>
-            <a:pPr>
-              <a:defRPr sz="1200">
-                <a:solidFill>
-                  <a:srgbClr val="94A3B8"/>
-                </a:solidFill>
-              </a:defRPr>
-            </a:pPr>
-            <a:r>
-              <a:t>Captures header details, line-item table (Qty, Unit Price, Amount, VAT%), subtotal, tax rate, tax amount, discount, total, cash paid, change, and rounding adjustments.</a:t>
-            </a:r>
-          </a:p>
-          <a:p>
-            <a:br/>
-            <a:pPr>
-              <a:defRPr sz="1100">
-                <a:solidFill>
-                  <a:srgbClr val="FFFFFF"/>
-                </a:solidFill>
-              </a:defRPr>
-            </a:pPr>
-            <a:r>
-              <a:t>Evidence Tracking:</a:t>
-            </a:r>
-            <a:br/>
-            <a:r>
-              <a:t>Every single field captures value, confidence score, source text quotation, and page index.</a:t>
-            </a:r>
-          </a:p>
-        </p:txBody>
-      </p:sp>
-      <p:sp>
-        <p:nvSpPr>
-          <p:cNvPr id="7" name="Rounded Rectangle 6"/>
+                  <a:srgbClr val="2563EB"/>
+                </a:solidFill>
+              </a:defRPr>
+            </a:pPr>
+            <a:r>
+              <a:t>Invoice</a:t>
+            </a:r>
+          </a:p>
+          <a:p>
+            <a:br/>
+            <a:pPr>
+              <a:defRPr sz="1000">
+                <a:solidFill>
+                  <a:srgbClr val="475569"/>
+                </a:solidFill>
+              </a:defRPr>
+            </a:pPr>
+            <a:r>
+              <a:t>Extracted Information:</a:t>
+            </a:r>
+            <a:br/>
+            <a:r>
+              <a:t>Invoice number, date, vendor, customer, currency, subtotal, tax rate, tax amount, discount, total, line items (Qty, Price, Amount, VAT%), cash/change.</a:t>
+            </a:r>
+          </a:p>
+          <a:p>
+            <a:br/>
+            <a:pPr>
+              <a:defRPr sz="1000" b="1">
+                <a:solidFill>
+                  <a:srgbClr val="0F172A"/>
+                </a:solidFill>
+              </a:defRPr>
+            </a:pPr>
+            <a:r>
+              <a:t>Validation Checks:</a:t>
+            </a:r>
+            <a:br/>
+            <a:r>
+              <a:t>• Qty × Unit Price ≈ Item Amount</a:t>
+            </a:r>
+            <a:br/>
+            <a:r>
+              <a:t>• sum(Line Items) ≈ Subtotal</a:t>
+            </a:r>
+            <a:br/>
+            <a:r>
+              <a:t>• Subtotal + Tax - Discount ≈ Total</a:t>
+            </a:r>
+            <a:br/>
+            <a:r>
+              <a:t>• Cash Paid - Total ≈ Change</a:t>
+            </a:r>
+          </a:p>
+        </p:txBody>
+      </p:sp>
+      <p:sp>
+        <p:nvSpPr>
+          <p:cNvPr id="8" name="Rounded Rectangle 7"/>
           <p:cNvSpPr/>
           <p:nvPr/>
         </p:nvSpPr>
         <p:spPr>
           <a:xfrm>
-            <a:off x="3429000" y="1645920"/>
-            <a:ext cx="2560320" cy="4572000"/>
+            <a:off x="3429000" y="1371600"/>
+            <a:ext cx="2560320" cy="4754880"/>
           </a:xfrm>
           <a:prstGeom prst="roundRect">
             <a:avLst/>
           </a:prstGeom>
           <a:solidFill>
-            <a:srgbClr val="1E293B"/>
+            <a:srgbClr val="FFFFFF"/>
           </a:solidFill>
           <a:ln w="12700">
             <a:solidFill>
-              <a:srgbClr val="334155"/>
+              <a:srgbClr val="E2E8F0"/>
             </a:solidFill>
           </a:ln>
         </p:spPr>
@@ -5886,14 +7626,14 @@
       </p:sp>
       <p:sp>
         <p:nvSpPr>
-          <p:cNvPr id="8" name="TextBox 7"/>
+          <p:cNvPr id="9" name="TextBox 8"/>
           <p:cNvSpPr txBox="1"/>
           <p:nvPr/>
         </p:nvSpPr>
         <p:spPr>
           <a:xfrm>
-            <a:off x="3611880" y="1828800"/>
-            <a:ext cx="2194560" cy="4114800"/>
+            <a:off x="3566160" y="1554480"/>
+            <a:ext cx="2286000" cy="4389120"/>
           </a:xfrm>
           <a:prstGeom prst="rect">
             <a:avLst/>
@@ -5909,7 +7649,7 @@
             <a:pPr>
               <a:defRPr sz="1600" b="1">
                 <a:solidFill>
-                  <a:srgbClr val="22C55E"/>
+                  <a:srgbClr val="2563EB"/>
                 </a:solidFill>
               </a:defRPr>
             </a:pPr>
@@ -5920,55 +7660,71 @@
           <a:p>
             <a:br/>
             <a:pPr>
-              <a:defRPr sz="1200">
-                <a:solidFill>
-                  <a:srgbClr val="94A3B8"/>
-                </a:solidFill>
-              </a:defRPr>
-            </a:pPr>
-            <a:r>
-              <a:t>Parses multi-period banking statements (e.g. HDFC Bank), Capital &amp; Liabilities schedule items, Asset components, and comparative period totals.</a:t>
-            </a:r>
-          </a:p>
-          <a:p>
-            <a:br/>
-            <a:pPr>
-              <a:defRPr sz="1100">
-                <a:solidFill>
-                  <a:srgbClr val="FFFFFF"/>
-                </a:solidFill>
-              </a:defRPr>
-            </a:pPr>
-            <a:r>
-              <a:t>Evidence Tracking:</a:t>
-            </a:r>
-            <a:br/>
-            <a:r>
-              <a:t>Every single field captures value, confidence score, source text quotation, and page index.</a:t>
-            </a:r>
-          </a:p>
-        </p:txBody>
-      </p:sp>
-      <p:sp>
-        <p:nvSpPr>
-          <p:cNvPr id="9" name="Rounded Rectangle 8"/>
+              <a:defRPr sz="1000">
+                <a:solidFill>
+                  <a:srgbClr val="475569"/>
+                </a:solidFill>
+              </a:defRPr>
+            </a:pPr>
+            <a:r>
+              <a:t>Extracted Information:</a:t>
+            </a:r>
+            <a:br/>
+            <a:r>
+              <a:t>Company name, title, as-of date, currency, reporting unit, auditor notes, comparative periods, Capital &amp; Liabilities schedule items, and Asset components.</a:t>
+            </a:r>
+          </a:p>
+          <a:p>
+            <a:br/>
+            <a:pPr>
+              <a:defRPr sz="1000" b="1">
+                <a:solidFill>
+                  <a:srgbClr val="0F172A"/>
+                </a:solidFill>
+              </a:defRPr>
+            </a:pPr>
+            <a:r>
+              <a:t>Validation Checks:</a:t>
+            </a:r>
+            <a:br/>
+            <a:r>
+              <a:t>• Total Assets ≈ Liabilities + Equity</a:t>
+            </a:r>
+            <a:br/>
+            <a:r>
+              <a:t>  (Assets ≈ Capital &amp; Liabilities)</a:t>
+            </a:r>
+            <a:br/>
+            <a:r>
+              <a:t>• sum(Asset items) ≈ Total Assets</a:t>
+            </a:r>
+            <a:br/>
+            <a:r>
+              <a:t>• sum(C&amp;L items) ≈ Total C&amp;L</a:t>
+            </a:r>
+          </a:p>
+        </p:txBody>
+      </p:sp>
+      <p:sp>
+        <p:nvSpPr>
+          <p:cNvPr id="10" name="Rounded Rectangle 9"/>
           <p:cNvSpPr/>
           <p:nvPr/>
         </p:nvSpPr>
         <p:spPr>
           <a:xfrm>
-            <a:off x="6126480" y="1645920"/>
-            <a:ext cx="2560320" cy="4572000"/>
+            <a:off x="6126480" y="1371600"/>
+            <a:ext cx="2560320" cy="4754880"/>
           </a:xfrm>
           <a:prstGeom prst="roundRect">
             <a:avLst/>
           </a:prstGeom>
           <a:solidFill>
-            <a:srgbClr val="1E293B"/>
+            <a:srgbClr val="FFFFFF"/>
           </a:solidFill>
           <a:ln w="12700">
             <a:solidFill>
-              <a:srgbClr val="334155"/>
+              <a:srgbClr val="E2E8F0"/>
             </a:solidFill>
           </a:ln>
         </p:spPr>
@@ -5996,14 +7752,14 @@
       </p:sp>
       <p:sp>
         <p:nvSpPr>
-          <p:cNvPr id="10" name="TextBox 9"/>
+          <p:cNvPr id="11" name="TextBox 10"/>
           <p:cNvSpPr txBox="1"/>
           <p:nvPr/>
         </p:nvSpPr>
         <p:spPr>
           <a:xfrm>
-            <a:off x="6309360" y="1828800"/>
-            <a:ext cx="2194560" cy="4114800"/>
+            <a:off x="6263640" y="1554480"/>
+            <a:ext cx="2286000" cy="4389120"/>
           </a:xfrm>
           <a:prstGeom prst="rect">
             <a:avLst/>
@@ -6019,66 +7775,82 @@
             <a:pPr>
               <a:defRPr sz="1600" b="1">
                 <a:solidFill>
-                  <a:srgbClr val="F59E0B"/>
-                </a:solidFill>
-              </a:defRPr>
-            </a:pPr>
-            <a:r>
-              <a:t>Profit &amp; Loss (P&amp;L)</a:t>
-            </a:r>
-          </a:p>
-          <a:p>
-            <a:br/>
-            <a:pPr>
-              <a:defRPr sz="1200">
-                <a:solidFill>
-                  <a:srgbClr val="94A3B8"/>
-                </a:solidFill>
-              </a:defRPr>
-            </a:pPr>
-            <a:r>
-              <a:t>Extracts revenue schedules (Interest earned, Other income), operating expenditures, provisions, net profit derivations, minority interest, and appropriations.</a:t>
-            </a:r>
-          </a:p>
-          <a:p>
-            <a:br/>
-            <a:pPr>
-              <a:defRPr sz="1100">
-                <a:solidFill>
-                  <a:srgbClr val="FFFFFF"/>
-                </a:solidFill>
-              </a:defRPr>
-            </a:pPr>
-            <a:r>
-              <a:t>Evidence Tracking:</a:t>
-            </a:r>
-            <a:br/>
-            <a:r>
-              <a:t>Every single field captures value, confidence score, source text quotation, and page index.</a:t>
-            </a:r>
-          </a:p>
-        </p:txBody>
-      </p:sp>
-      <p:sp>
-        <p:nvSpPr>
-          <p:cNvPr id="11" name="Rounded Rectangle 10"/>
+                  <a:srgbClr val="2563EB"/>
+                </a:solidFill>
+              </a:defRPr>
+            </a:pPr>
+            <a:r>
+              <a:t>Profit &amp; Loss</a:t>
+            </a:r>
+          </a:p>
+          <a:p>
+            <a:br/>
+            <a:pPr>
+              <a:defRPr sz="1000">
+                <a:solidFill>
+                  <a:srgbClr val="475569"/>
+                </a:solidFill>
+              </a:defRPr>
+            </a:pPr>
+            <a:r>
+              <a:t>Extracted Information:</a:t>
+            </a:r>
+            <a:br/>
+            <a:r>
+              <a:t>Company name, period, currency, revenue schedules (Interest earned, Other income), expenses (Interest, Operating, Provisions), profit derivations, appropriations.</a:t>
+            </a:r>
+          </a:p>
+          <a:p>
+            <a:br/>
+            <a:pPr>
+              <a:defRPr sz="1000" b="1">
+                <a:solidFill>
+                  <a:srgbClr val="0F172A"/>
+                </a:solidFill>
+              </a:defRPr>
+            </a:pPr>
+            <a:r>
+              <a:t>Validation Checks:</a:t>
+            </a:r>
+            <a:br/>
+            <a:r>
+              <a:t>• sum(Income items) ≈ Total Income</a:t>
+            </a:r>
+            <a:br/>
+            <a:r>
+              <a:t>• sum(Expense items) ≈ Total Expenses</a:t>
+            </a:r>
+            <a:br/>
+            <a:r>
+              <a:t>• Total Income - Total Expenses ≈ Net Profit</a:t>
+            </a:r>
+            <a:br/>
+            <a:r>
+              <a:t>• Group Profit &amp; Appropriation checks</a:t>
+            </a:r>
+          </a:p>
+        </p:txBody>
+      </p:sp>
+      <p:sp>
+        <p:nvSpPr>
+          <p:cNvPr id="12" name="Rounded Rectangle 11"/>
           <p:cNvSpPr/>
           <p:nvPr/>
         </p:nvSpPr>
         <p:spPr>
           <a:xfrm>
-            <a:off x="8823960" y="1645920"/>
-            <a:ext cx="2560320" cy="4572000"/>
+            <a:off x="8823960" y="1371600"/>
+            <a:ext cx="2560320" cy="4754880"/>
           </a:xfrm>
           <a:prstGeom prst="roundRect">
             <a:avLst/>
           </a:prstGeom>
           <a:solidFill>
-            <a:srgbClr val="1E293B"/>
+            <a:srgbClr val="FFFFFF"/>
           </a:solidFill>
           <a:ln w="12700">
             <a:solidFill>
-              <a:srgbClr val="334155"/>
+              <a:srgbClr val="E2E8F0"/>
             </a:solidFill>
           </a:ln>
         </p:spPr>
@@ -6106,14 +7878,14 @@
       </p:sp>
       <p:sp>
         <p:nvSpPr>
-          <p:cNvPr id="12" name="TextBox 11"/>
+          <p:cNvPr id="13" name="TextBox 12"/>
           <p:cNvSpPr txBox="1"/>
           <p:nvPr/>
         </p:nvSpPr>
         <p:spPr>
           <a:xfrm>
-            <a:off x="9006840" y="1828800"/>
-            <a:ext cx="2194560" cy="4114800"/>
+            <a:off x="8961120" y="1554480"/>
+            <a:ext cx="2286000" cy="4389120"/>
           </a:xfrm>
           <a:prstGeom prst="rect">
             <a:avLst/>
@@ -6129,7 +7901,7 @@
             <a:pPr>
               <a:defRPr sz="1600" b="1">
                 <a:solidFill>
-                  <a:srgbClr val="06B6D4"/>
+                  <a:srgbClr val="2563EB"/>
                 </a:solidFill>
               </a:defRPr>
             </a:pPr>
@@ -6140,31 +7912,39 @@
           <a:p>
             <a:br/>
             <a:pPr>
-              <a:defRPr sz="1200">
-                <a:solidFill>
-                  <a:srgbClr val="94A3B8"/>
-                </a:solidFill>
-              </a:defRPr>
-            </a:pPr>
-            <a:r>
-              <a:t>Processes multi-page statements: Operating activities, Investing activities, Financing activities, FX translation, Net change, Opening &amp; Closing cash reconciliation.</a:t>
-            </a:r>
-          </a:p>
-          <a:p>
-            <a:br/>
-            <a:pPr>
-              <a:defRPr sz="1100">
-                <a:solidFill>
-                  <a:srgbClr val="FFFFFF"/>
-                </a:solidFill>
-              </a:defRPr>
-            </a:pPr>
-            <a:r>
-              <a:t>Evidence Tracking:</a:t>
-            </a:r>
-            <a:br/>
-            <a:r>
-              <a:t>Every single field captures value, confidence score, source text quotation, and page index.</a:t>
+              <a:defRPr sz="1000">
+                <a:solidFill>
+                  <a:srgbClr val="475569"/>
+                </a:solidFill>
+              </a:defRPr>
+            </a:pPr>
+            <a:r>
+              <a:t>Extracted Information:</a:t>
+            </a:r>
+            <a:br/>
+            <a:r>
+              <a:t>Operating cash flow items, investing cash flow items, financing cash flow items, FX translation adjustments, net increase in cash, opening &amp; closing cash balances.</a:t>
+            </a:r>
+          </a:p>
+          <a:p>
+            <a:br/>
+            <a:pPr>
+              <a:defRPr sz="1000" b="1">
+                <a:solidFill>
+                  <a:srgbClr val="0F172A"/>
+                </a:solidFill>
+              </a:defRPr>
+            </a:pPr>
+            <a:r>
+              <a:t>Validation Checks:</a:t>
+            </a:r>
+            <a:br/>
+            <a:r>
+              <a:t>• Operating + Investing + Financing + FX ≈ Net Change</a:t>
+            </a:r>
+            <a:br/>
+            <a:r>
+              <a:t>• Opening Cash + Net Change + Adjustments ≈ Closing Cash</a:t>
             </a:r>
           </a:p>
         </p:txBody>
@@ -6202,7 +7982,7 @@
             <a:avLst/>
           </a:prstGeom>
           <a:solidFill>
-            <a:srgbClr val="0F172A"/>
+            <a:srgbClr val="F8FAFC"/>
           </a:solidFill>
           <a:ln>
             <a:noFill/>
@@ -6238,8 +8018,8 @@
         </p:nvSpPr>
         <p:spPr>
           <a:xfrm>
-            <a:off x="731520" y="457200"/>
-            <a:ext cx="10698480" cy="365760"/>
+            <a:off x="731520" y="365760"/>
+            <a:ext cx="10698480" cy="274320"/>
           </a:xfrm>
           <a:prstGeom prst="rect">
             <a:avLst/>
@@ -6247,20 +8027,20 @@
           <a:noFill/>
         </p:spPr>
         <p:txBody>
-          <a:bodyPr wrap="square">
+          <a:bodyPr wrap="none">
             <a:spAutoFit/>
           </a:bodyPr>
           <a:lstStyle/>
           <a:p>
             <a:pPr>
-              <a:defRPr sz="1100" b="1">
-                <a:solidFill>
-                  <a:srgbClr val="06B6D4"/>
-                </a:solidFill>
-              </a:defRPr>
-            </a:pPr>
-            <a:r>
-              <a:t>AI ENGINEER INTERNSHIP CASE STUDY</a:t>
+              <a:defRPr sz="1000" b="1">
+                <a:solidFill>
+                  <a:srgbClr val="2563EB"/>
+                </a:solidFill>
+              </a:defRPr>
+            </a:pPr>
+            <a:r>
+              <a:t>API DESIGN</a:t>
             </a:r>
           </a:p>
         </p:txBody>
@@ -6273,8 +8053,8 @@
         </p:nvSpPr>
         <p:spPr>
           <a:xfrm>
-            <a:off x="731520" y="777240"/>
-            <a:ext cx="10698480" cy="731520"/>
+            <a:off x="731520" y="640080"/>
+            <a:ext cx="10698480" cy="548640"/>
           </a:xfrm>
           <a:prstGeom prst="rect">
             <a:avLst/>
@@ -6282,44 +8062,79 @@
           <a:noFill/>
         </p:spPr>
         <p:txBody>
-          <a:bodyPr wrap="square">
+          <a:bodyPr wrap="none">
             <a:spAutoFit/>
           </a:bodyPr>
           <a:lstStyle/>
           <a:p>
             <a:pPr>
-              <a:defRPr sz="2600" b="1">
-                <a:solidFill>
-                  <a:srgbClr val="FFFFFF"/>
-                </a:solidFill>
-              </a:defRPr>
-            </a:pPr>
-            <a:r>
-              <a:t>Financial Validation Logic &amp; Mathematical Reconciliation</a:t>
-            </a:r>
-          </a:p>
-        </p:txBody>
-      </p:sp>
-      <p:sp>
-        <p:nvSpPr>
-          <p:cNvPr id="5" name="Rounded Rectangle 4"/>
+              <a:defRPr sz="2200" b="1">
+                <a:solidFill>
+                  <a:srgbClr val="0F172A"/>
+                </a:solidFill>
+              </a:defRPr>
+            </a:pPr>
+            <a:r>
+              <a:t>REST API &amp; JSON Contract</a:t>
+            </a:r>
+          </a:p>
+        </p:txBody>
+      </p:sp>
+      <p:sp>
+        <p:nvSpPr>
+          <p:cNvPr id="5" name="TextBox 4"/>
+          <p:cNvSpPr txBox="1"/>
+          <p:nvPr/>
+        </p:nvSpPr>
+        <p:spPr>
+          <a:xfrm>
+            <a:off x="731520" y="6400800"/>
+            <a:ext cx="10698480" cy="274320"/>
+          </a:xfrm>
+          <a:prstGeom prst="rect">
+            <a:avLst/>
+          </a:prstGeom>
+          <a:noFill/>
+        </p:spPr>
+        <p:txBody>
+          <a:bodyPr wrap="none">
+            <a:spAutoFit/>
+          </a:bodyPr>
+          <a:lstStyle/>
+          <a:p>
+            <a:pPr>
+              <a:defRPr sz="900">
+                <a:solidFill>
+                  <a:srgbClr val="94A3B8"/>
+                </a:solidFill>
+              </a:defRPr>
+            </a:pPr>
+            <a:r>
+              <a:t>Intelligent Document Extraction, Validation &amp; API Platform  |  AI Engineer Internship Technical Case Study</a:t>
+            </a:r>
+          </a:p>
+        </p:txBody>
+      </p:sp>
+      <p:sp>
+        <p:nvSpPr>
+          <p:cNvPr id="6" name="Rounded Rectangle 5"/>
           <p:cNvSpPr/>
           <p:nvPr/>
         </p:nvSpPr>
         <p:spPr>
           <a:xfrm>
-            <a:off x="731520" y="1645920"/>
-            <a:ext cx="5120640" cy="1051560"/>
+            <a:off x="731520" y="1371600"/>
+            <a:ext cx="5212080" cy="4754880"/>
           </a:xfrm>
           <a:prstGeom prst="roundRect">
             <a:avLst/>
           </a:prstGeom>
           <a:solidFill>
-            <a:srgbClr val="1E293B"/>
+            <a:srgbClr val="FFFFFF"/>
           </a:solidFill>
           <a:ln w="12700">
             <a:solidFill>
-              <a:srgbClr val="334155"/>
+              <a:srgbClr val="E2E8F0"/>
             </a:solidFill>
           </a:ln>
         </p:spPr>
@@ -6347,14 +8162,14 @@
       </p:sp>
       <p:sp>
         <p:nvSpPr>
-          <p:cNvPr id="6" name="TextBox 5"/>
+          <p:cNvPr id="7" name="TextBox 6"/>
           <p:cNvSpPr txBox="1"/>
           <p:nvPr/>
         </p:nvSpPr>
         <p:spPr>
           <a:xfrm>
-            <a:off x="914400" y="1737360"/>
-            <a:ext cx="4754880" cy="868680"/>
+            <a:off x="914400" y="1554480"/>
+            <a:ext cx="4846320" cy="4389120"/>
           </a:xfrm>
           <a:prstGeom prst="rect">
             <a:avLst/>
@@ -6368,50 +8183,163 @@
           <a:lstStyle/>
           <a:p>
             <a:pPr>
-              <a:defRPr sz="1250" b="1">
-                <a:solidFill>
-                  <a:srgbClr val="06B6D4"/>
-                </a:solidFill>
-              </a:defRPr>
-            </a:pPr>
-            <a:r>
-              <a:t>Invoice Line Total:  quantity × unit_price ≈ item_amount</a:t>
-            </a:r>
-          </a:p>
-          <a:p>
-            <a:pPr>
-              <a:defRPr sz="1100">
-                <a:solidFill>
-                  <a:srgbClr val="94A3B8"/>
-                </a:solidFill>
-              </a:defRPr>
-            </a:pPr>
-            <a:r>
-              <a:t>Validates per-item multiplication in the table. (Tolerance: ±1.0 | Missing fields: NOT_APPLICABLE)</a:t>
-            </a:r>
-          </a:p>
-        </p:txBody>
-      </p:sp>
-      <p:sp>
-        <p:nvSpPr>
-          <p:cNvPr id="7" name="Rounded Rectangle 6"/>
+              <a:defRPr sz="1500" b="1">
+                <a:solidFill>
+                  <a:srgbClr val="2563EB"/>
+                </a:solidFill>
+              </a:defRPr>
+            </a:pPr>
+            <a:r>
+              <a:t>FastAPI Endpoints Specification</a:t>
+            </a:r>
+          </a:p>
+          <a:p>
+            <a:br/>
+            <a:pPr>
+              <a:defRPr sz="1100" b="1">
+                <a:solidFill>
+                  <a:srgbClr val="0F172A"/>
+                </a:solidFill>
+              </a:defRPr>
+            </a:pPr>
+            <a:r>
+              <a:t>POST /api/v1/documents/process</a:t>
+            </a:r>
+          </a:p>
+          <a:p>
+            <a:pPr>
+              <a:defRPr sz="1000">
+                <a:solidFill>
+                  <a:srgbClr val="475569"/>
+                </a:solidFill>
+              </a:defRPr>
+            </a:pPr>
+            <a:r>
+              <a:t>multipart/form-data: file + document_type (invoice, balance_sheet, profit_and_loss, cash_flow_statement). Processes document and returns structured result.</a:t>
+            </a:r>
+          </a:p>
+          <a:p>
+            <a:br/>
+            <a:pPr>
+              <a:defRPr sz="1100" b="1">
+                <a:solidFill>
+                  <a:srgbClr val="0F172A"/>
+                </a:solidFill>
+              </a:defRPr>
+            </a:pPr>
+            <a:r>
+              <a:t>GET /api/v1/documents/{document_name}</a:t>
+            </a:r>
+          </a:p>
+          <a:p>
+            <a:pPr>
+              <a:defRPr sz="1000">
+                <a:solidFill>
+                  <a:srgbClr val="475569"/>
+                </a:solidFill>
+              </a:defRPr>
+            </a:pPr>
+            <a:r>
+              <a:t>Retrieve latest processed result, extracted data, and validation audits by document name.</a:t>
+            </a:r>
+          </a:p>
+          <a:p>
+            <a:br/>
+            <a:pPr>
+              <a:defRPr sz="1100" b="1">
+                <a:solidFill>
+                  <a:srgbClr val="0F172A"/>
+                </a:solidFill>
+              </a:defRPr>
+            </a:pPr>
+            <a:r>
+              <a:t>GET /api/v1/documents</a:t>
+            </a:r>
+          </a:p>
+          <a:p>
+            <a:pPr>
+              <a:defRPr sz="1000">
+                <a:solidFill>
+                  <a:srgbClr val="475569"/>
+                </a:solidFill>
+              </a:defRPr>
+            </a:pPr>
+            <a:r>
+              <a:t>List all processed documents with status, confidence %, and timestamp for dashboard.</a:t>
+            </a:r>
+          </a:p>
+          <a:p>
+            <a:br/>
+            <a:pPr>
+              <a:defRPr sz="1100" b="1">
+                <a:solidFill>
+                  <a:srgbClr val="0F172A"/>
+                </a:solidFill>
+              </a:defRPr>
+            </a:pPr>
+            <a:r>
+              <a:t>GET /api/v1/health</a:t>
+            </a:r>
+          </a:p>
+          <a:p>
+            <a:pPr>
+              <a:defRPr sz="1000">
+                <a:solidFill>
+                  <a:srgbClr val="475569"/>
+                </a:solidFill>
+              </a:defRPr>
+            </a:pPr>
+            <a:r>
+              <a:t>Health check endpoint returning system status.</a:t>
+            </a:r>
+          </a:p>
+          <a:p>
+            <a:br/>
+            <a:pPr>
+              <a:defRPr sz="1100" b="1">
+                <a:solidFill>
+                  <a:srgbClr val="0F172A"/>
+                </a:solidFill>
+              </a:defRPr>
+            </a:pPr>
+            <a:r>
+              <a:t>OpenAPI / Swagger Docs</a:t>
+            </a:r>
+          </a:p>
+          <a:p>
+            <a:pPr>
+              <a:defRPr sz="1000">
+                <a:solidFill>
+                  <a:srgbClr val="475569"/>
+                </a:solidFill>
+              </a:defRPr>
+            </a:pPr>
+            <a:r>
+              <a:t>Interactive documentation accessible at /docs and ReDoc at /redoc.</a:t>
+            </a:r>
+          </a:p>
+        </p:txBody>
+      </p:sp>
+      <p:sp>
+        <p:nvSpPr>
+          <p:cNvPr id="8" name="Rounded Rectangle 7"/>
           <p:cNvSpPr/>
           <p:nvPr/>
         </p:nvSpPr>
         <p:spPr>
           <a:xfrm>
-            <a:off x="6126480" y="1645920"/>
-            <a:ext cx="5120640" cy="1051560"/>
+            <a:off x="6217920" y="1371600"/>
+            <a:ext cx="5212080" cy="4754880"/>
           </a:xfrm>
           <a:prstGeom prst="roundRect">
             <a:avLst/>
           </a:prstGeom>
           <a:solidFill>
-            <a:srgbClr val="1E293B"/>
+            <a:srgbClr val="FFFFFF"/>
           </a:solidFill>
           <a:ln w="12700">
             <a:solidFill>
-              <a:srgbClr val="334155"/>
+              <a:srgbClr val="E2E8F0"/>
             </a:solidFill>
           </a:ln>
         </p:spPr>
@@ -6439,14 +8367,14 @@
       </p:sp>
       <p:sp>
         <p:nvSpPr>
-          <p:cNvPr id="8" name="TextBox 7"/>
+          <p:cNvPr id="9" name="TextBox 8"/>
           <p:cNvSpPr txBox="1"/>
           <p:nvPr/>
         </p:nvSpPr>
         <p:spPr>
           <a:xfrm>
-            <a:off x="6309360" y="1737360"/>
-            <a:ext cx="4754880" cy="868680"/>
+            <a:off x="6400800" y="1554480"/>
+            <a:ext cx="4846320" cy="4389120"/>
           </a:xfrm>
           <a:prstGeom prst="rect">
             <a:avLst/>
@@ -6460,578 +8388,126 @@
           <a:lstStyle/>
           <a:p>
             <a:pPr>
-              <a:defRPr sz="1250" b="1">
-                <a:solidFill>
-                  <a:srgbClr val="06B6D4"/>
-                </a:solidFill>
-              </a:defRPr>
-            </a:pPr>
-            <a:r>
-              <a:t>Invoice Subtotal:  sum(line_item_amounts) ≈ subtotal</a:t>
-            </a:r>
-          </a:p>
-          <a:p>
-            <a:pPr>
-              <a:defRPr sz="1100">
-                <a:solidFill>
-                  <a:srgbClr val="94A3B8"/>
-                </a:solidFill>
-              </a:defRPr>
-            </a:pPr>
-            <a:r>
-              <a:t>Ensures line items add up to reported subtotal. (Tolerance: ±1.0 | Missing fields: NOT_APPLICABLE)</a:t>
-            </a:r>
-          </a:p>
-        </p:txBody>
-      </p:sp>
-      <p:sp>
-        <p:nvSpPr>
-          <p:cNvPr id="9" name="Rounded Rectangle 8"/>
-          <p:cNvSpPr/>
-          <p:nvPr/>
-        </p:nvSpPr>
-        <p:spPr>
-          <a:xfrm>
-            <a:off x="731520" y="2788920"/>
-            <a:ext cx="5120640" cy="1051560"/>
-          </a:xfrm>
-          <a:prstGeom prst="roundRect">
-            <a:avLst/>
-          </a:prstGeom>
-          <a:solidFill>
-            <a:srgbClr val="1E293B"/>
-          </a:solidFill>
-          <a:ln w="12700">
-            <a:solidFill>
-              <a:srgbClr val="334155"/>
-            </a:solidFill>
-          </a:ln>
-        </p:spPr>
-        <p:style>
-          <a:lnRef idx="1">
-            <a:schemeClr val="accent1"/>
-          </a:lnRef>
-          <a:fillRef idx="3">
-            <a:schemeClr val="accent1"/>
-          </a:fillRef>
-          <a:effectRef idx="2">
-            <a:schemeClr val="accent1"/>
-          </a:effectRef>
-          <a:fontRef idx="minor">
-            <a:schemeClr val="lt1"/>
-          </a:fontRef>
-        </p:style>
-        <p:txBody>
-          <a:bodyPr rtlCol="0" anchor="ctr"/>
-          <a:lstStyle/>
-          <a:p>
-            <a:pPr algn="ctr"/>
-          </a:p>
-        </p:txBody>
-      </p:sp>
-      <p:sp>
-        <p:nvSpPr>
-          <p:cNvPr id="10" name="TextBox 9"/>
-          <p:cNvSpPr txBox="1"/>
-          <p:nvPr/>
-        </p:nvSpPr>
-        <p:spPr>
-          <a:xfrm>
-            <a:off x="914400" y="2880360"/>
-            <a:ext cx="4754880" cy="868680"/>
-          </a:xfrm>
-          <a:prstGeom prst="rect">
-            <a:avLst/>
-          </a:prstGeom>
-          <a:noFill/>
-        </p:spPr>
-        <p:txBody>
-          <a:bodyPr wrap="square">
-            <a:spAutoFit/>
-          </a:bodyPr>
-          <a:lstStyle/>
-          <a:p>
-            <a:pPr>
-              <a:defRPr sz="1250" b="1">
-                <a:solidFill>
-                  <a:srgbClr val="06B6D4"/>
-                </a:solidFill>
-              </a:defRPr>
-            </a:pPr>
-            <a:r>
-              <a:t>Invoice Grand Total:  subtotal + tax - discount + rounding ≈ total</a:t>
-            </a:r>
-          </a:p>
-          <a:p>
-            <a:pPr>
-              <a:defRPr sz="1100">
-                <a:solidFill>
-                  <a:srgbClr val="94A3B8"/>
-                </a:solidFill>
-              </a:defRPr>
-            </a:pPr>
-            <a:r>
-              <a:t>Complete reconciliation across tax, discounts, and roundings. (Tolerance: ±1.0 | Missing fields: NOT_APPLICABLE)</a:t>
-            </a:r>
-          </a:p>
-        </p:txBody>
-      </p:sp>
-      <p:sp>
-        <p:nvSpPr>
-          <p:cNvPr id="11" name="Rounded Rectangle 10"/>
-          <p:cNvSpPr/>
-          <p:nvPr/>
-        </p:nvSpPr>
-        <p:spPr>
-          <a:xfrm>
-            <a:off x="6126480" y="2788920"/>
-            <a:ext cx="5120640" cy="1051560"/>
-          </a:xfrm>
-          <a:prstGeom prst="roundRect">
-            <a:avLst/>
-          </a:prstGeom>
-          <a:solidFill>
-            <a:srgbClr val="1E293B"/>
-          </a:solidFill>
-          <a:ln w="12700">
-            <a:solidFill>
-              <a:srgbClr val="334155"/>
-            </a:solidFill>
-          </a:ln>
-        </p:spPr>
-        <p:style>
-          <a:lnRef idx="1">
-            <a:schemeClr val="accent1"/>
-          </a:lnRef>
-          <a:fillRef idx="3">
-            <a:schemeClr val="accent1"/>
-          </a:fillRef>
-          <a:effectRef idx="2">
-            <a:schemeClr val="accent1"/>
-          </a:effectRef>
-          <a:fontRef idx="minor">
-            <a:schemeClr val="lt1"/>
-          </a:fontRef>
-        </p:style>
-        <p:txBody>
-          <a:bodyPr rtlCol="0" anchor="ctr"/>
-          <a:lstStyle/>
-          <a:p>
-            <a:pPr algn="ctr"/>
-          </a:p>
-        </p:txBody>
-      </p:sp>
-      <p:sp>
-        <p:nvSpPr>
-          <p:cNvPr id="12" name="TextBox 11"/>
-          <p:cNvSpPr txBox="1"/>
-          <p:nvPr/>
-        </p:nvSpPr>
-        <p:spPr>
-          <a:xfrm>
-            <a:off x="6309360" y="2880360"/>
-            <a:ext cx="4754880" cy="868680"/>
-          </a:xfrm>
-          <a:prstGeom prst="rect">
-            <a:avLst/>
-          </a:prstGeom>
-          <a:noFill/>
-        </p:spPr>
-        <p:txBody>
-          <a:bodyPr wrap="square">
-            <a:spAutoFit/>
-          </a:bodyPr>
-          <a:lstStyle/>
-          <a:p>
-            <a:pPr>
-              <a:defRPr sz="1250" b="1">
-                <a:solidFill>
-                  <a:srgbClr val="06B6D4"/>
-                </a:solidFill>
-              </a:defRPr>
-            </a:pPr>
-            <a:r>
-              <a:t>Cash / Change:  cash_paid - total_amount ≈ change</a:t>
-            </a:r>
-          </a:p>
-          <a:p>
-            <a:pPr>
-              <a:defRPr sz="1100">
-                <a:solidFill>
-                  <a:srgbClr val="94A3B8"/>
-                </a:solidFill>
-              </a:defRPr>
-            </a:pPr>
-            <a:r>
-              <a:t>Verifies point-of-sale change computation. (Tolerance: ±1.0 | Missing fields: NOT_APPLICABLE)</a:t>
-            </a:r>
-          </a:p>
-        </p:txBody>
-      </p:sp>
-      <p:sp>
-        <p:nvSpPr>
-          <p:cNvPr id="13" name="Rounded Rectangle 12"/>
-          <p:cNvSpPr/>
-          <p:nvPr/>
-        </p:nvSpPr>
-        <p:spPr>
-          <a:xfrm>
-            <a:off x="731520" y="3931920"/>
-            <a:ext cx="5120640" cy="1051560"/>
-          </a:xfrm>
-          <a:prstGeom prst="roundRect">
-            <a:avLst/>
-          </a:prstGeom>
-          <a:solidFill>
-            <a:srgbClr val="1E293B"/>
-          </a:solidFill>
-          <a:ln w="12700">
-            <a:solidFill>
-              <a:srgbClr val="334155"/>
-            </a:solidFill>
-          </a:ln>
-        </p:spPr>
-        <p:style>
-          <a:lnRef idx="1">
-            <a:schemeClr val="accent1"/>
-          </a:lnRef>
-          <a:fillRef idx="3">
-            <a:schemeClr val="accent1"/>
-          </a:fillRef>
-          <a:effectRef idx="2">
-            <a:schemeClr val="accent1"/>
-          </a:effectRef>
-          <a:fontRef idx="minor">
-            <a:schemeClr val="lt1"/>
-          </a:fontRef>
-        </p:style>
-        <p:txBody>
-          <a:bodyPr rtlCol="0" anchor="ctr"/>
-          <a:lstStyle/>
-          <a:p>
-            <a:pPr algn="ctr"/>
-          </a:p>
-        </p:txBody>
-      </p:sp>
-      <p:sp>
-        <p:nvSpPr>
-          <p:cNvPr id="14" name="TextBox 13"/>
-          <p:cNvSpPr txBox="1"/>
-          <p:nvPr/>
-        </p:nvSpPr>
-        <p:spPr>
-          <a:xfrm>
-            <a:off x="914400" y="4023360"/>
-            <a:ext cx="4754880" cy="868680"/>
-          </a:xfrm>
-          <a:prstGeom prst="rect">
-            <a:avLst/>
-          </a:prstGeom>
-          <a:noFill/>
-        </p:spPr>
-        <p:txBody>
-          <a:bodyPr wrap="square">
-            <a:spAutoFit/>
-          </a:bodyPr>
-          <a:lstStyle/>
-          <a:p>
-            <a:pPr>
-              <a:defRPr sz="1250" b="1">
-                <a:solidFill>
-                  <a:srgbClr val="06B6D4"/>
-                </a:solidFill>
-              </a:defRPr>
-            </a:pPr>
-            <a:r>
-              <a:t>Balance Sheet Parity:  Total Assets ≈ Total Capital &amp; Liabilities</a:t>
-            </a:r>
-          </a:p>
-          <a:p>
-            <a:pPr>
-              <a:defRPr sz="1100">
-                <a:solidFill>
-                  <a:srgbClr val="94A3B8"/>
-                </a:solidFill>
-              </a:defRPr>
-            </a:pPr>
-            <a:r>
-              <a:t>Fundamental accounting equation verified across all comparative periods. (Tolerance: ±1.0 | Missing fields: NOT_APPLICABLE)</a:t>
-            </a:r>
-          </a:p>
-        </p:txBody>
-      </p:sp>
-      <p:sp>
-        <p:nvSpPr>
-          <p:cNvPr id="15" name="Rounded Rectangle 14"/>
-          <p:cNvSpPr/>
-          <p:nvPr/>
-        </p:nvSpPr>
-        <p:spPr>
-          <a:xfrm>
-            <a:off x="6126480" y="3931920"/>
-            <a:ext cx="5120640" cy="1051560"/>
-          </a:xfrm>
-          <a:prstGeom prst="roundRect">
-            <a:avLst/>
-          </a:prstGeom>
-          <a:solidFill>
-            <a:srgbClr val="1E293B"/>
-          </a:solidFill>
-          <a:ln w="12700">
-            <a:solidFill>
-              <a:srgbClr val="334155"/>
-            </a:solidFill>
-          </a:ln>
-        </p:spPr>
-        <p:style>
-          <a:lnRef idx="1">
-            <a:schemeClr val="accent1"/>
-          </a:lnRef>
-          <a:fillRef idx="3">
-            <a:schemeClr val="accent1"/>
-          </a:fillRef>
-          <a:effectRef idx="2">
-            <a:schemeClr val="accent1"/>
-          </a:effectRef>
-          <a:fontRef idx="minor">
-            <a:schemeClr val="lt1"/>
-          </a:fontRef>
-        </p:style>
-        <p:txBody>
-          <a:bodyPr rtlCol="0" anchor="ctr"/>
-          <a:lstStyle/>
-          <a:p>
-            <a:pPr algn="ctr"/>
-          </a:p>
-        </p:txBody>
-      </p:sp>
-      <p:sp>
-        <p:nvSpPr>
-          <p:cNvPr id="16" name="TextBox 15"/>
-          <p:cNvSpPr txBox="1"/>
-          <p:nvPr/>
-        </p:nvSpPr>
-        <p:spPr>
-          <a:xfrm>
-            <a:off x="6309360" y="4023360"/>
-            <a:ext cx="4754880" cy="868680"/>
-          </a:xfrm>
-          <a:prstGeom prst="rect">
-            <a:avLst/>
-          </a:prstGeom>
-          <a:noFill/>
-        </p:spPr>
-        <p:txBody>
-          <a:bodyPr wrap="square">
-            <a:spAutoFit/>
-          </a:bodyPr>
-          <a:lstStyle/>
-          <a:p>
-            <a:pPr>
-              <a:defRPr sz="1250" b="1">
-                <a:solidFill>
-                  <a:srgbClr val="06B6D4"/>
-                </a:solidFill>
-              </a:defRPr>
-            </a:pPr>
-            <a:r>
-              <a:t>Asset &amp; C&amp;L Sums:  sum(components) ≈ Total Assets / C&amp;L</a:t>
-            </a:r>
-          </a:p>
-          <a:p>
-            <a:pPr>
-              <a:defRPr sz="1100">
-                <a:solidFill>
-                  <a:srgbClr val="94A3B8"/>
-                </a:solidFill>
-              </a:defRPr>
-            </a:pPr>
-            <a:r>
-              <a:t>Aggregates schedules and line items to confirm printed totals. (Tolerance: ±1.0 | Missing fields: NOT_APPLICABLE)</a:t>
-            </a:r>
-          </a:p>
-        </p:txBody>
-      </p:sp>
-      <p:sp>
-        <p:nvSpPr>
-          <p:cNvPr id="17" name="Rounded Rectangle 16"/>
-          <p:cNvSpPr/>
-          <p:nvPr/>
-        </p:nvSpPr>
-        <p:spPr>
-          <a:xfrm>
-            <a:off x="731520" y="5074920"/>
-            <a:ext cx="5120640" cy="1051560"/>
-          </a:xfrm>
-          <a:prstGeom prst="roundRect">
-            <a:avLst/>
-          </a:prstGeom>
-          <a:solidFill>
-            <a:srgbClr val="1E293B"/>
-          </a:solidFill>
-          <a:ln w="12700">
-            <a:solidFill>
-              <a:srgbClr val="334155"/>
-            </a:solidFill>
-          </a:ln>
-        </p:spPr>
-        <p:style>
-          <a:lnRef idx="1">
-            <a:schemeClr val="accent1"/>
-          </a:lnRef>
-          <a:fillRef idx="3">
-            <a:schemeClr val="accent1"/>
-          </a:fillRef>
-          <a:effectRef idx="2">
-            <a:schemeClr val="accent1"/>
-          </a:effectRef>
-          <a:fontRef idx="minor">
-            <a:schemeClr val="lt1"/>
-          </a:fontRef>
-        </p:style>
-        <p:txBody>
-          <a:bodyPr rtlCol="0" anchor="ctr"/>
-          <a:lstStyle/>
-          <a:p>
-            <a:pPr algn="ctr"/>
-          </a:p>
-        </p:txBody>
-      </p:sp>
-      <p:sp>
-        <p:nvSpPr>
-          <p:cNvPr id="18" name="TextBox 17"/>
-          <p:cNvSpPr txBox="1"/>
-          <p:nvPr/>
-        </p:nvSpPr>
-        <p:spPr>
-          <a:xfrm>
-            <a:off x="914400" y="5166360"/>
-            <a:ext cx="4754880" cy="868680"/>
-          </a:xfrm>
-          <a:prstGeom prst="rect">
-            <a:avLst/>
-          </a:prstGeom>
-          <a:noFill/>
-        </p:spPr>
-        <p:txBody>
-          <a:bodyPr wrap="square">
-            <a:spAutoFit/>
-          </a:bodyPr>
-          <a:lstStyle/>
-          <a:p>
-            <a:pPr>
-              <a:defRPr sz="1250" b="1">
-                <a:solidFill>
-                  <a:srgbClr val="06B6D4"/>
-                </a:solidFill>
-              </a:defRPr>
-            </a:pPr>
-            <a:r>
-              <a:t>P&amp;L Net Profit:  Total Income - Total Expenditure ≈ Net Profit</a:t>
-            </a:r>
-          </a:p>
-          <a:p>
-            <a:pPr>
-              <a:defRPr sz="1100">
-                <a:solidFill>
-                  <a:srgbClr val="94A3B8"/>
-                </a:solidFill>
-              </a:defRPr>
-            </a:pPr>
-            <a:r>
-              <a:t>Audits operating margins and profit derivations. (Tolerance: ±1.0 | Missing fields: NOT_APPLICABLE)</a:t>
-            </a:r>
-          </a:p>
-        </p:txBody>
-      </p:sp>
-      <p:sp>
-        <p:nvSpPr>
-          <p:cNvPr id="19" name="Rounded Rectangle 18"/>
-          <p:cNvSpPr/>
-          <p:nvPr/>
-        </p:nvSpPr>
-        <p:spPr>
-          <a:xfrm>
-            <a:off x="6126480" y="5074920"/>
-            <a:ext cx="5120640" cy="1051560"/>
-          </a:xfrm>
-          <a:prstGeom prst="roundRect">
-            <a:avLst/>
-          </a:prstGeom>
-          <a:solidFill>
-            <a:srgbClr val="1E293B"/>
-          </a:solidFill>
-          <a:ln w="12700">
-            <a:solidFill>
-              <a:srgbClr val="334155"/>
-            </a:solidFill>
-          </a:ln>
-        </p:spPr>
-        <p:style>
-          <a:lnRef idx="1">
-            <a:schemeClr val="accent1"/>
-          </a:lnRef>
-          <a:fillRef idx="3">
-            <a:schemeClr val="accent1"/>
-          </a:fillRef>
-          <a:effectRef idx="2">
-            <a:schemeClr val="accent1"/>
-          </a:effectRef>
-          <a:fontRef idx="minor">
-            <a:schemeClr val="lt1"/>
-          </a:fontRef>
-        </p:style>
-        <p:txBody>
-          <a:bodyPr rtlCol="0" anchor="ctr"/>
-          <a:lstStyle/>
-          <a:p>
-            <a:pPr algn="ctr"/>
-          </a:p>
-        </p:txBody>
-      </p:sp>
-      <p:sp>
-        <p:nvSpPr>
-          <p:cNvPr id="20" name="TextBox 19"/>
-          <p:cNvSpPr txBox="1"/>
-          <p:nvPr/>
-        </p:nvSpPr>
-        <p:spPr>
-          <a:xfrm>
-            <a:off x="6309360" y="5166360"/>
-            <a:ext cx="4754880" cy="868680"/>
-          </a:xfrm>
-          <a:prstGeom prst="rect">
-            <a:avLst/>
-          </a:prstGeom>
-          <a:noFill/>
-        </p:spPr>
-        <p:txBody>
-          <a:bodyPr wrap="square">
-            <a:spAutoFit/>
-          </a:bodyPr>
-          <a:lstStyle/>
-          <a:p>
-            <a:pPr>
-              <a:defRPr sz="1250" b="1">
-                <a:solidFill>
-                  <a:srgbClr val="06B6D4"/>
-                </a:solidFill>
-              </a:defRPr>
-            </a:pPr>
-            <a:r>
-              <a:t>Cash Flow Reconciliation:  Opening Cash + Net Change ≈ Closing Cash</a:t>
-            </a:r>
-          </a:p>
-          <a:p>
-            <a:pPr>
-              <a:defRPr sz="1100">
-                <a:solidFill>
-                  <a:srgbClr val="94A3B8"/>
-                </a:solidFill>
-              </a:defRPr>
-            </a:pPr>
-            <a:r>
-              <a:t>Reconciles cash continuity across operating, investing &amp; financing activities. (Tolerance: ±1.0 | Missing fields: NOT_APPLICABLE)</a:t>
+              <a:defRPr sz="1500" b="1">
+                <a:solidFill>
+                  <a:srgbClr val="0284C7"/>
+                </a:solidFill>
+              </a:defRPr>
+            </a:pPr>
+            <a:r>
+              <a:t>Standard Response JSON Structure</a:t>
+            </a:r>
+          </a:p>
+          <a:p>
+            <a:pPr>
+              <a:defRPr sz="950">
+                <a:solidFill>
+                  <a:srgbClr val="0F172A"/>
+                </a:solidFill>
+              </a:defRPr>
+            </a:pPr>
+            <a:r>
+              <a:t>{</a:t>
+            </a:r>
+            <a:br/>
+            <a:r>
+              <a:t>  "document_name": "invoice_101.pdf",</a:t>
+            </a:r>
+            <a:br/>
+            <a:r>
+              <a:t>  "document_type": "invoice",</a:t>
+            </a:r>
+            <a:br/>
+            <a:r>
+              <a:t>  "processing_status": "PASS",</a:t>
+            </a:r>
+            <a:br/>
+            <a:r>
+              <a:t>  "overall_confidence": 0.98,</a:t>
+            </a:r>
+            <a:br/>
+            <a:r>
+              <a:t>  "file_validation": {</a:t>
+            </a:r>
+            <a:br/>
+            <a:r>
+              <a:t>    "file_type": "application/pdf",</a:t>
+            </a:r>
+            <a:br/>
+            <a:r>
+              <a:t>    "is_supported": true,</a:t>
+            </a:r>
+            <a:br/>
+            <a:r>
+              <a:t>    "is_readable": true,</a:t>
+            </a:r>
+            <a:br/>
+            <a:r>
+              <a:t>    "page_count": 1,</a:t>
+            </a:r>
+            <a:br/>
+            <a:r>
+              <a:t>    "status": "PASS"</a:t>
+            </a:r>
+            <a:br/>
+            <a:r>
+              <a:t>  },</a:t>
+            </a:r>
+            <a:br/>
+            <a:r>
+              <a:t>  "extracted_data": {</a:t>
+            </a:r>
+            <a:br/>
+            <a:r>
+              <a:t>    "invoice_number": {"value": "INV-2024", "confidence": 0.99},</a:t>
+            </a:r>
+            <a:br/>
+            <a:r>
+              <a:t>    "total_amount": {"value": 138.90, "confidence": 0.98}</a:t>
+            </a:r>
+            <a:br/>
+            <a:r>
+              <a:t>  },</a:t>
+            </a:r>
+            <a:br/>
+            <a:r>
+              <a:t>  "validation": {</a:t>
+            </a:r>
+            <a:br/>
+            <a:r>
+              <a:t>    "checks": [{"name": "total_check", "status": "PASS"}],</a:t>
+            </a:r>
+            <a:br/>
+            <a:r>
+              <a:t>    "overall_status": "PASS",</a:t>
+            </a:r>
+            <a:br/>
+            <a:r>
+              <a:t>    "issues": []</a:t>
+            </a:r>
+            <a:br/>
+            <a:r>
+              <a:t>  },</a:t>
+            </a:r>
+            <a:br/>
+            <a:r>
+              <a:t>  "processing_metadata": {</a:t>
+            </a:r>
+            <a:br/>
+            <a:r>
+              <a:t>    "ocr_used": false,</a:t>
+            </a:r>
+            <a:br/>
+            <a:r>
+              <a:t>    "processing_time_ms": 1420</a:t>
+            </a:r>
+            <a:br/>
+            <a:r>
+              <a:t>  }</a:t>
+            </a:r>
+            <a:br/>
+            <a:r>
+              <a:t>}</a:t>
             </a:r>
           </a:p>
         </p:txBody>
@@ -7069,7 +8545,7 @@
             <a:avLst/>
           </a:prstGeom>
           <a:solidFill>
-            <a:srgbClr val="0F172A"/>
+            <a:srgbClr val="F8FAFC"/>
           </a:solidFill>
           <a:ln>
             <a:noFill/>
@@ -7105,8 +8581,8 @@
         </p:nvSpPr>
         <p:spPr>
           <a:xfrm>
-            <a:off x="731520" y="457200"/>
-            <a:ext cx="10698480" cy="365760"/>
+            <a:off x="731520" y="365760"/>
+            <a:ext cx="10698480" cy="274320"/>
           </a:xfrm>
           <a:prstGeom prst="rect">
             <a:avLst/>
@@ -7114,20 +8590,20 @@
           <a:noFill/>
         </p:spPr>
         <p:txBody>
-          <a:bodyPr wrap="square">
+          <a:bodyPr wrap="none">
             <a:spAutoFit/>
           </a:bodyPr>
           <a:lstStyle/>
           <a:p>
             <a:pPr>
-              <a:defRPr sz="1100" b="1">
-                <a:solidFill>
-                  <a:srgbClr val="06B6D4"/>
-                </a:solidFill>
-              </a:defRPr>
-            </a:pPr>
-            <a:r>
-              <a:t>AI ENGINEER INTERNSHIP CASE STUDY</a:t>
+              <a:defRPr sz="1000" b="1">
+                <a:solidFill>
+                  <a:srgbClr val="2563EB"/>
+                </a:solidFill>
+              </a:defRPr>
+            </a:pPr>
+            <a:r>
+              <a:t>FINANCIAL VALIDATION</a:t>
             </a:r>
           </a:p>
         </p:txBody>
@@ -7140,8 +8616,8 @@
         </p:nvSpPr>
         <p:spPr>
           <a:xfrm>
-            <a:off x="731520" y="777240"/>
-            <a:ext cx="10698480" cy="731520"/>
+            <a:off x="731520" y="640080"/>
+            <a:ext cx="10698480" cy="548640"/>
           </a:xfrm>
           <a:prstGeom prst="rect">
             <a:avLst/>
@@ -7149,44 +8625,79 @@
           <a:noFill/>
         </p:spPr>
         <p:txBody>
-          <a:bodyPr wrap="square">
+          <a:bodyPr wrap="none">
             <a:spAutoFit/>
           </a:bodyPr>
           <a:lstStyle/>
           <a:p>
             <a:pPr>
-              <a:defRPr sz="2600" b="1">
-                <a:solidFill>
-                  <a:srgbClr val="FFFFFF"/>
-                </a:solidFill>
-              </a:defRPr>
-            </a:pPr>
-            <a:r>
-              <a:t>Empirical Validation Results on Benchmark Dataset</a:t>
-            </a:r>
-          </a:p>
-        </p:txBody>
-      </p:sp>
-      <p:sp>
-        <p:nvSpPr>
-          <p:cNvPr id="5" name="Rounded Rectangle 4"/>
+              <a:defRPr sz="2200" b="1">
+                <a:solidFill>
+                  <a:srgbClr val="0F172A"/>
+                </a:solidFill>
+              </a:defRPr>
+            </a:pPr>
+            <a:r>
+              <a:t>Financial Validation Engine</a:t>
+            </a:r>
+          </a:p>
+        </p:txBody>
+      </p:sp>
+      <p:sp>
+        <p:nvSpPr>
+          <p:cNvPr id="5" name="TextBox 4"/>
+          <p:cNvSpPr txBox="1"/>
+          <p:nvPr/>
+        </p:nvSpPr>
+        <p:spPr>
+          <a:xfrm>
+            <a:off x="731520" y="6400800"/>
+            <a:ext cx="10698480" cy="274320"/>
+          </a:xfrm>
+          <a:prstGeom prst="rect">
+            <a:avLst/>
+          </a:prstGeom>
+          <a:noFill/>
+        </p:spPr>
+        <p:txBody>
+          <a:bodyPr wrap="none">
+            <a:spAutoFit/>
+          </a:bodyPr>
+          <a:lstStyle/>
+          <a:p>
+            <a:pPr>
+              <a:defRPr sz="900">
+                <a:solidFill>
+                  <a:srgbClr val="94A3B8"/>
+                </a:solidFill>
+              </a:defRPr>
+            </a:pPr>
+            <a:r>
+              <a:t>Intelligent Document Extraction, Validation &amp; API Platform  |  AI Engineer Internship Technical Case Study</a:t>
+            </a:r>
+          </a:p>
+        </p:txBody>
+      </p:sp>
+      <p:sp>
+        <p:nvSpPr>
+          <p:cNvPr id="6" name="Rounded Rectangle 5"/>
           <p:cNvSpPr/>
           <p:nvPr/>
         </p:nvSpPr>
         <p:spPr>
           <a:xfrm>
-            <a:off x="731520" y="1645920"/>
-            <a:ext cx="2560320" cy="4572000"/>
+            <a:off x="731520" y="1371600"/>
+            <a:ext cx="5212080" cy="4754880"/>
           </a:xfrm>
           <a:prstGeom prst="roundRect">
             <a:avLst/>
           </a:prstGeom>
           <a:solidFill>
-            <a:srgbClr val="1E293B"/>
+            <a:srgbClr val="FFFFFF"/>
           </a:solidFill>
           <a:ln w="12700">
             <a:solidFill>
-              <a:srgbClr val="334155"/>
+              <a:srgbClr val="E2E8F0"/>
             </a:solidFill>
           </a:ln>
         </p:spPr>
@@ -7214,14 +8725,14 @@
       </p:sp>
       <p:sp>
         <p:nvSpPr>
-          <p:cNvPr id="6" name="TextBox 5"/>
+          <p:cNvPr id="7" name="TextBox 6"/>
           <p:cNvSpPr txBox="1"/>
           <p:nvPr/>
         </p:nvSpPr>
         <p:spPr>
           <a:xfrm>
-            <a:off x="914400" y="1828800"/>
-            <a:ext cx="2194560" cy="4114800"/>
+            <a:off x="914400" y="1554480"/>
+            <a:ext cx="4846320" cy="4389120"/>
           </a:xfrm>
           <a:prstGeom prst="rect">
             <a:avLst/>
@@ -7235,76 +8746,162 @@
           <a:lstStyle/>
           <a:p>
             <a:pPr>
-              <a:defRPr sz="1400" b="1">
-                <a:solidFill>
-                  <a:srgbClr val="FFFFFF"/>
-                </a:solidFill>
-              </a:defRPr>
-            </a:pPr>
-            <a:r>
-              <a:t>Invoice (batch1-1109.jpg)</a:t>
-            </a:r>
-          </a:p>
-          <a:p>
-            <a:br/>
-            <a:pPr>
-              <a:defRPr sz="1300" b="1">
-                <a:solidFill>
-                  <a:srgbClr val="22C55E"/>
-                </a:solidFill>
-              </a:defRPr>
-            </a:pPr>
-            <a:r>
-              <a:t>Confidence: 100%</a:t>
-            </a:r>
-          </a:p>
-          <a:p>
-            <a:pPr>
-              <a:defRPr sz="1300" b="1">
-                <a:solidFill>
-                  <a:srgbClr val="06B6D4"/>
-                </a:solidFill>
-              </a:defRPr>
-            </a:pPr>
-            <a:r>
-              <a:t>Status: 9 Checks PASS</a:t>
-            </a:r>
-          </a:p>
-          <a:p>
-            <a:br/>
-            <a:pPr>
-              <a:defRPr sz="1150">
-                <a:solidFill>
-                  <a:srgbClr val="94A3B8"/>
-                </a:solidFill>
-              </a:defRPr>
-            </a:pPr>
-            <a:r>
-              <a:t>100% mathematical match: sum of lines ($126.27), VAT ($12.63), and total ($138.90). All line items verified.</a:t>
-            </a:r>
-          </a:p>
-        </p:txBody>
-      </p:sp>
-      <p:sp>
-        <p:nvSpPr>
-          <p:cNvPr id="7" name="Rounded Rectangle 6"/>
+              <a:defRPr sz="1500" b="1">
+                <a:solidFill>
+                  <a:srgbClr val="2563EB"/>
+                </a:solidFill>
+              </a:defRPr>
+            </a:pPr>
+            <a:r>
+              <a:t>Mathematical Formulas by Document Type</a:t>
+            </a:r>
+          </a:p>
+          <a:p>
+            <a:br/>
+            <a:pPr>
+              <a:defRPr sz="1100" b="1">
+                <a:solidFill>
+                  <a:srgbClr val="0F172A"/>
+                </a:solidFill>
+              </a:defRPr>
+            </a:pPr>
+            <a:r>
+              <a:t>Invoice:</a:t>
+            </a:r>
+          </a:p>
+          <a:p>
+            <a:pPr>
+              <a:defRPr sz="1000">
+                <a:solidFill>
+                  <a:srgbClr val="475569"/>
+                </a:solidFill>
+              </a:defRPr>
+            </a:pPr>
+            <a:r>
+              <a:t>• Quantity × Unit Price ≈ Line Total</a:t>
+            </a:r>
+            <a:br/>
+            <a:r>
+              <a:t>• sum(Line Items) ≈ Subtotal</a:t>
+            </a:r>
+            <a:br/>
+            <a:r>
+              <a:t>• Subtotal + Tax - Discount + Rounding ≈ Total</a:t>
+            </a:r>
+            <a:br/>
+            <a:r>
+              <a:t>• Cash Paid - Total ≈ Change</a:t>
+            </a:r>
+          </a:p>
+          <a:p>
+            <a:br/>
+            <a:pPr>
+              <a:defRPr sz="1100" b="1">
+                <a:solidFill>
+                  <a:srgbClr val="0F172A"/>
+                </a:solidFill>
+              </a:defRPr>
+            </a:pPr>
+            <a:r>
+              <a:t>Balance Sheet:</a:t>
+            </a:r>
+          </a:p>
+          <a:p>
+            <a:pPr>
+              <a:defRPr sz="1000">
+                <a:solidFill>
+                  <a:srgbClr val="475569"/>
+                </a:solidFill>
+              </a:defRPr>
+            </a:pPr>
+            <a:r>
+              <a:t>• Total Assets ≈ Liabilities + Equity (Assets ≈ Capital &amp; Liabilities)</a:t>
+            </a:r>
+            <a:br/>
+            <a:r>
+              <a:t>• sum(Components) ≈ Reported Total Assets / Liabilities</a:t>
+            </a:r>
+          </a:p>
+          <a:p>
+            <a:br/>
+            <a:pPr>
+              <a:defRPr sz="1100" b="1">
+                <a:solidFill>
+                  <a:srgbClr val="0F172A"/>
+                </a:solidFill>
+              </a:defRPr>
+            </a:pPr>
+            <a:r>
+              <a:t>Profit &amp; Loss:</a:t>
+            </a:r>
+          </a:p>
+          <a:p>
+            <a:pPr>
+              <a:defRPr sz="1000">
+                <a:solidFill>
+                  <a:srgbClr val="475569"/>
+                </a:solidFill>
+              </a:defRPr>
+            </a:pPr>
+            <a:r>
+              <a:t>• sum(Income) ≈ Total Income | sum(Expense) ≈ Total Expense</a:t>
+            </a:r>
+            <a:br/>
+            <a:r>
+              <a:t>• Total Income - Total Expenditure ≈ Net Profit</a:t>
+            </a:r>
+          </a:p>
+          <a:p>
+            <a:br/>
+            <a:pPr>
+              <a:defRPr sz="1100" b="1">
+                <a:solidFill>
+                  <a:srgbClr val="0F172A"/>
+                </a:solidFill>
+              </a:defRPr>
+            </a:pPr>
+            <a:r>
+              <a:t>Cash Flow:</a:t>
+            </a:r>
+          </a:p>
+          <a:p>
+            <a:pPr>
+              <a:defRPr sz="1000">
+                <a:solidFill>
+                  <a:srgbClr val="475569"/>
+                </a:solidFill>
+              </a:defRPr>
+            </a:pPr>
+            <a:r>
+              <a:t>• Operating + Investing + Financing + FX ≈ Net Change</a:t>
+            </a:r>
+            <a:br/>
+            <a:r>
+              <a:t>• Opening Cash + Net Change + Adjustments ≈ Closing Cash</a:t>
+            </a:r>
+          </a:p>
+        </p:txBody>
+      </p:sp>
+      <p:sp>
+        <p:nvSpPr>
+          <p:cNvPr id="8" name="Rounded Rectangle 7"/>
           <p:cNvSpPr/>
           <p:nvPr/>
         </p:nvSpPr>
         <p:spPr>
           <a:xfrm>
-            <a:off x="3429000" y="1645920"/>
-            <a:ext cx="2560320" cy="4572000"/>
+            <a:off x="6217920" y="1371600"/>
+            <a:ext cx="5212080" cy="4754880"/>
           </a:xfrm>
           <a:prstGeom prst="roundRect">
             <a:avLst/>
           </a:prstGeom>
           <a:solidFill>
-            <a:srgbClr val="1E293B"/>
+            <a:srgbClr val="FFFFFF"/>
           </a:solidFill>
           <a:ln w="12700">
             <a:solidFill>
-              <a:srgbClr val="334155"/>
+              <a:srgbClr val="E2E8F0"/>
             </a:solidFill>
           </a:ln>
         </p:spPr>
@@ -7332,14 +8929,14 @@
       </p:sp>
       <p:sp>
         <p:nvSpPr>
-          <p:cNvPr id="8" name="TextBox 7"/>
+          <p:cNvPr id="9" name="TextBox 8"/>
           <p:cNvSpPr txBox="1"/>
           <p:nvPr/>
         </p:nvSpPr>
         <p:spPr>
           <a:xfrm>
-            <a:off x="3611880" y="1828800"/>
-            <a:ext cx="2194560" cy="4114800"/>
+            <a:off x="6400800" y="1554480"/>
+            <a:ext cx="4846320" cy="4389120"/>
           </a:xfrm>
           <a:prstGeom prst="rect">
             <a:avLst/>
@@ -7353,288 +8950,134 @@
           <a:lstStyle/>
           <a:p>
             <a:pPr>
-              <a:defRPr sz="1400" b="1">
-                <a:solidFill>
-                  <a:srgbClr val="FFFFFF"/>
-                </a:solidFill>
-              </a:defRPr>
-            </a:pPr>
-            <a:r>
-              <a:t>Balance Sheet (2020.pdf)</a:t>
-            </a:r>
-          </a:p>
-          <a:p>
-            <a:br/>
-            <a:pPr>
-              <a:defRPr sz="1300" b="1">
-                <a:solidFill>
-                  <a:srgbClr val="22C55E"/>
-                </a:solidFill>
-              </a:defRPr>
-            </a:pPr>
-            <a:r>
-              <a:t>Confidence: 96%</a:t>
-            </a:r>
-          </a:p>
-          <a:p>
-            <a:pPr>
-              <a:defRPr sz="1300" b="1">
-                <a:solidFill>
-                  <a:srgbClr val="06B6D4"/>
-                </a:solidFill>
-              </a:defRPr>
-            </a:pPr>
-            <a:r>
-              <a:t>Status: Parity PASS</a:t>
-            </a:r>
-          </a:p>
-          <a:p>
-            <a:br/>
-            <a:pPr>
-              <a:defRPr sz="1150">
-                <a:solidFill>
-                  <a:srgbClr val="94A3B8"/>
-                </a:solidFill>
-              </a:defRPr>
-            </a:pPr>
-            <a:r>
-              <a:t>Total Assets (₹15,808,304,373) = Total Capital &amp; Liabilities (₹15,808,304,373). Component schedules extracted accurately.</a:t>
-            </a:r>
-          </a:p>
-        </p:txBody>
-      </p:sp>
-      <p:sp>
-        <p:nvSpPr>
-          <p:cNvPr id="9" name="Rounded Rectangle 8"/>
-          <p:cNvSpPr/>
-          <p:nvPr/>
-        </p:nvSpPr>
-        <p:spPr>
-          <a:xfrm>
-            <a:off x="6126480" y="1645920"/>
-            <a:ext cx="2560320" cy="4572000"/>
-          </a:xfrm>
-          <a:prstGeom prst="roundRect">
-            <a:avLst/>
-          </a:prstGeom>
-          <a:solidFill>
-            <a:srgbClr val="1E293B"/>
-          </a:solidFill>
-          <a:ln w="12700">
-            <a:solidFill>
-              <a:srgbClr val="334155"/>
-            </a:solidFill>
-          </a:ln>
-        </p:spPr>
-        <p:style>
-          <a:lnRef idx="1">
-            <a:schemeClr val="accent1"/>
-          </a:lnRef>
-          <a:fillRef idx="3">
-            <a:schemeClr val="accent1"/>
-          </a:fillRef>
-          <a:effectRef idx="2">
-            <a:schemeClr val="accent1"/>
-          </a:effectRef>
-          <a:fontRef idx="minor">
-            <a:schemeClr val="lt1"/>
-          </a:fontRef>
-        </p:style>
-        <p:txBody>
-          <a:bodyPr rtlCol="0" anchor="ctr"/>
-          <a:lstStyle/>
-          <a:p>
-            <a:pPr algn="ctr"/>
-          </a:p>
-        </p:txBody>
-      </p:sp>
-      <p:sp>
-        <p:nvSpPr>
-          <p:cNvPr id="10" name="TextBox 9"/>
-          <p:cNvSpPr txBox="1"/>
-          <p:nvPr/>
-        </p:nvSpPr>
-        <p:spPr>
-          <a:xfrm>
-            <a:off x="6309360" y="1828800"/>
-            <a:ext cx="2194560" cy="4114800"/>
-          </a:xfrm>
-          <a:prstGeom prst="rect">
-            <a:avLst/>
-          </a:prstGeom>
-          <a:noFill/>
-        </p:spPr>
-        <p:txBody>
-          <a:bodyPr wrap="square">
-            <a:spAutoFit/>
-          </a:bodyPr>
-          <a:lstStyle/>
-          <a:p>
-            <a:pPr>
-              <a:defRPr sz="1400" b="1">
-                <a:solidFill>
-                  <a:srgbClr val="FFFFFF"/>
-                </a:solidFill>
-              </a:defRPr>
-            </a:pPr>
-            <a:r>
-              <a:t>Profit &amp; Loss (2017.pdf)</a:t>
-            </a:r>
-          </a:p>
-          <a:p>
-            <a:br/>
-            <a:pPr>
-              <a:defRPr sz="1300" b="1">
-                <a:solidFill>
-                  <a:srgbClr val="22C55E"/>
-                </a:solidFill>
-              </a:defRPr>
-            </a:pPr>
-            <a:r>
-              <a:t>Confidence: 99%</a:t>
-            </a:r>
-          </a:p>
-          <a:p>
-            <a:pPr>
-              <a:defRPr sz="1300" b="1">
-                <a:solidFill>
-                  <a:srgbClr val="06B6D4"/>
-                </a:solidFill>
-              </a:defRPr>
-            </a:pPr>
-            <a:r>
-              <a:t>Status: P&amp;L Derivation PASS</a:t>
-            </a:r>
-          </a:p>
-          <a:p>
-            <a:br/>
-            <a:pPr>
-              <a:defRPr sz="1150">
-                <a:solidFill>
-                  <a:srgbClr val="94A3B8"/>
-                </a:solidFill>
-              </a:defRPr>
-            </a:pPr>
-            <a:r>
-              <a:t>Total Income (₹861,489,858) - Total Expenditure (₹708,615,836) = Net Profit (₹152,874,022) with 0.0 variance.</a:t>
-            </a:r>
-          </a:p>
-        </p:txBody>
-      </p:sp>
-      <p:sp>
-        <p:nvSpPr>
-          <p:cNvPr id="11" name="Rounded Rectangle 10"/>
-          <p:cNvSpPr/>
-          <p:nvPr/>
-        </p:nvSpPr>
-        <p:spPr>
-          <a:xfrm>
-            <a:off x="8823960" y="1645920"/>
-            <a:ext cx="2560320" cy="4572000"/>
-          </a:xfrm>
-          <a:prstGeom prst="roundRect">
-            <a:avLst/>
-          </a:prstGeom>
-          <a:solidFill>
-            <a:srgbClr val="1E293B"/>
-          </a:solidFill>
-          <a:ln w="12700">
-            <a:solidFill>
-              <a:srgbClr val="334155"/>
-            </a:solidFill>
-          </a:ln>
-        </p:spPr>
-        <p:style>
-          <a:lnRef idx="1">
-            <a:schemeClr val="accent1"/>
-          </a:lnRef>
-          <a:fillRef idx="3">
-            <a:schemeClr val="accent1"/>
-          </a:fillRef>
-          <a:effectRef idx="2">
-            <a:schemeClr val="accent1"/>
-          </a:effectRef>
-          <a:fontRef idx="minor">
-            <a:schemeClr val="lt1"/>
-          </a:fontRef>
-        </p:style>
-        <p:txBody>
-          <a:bodyPr rtlCol="0" anchor="ctr"/>
-          <a:lstStyle/>
-          <a:p>
-            <a:pPr algn="ctr"/>
-          </a:p>
-        </p:txBody>
-      </p:sp>
-      <p:sp>
-        <p:nvSpPr>
-          <p:cNvPr id="12" name="TextBox 11"/>
-          <p:cNvSpPr txBox="1"/>
-          <p:nvPr/>
-        </p:nvSpPr>
-        <p:spPr>
-          <a:xfrm>
-            <a:off x="9006840" y="1828800"/>
-            <a:ext cx="2194560" cy="4114800"/>
-          </a:xfrm>
-          <a:prstGeom prst="rect">
-            <a:avLst/>
-          </a:prstGeom>
-          <a:noFill/>
-        </p:spPr>
-        <p:txBody>
-          <a:bodyPr wrap="square">
-            <a:spAutoFit/>
-          </a:bodyPr>
-          <a:lstStyle/>
-          <a:p>
-            <a:pPr>
-              <a:defRPr sz="1400" b="1">
-                <a:solidFill>
-                  <a:srgbClr val="FFFFFF"/>
-                </a:solidFill>
-              </a:defRPr>
-            </a:pPr>
-            <a:r>
-              <a:t>Cash Flow Statement (2018.pdf)</a:t>
-            </a:r>
-          </a:p>
-          <a:p>
-            <a:br/>
-            <a:pPr>
-              <a:defRPr sz="1300" b="1">
-                <a:solidFill>
-                  <a:srgbClr val="22C55E"/>
-                </a:solidFill>
-              </a:defRPr>
-            </a:pPr>
-            <a:r>
-              <a:t>Confidence: 97%</a:t>
-            </a:r>
-          </a:p>
-          <a:p>
-            <a:pPr>
-              <a:defRPr sz="1300" b="1">
-                <a:solidFill>
-                  <a:srgbClr val="06B6D4"/>
-                </a:solidFill>
-              </a:defRPr>
-            </a:pPr>
-            <a:r>
-              <a:t>Status: Reconciliation PASS</a:t>
-            </a:r>
-          </a:p>
-          <a:p>
-            <a:br/>
-            <a:pPr>
-              <a:defRPr sz="1150">
-                <a:solidFill>
-                  <a:srgbClr val="94A3B8"/>
-                </a:solidFill>
-              </a:defRPr>
-            </a:pPr>
-            <a:r>
-              <a:t>Operating + Investing + Financing = Net Change (₹737,504,366). Opening + Net Change = Closing (₹1,230,615,562).</a:t>
+              <a:defRPr sz="1500" b="1">
+                <a:solidFill>
+                  <a:srgbClr val="0284C7"/>
+                </a:solidFill>
+              </a:defRPr>
+            </a:pPr>
+            <a:r>
+              <a:t>Validation Check Structure &amp; Status Rules</a:t>
+            </a:r>
+          </a:p>
+          <a:p>
+            <a:br/>
+            <a:pPr>
+              <a:defRPr sz="1100" b="1">
+                <a:solidFill>
+                  <a:srgbClr val="0F172A"/>
+                </a:solidFill>
+              </a:defRPr>
+            </a:pPr>
+            <a:r>
+              <a:t>Every check outputs::</a:t>
+            </a:r>
+          </a:p>
+          <a:p>
+            <a:pPr>
+              <a:defRPr sz="1000">
+                <a:solidFill>
+                  <a:srgbClr val="475569"/>
+                </a:solidFill>
+              </a:defRPr>
+            </a:pPr>
+            <a:r>
+              <a:t>• Formula / check name</a:t>
+            </a:r>
+            <a:br/>
+            <a:r>
+              <a:t>• Input operands</a:t>
+            </a:r>
+            <a:br/>
+            <a:r>
+              <a:t>• Calculated value (from Python math)</a:t>
+            </a:r>
+            <a:br/>
+            <a:r>
+              <a:t>• Reported value (printed on document)</a:t>
+            </a:r>
+            <a:br/>
+            <a:r>
+              <a:t>• Variance (|calculated - reported|)</a:t>
+            </a:r>
+            <a:br/>
+            <a:r>
+              <a:t>• Status (PASS / FAIL / NOT_APPLICABLE)</a:t>
+            </a:r>
+          </a:p>
+          <a:p>
+            <a:br/>
+            <a:pPr>
+              <a:defRPr sz="1100" b="1">
+                <a:solidFill>
+                  <a:srgbClr val="0F172A"/>
+                </a:solidFill>
+              </a:defRPr>
+            </a:pPr>
+            <a:r>
+              <a:t>PASS Status:</a:t>
+            </a:r>
+          </a:p>
+          <a:p>
+            <a:pPr>
+              <a:defRPr sz="1000">
+                <a:solidFill>
+                  <a:srgbClr val="475569"/>
+                </a:solidFill>
+              </a:defRPr>
+            </a:pPr>
+            <a:r>
+              <a:t>Variance is within the allowed rounding tolerance (±1.0).</a:t>
+            </a:r>
+          </a:p>
+          <a:p>
+            <a:br/>
+            <a:pPr>
+              <a:defRPr sz="1100" b="1">
+                <a:solidFill>
+                  <a:srgbClr val="0F172A"/>
+                </a:solidFill>
+              </a:defRPr>
+            </a:pPr>
+            <a:r>
+              <a:t>FAIL Status:</a:t>
+            </a:r>
+          </a:p>
+          <a:p>
+            <a:pPr>
+              <a:defRPr sz="1000">
+                <a:solidFill>
+                  <a:srgbClr val="475569"/>
+                </a:solidFill>
+              </a:defRPr>
+            </a:pPr>
+            <a:r>
+              <a:t>Variance exceeds tolerance; flags accounting or OCR discrepancy.</a:t>
+            </a:r>
+          </a:p>
+          <a:p>
+            <a:br/>
+            <a:pPr>
+              <a:defRPr sz="1100" b="1">
+                <a:solidFill>
+                  <a:srgbClr val="0F172A"/>
+                </a:solidFill>
+              </a:defRPr>
+            </a:pPr>
+            <a:r>
+              <a:t>NOT_APPLICABLE Status:</a:t>
+            </a:r>
+          </a:p>
+          <a:p>
+            <a:pPr>
+              <a:defRPr sz="1000">
+                <a:solidFill>
+                  <a:srgbClr val="475569"/>
+                </a:solidFill>
+              </a:defRPr>
+            </a:pPr>
+            <a:r>
+              <a:t>Required validation field is absent from document. The system never invents or assumes missing values.</a:t>
             </a:r>
           </a:p>
         </p:txBody>
@@ -7672,7 +9115,7 @@
             <a:avLst/>
           </a:prstGeom>
           <a:solidFill>
-            <a:srgbClr val="0F172A"/>
+            <a:srgbClr val="F8FAFC"/>
           </a:solidFill>
           <a:ln>
             <a:noFill/>
@@ -7708,8 +9151,8 @@
         </p:nvSpPr>
         <p:spPr>
           <a:xfrm>
-            <a:off x="731520" y="457200"/>
-            <a:ext cx="10698480" cy="365760"/>
+            <a:off x="731520" y="365760"/>
+            <a:ext cx="10698480" cy="274320"/>
           </a:xfrm>
           <a:prstGeom prst="rect">
             <a:avLst/>
@@ -7717,20 +9160,20 @@
           <a:noFill/>
         </p:spPr>
         <p:txBody>
-          <a:bodyPr wrap="square">
+          <a:bodyPr wrap="none">
             <a:spAutoFit/>
           </a:bodyPr>
           <a:lstStyle/>
           <a:p>
             <a:pPr>
-              <a:defRPr sz="1100" b="1">
-                <a:solidFill>
-                  <a:srgbClr val="06B6D4"/>
-                </a:solidFill>
-              </a:defRPr>
-            </a:pPr>
-            <a:r>
-              <a:t>AI ENGINEER INTERNSHIP CASE STUDY</a:t>
+              <a:defRPr sz="1000" b="1">
+                <a:solidFill>
+                  <a:srgbClr val="2563EB"/>
+                </a:solidFill>
+              </a:defRPr>
+            </a:pPr>
+            <a:r>
+              <a:t>FRONTEND, DATABASE &amp; DEPLOYMENT</a:t>
             </a:r>
           </a:p>
         </p:txBody>
@@ -7743,8 +9186,8 @@
         </p:nvSpPr>
         <p:spPr>
           <a:xfrm>
-            <a:off x="731520" y="777240"/>
-            <a:ext cx="10698480" cy="731520"/>
+            <a:off x="731520" y="640080"/>
+            <a:ext cx="10698480" cy="548640"/>
           </a:xfrm>
           <a:prstGeom prst="rect">
             <a:avLst/>
@@ -7752,44 +9195,79 @@
           <a:noFill/>
         </p:spPr>
         <p:txBody>
-          <a:bodyPr wrap="square">
+          <a:bodyPr wrap="none">
             <a:spAutoFit/>
           </a:bodyPr>
           <a:lstStyle/>
           <a:p>
             <a:pPr>
-              <a:defRPr sz="2600" b="1">
-                <a:solidFill>
-                  <a:srgbClr val="FFFFFF"/>
-                </a:solidFill>
-              </a:defRPr>
-            </a:pPr>
-            <a:r>
-              <a:t>REST API Specifications &amp; Frontend Features</a:t>
-            </a:r>
-          </a:p>
-        </p:txBody>
-      </p:sp>
-      <p:sp>
-        <p:nvSpPr>
-          <p:cNvPr id="5" name="Rounded Rectangle 4"/>
+              <a:defRPr sz="2200" b="1">
+                <a:solidFill>
+                  <a:srgbClr val="0F172A"/>
+                </a:solidFill>
+              </a:defRPr>
+            </a:pPr>
+            <a:r>
+              <a:t>Frontend, Persistence &amp; Deployment</a:t>
+            </a:r>
+          </a:p>
+        </p:txBody>
+      </p:sp>
+      <p:sp>
+        <p:nvSpPr>
+          <p:cNvPr id="5" name="TextBox 4"/>
+          <p:cNvSpPr txBox="1"/>
+          <p:nvPr/>
+        </p:nvSpPr>
+        <p:spPr>
+          <a:xfrm>
+            <a:off x="731520" y="6400800"/>
+            <a:ext cx="10698480" cy="274320"/>
+          </a:xfrm>
+          <a:prstGeom prst="rect">
+            <a:avLst/>
+          </a:prstGeom>
+          <a:noFill/>
+        </p:spPr>
+        <p:txBody>
+          <a:bodyPr wrap="none">
+            <a:spAutoFit/>
+          </a:bodyPr>
+          <a:lstStyle/>
+          <a:p>
+            <a:pPr>
+              <a:defRPr sz="900">
+                <a:solidFill>
+                  <a:srgbClr val="94A3B8"/>
+                </a:solidFill>
+              </a:defRPr>
+            </a:pPr>
+            <a:r>
+              <a:t>Intelligent Document Extraction, Validation &amp; API Platform  |  AI Engineer Internship Technical Case Study</a:t>
+            </a:r>
+          </a:p>
+        </p:txBody>
+      </p:sp>
+      <p:sp>
+        <p:nvSpPr>
+          <p:cNvPr id="6" name="Rounded Rectangle 5"/>
           <p:cNvSpPr/>
           <p:nvPr/>
         </p:nvSpPr>
         <p:spPr>
           <a:xfrm>
-            <a:off x="731520" y="1645920"/>
-            <a:ext cx="5943600" cy="4572000"/>
+            <a:off x="731520" y="1371600"/>
+            <a:ext cx="3383280" cy="4754880"/>
           </a:xfrm>
           <a:prstGeom prst="roundRect">
             <a:avLst/>
           </a:prstGeom>
           <a:solidFill>
-            <a:srgbClr val="1E293B"/>
+            <a:srgbClr val="FFFFFF"/>
           </a:solidFill>
           <a:ln w="12700">
             <a:solidFill>
-              <a:srgbClr val="334155"/>
+              <a:srgbClr val="E2E8F0"/>
             </a:solidFill>
           </a:ln>
         </p:spPr>
@@ -7817,14 +9295,14 @@
       </p:sp>
       <p:sp>
         <p:nvSpPr>
-          <p:cNvPr id="6" name="TextBox 5"/>
+          <p:cNvPr id="7" name="TextBox 6"/>
           <p:cNvSpPr txBox="1"/>
           <p:nvPr/>
         </p:nvSpPr>
         <p:spPr>
           <a:xfrm>
-            <a:off x="914400" y="1828800"/>
-            <a:ext cx="5577840" cy="4114800"/>
+            <a:off x="868680" y="1554480"/>
+            <a:ext cx="3108960" cy="4389120"/>
           </a:xfrm>
           <a:prstGeom prst="rect">
             <a:avLst/>
@@ -7838,138 +9316,83 @@
           <a:lstStyle/>
           <a:p>
             <a:pPr>
-              <a:defRPr sz="1500" b="1">
-                <a:solidFill>
-                  <a:srgbClr val="06B6D4"/>
-                </a:solidFill>
-              </a:defRPr>
-            </a:pPr>
-            <a:r>
-              <a:t>CORE REST API ENDPOINTS</a:t>
-            </a:r>
-          </a:p>
-          <a:p>
-            <a:br/>
-            <a:pPr>
-              <a:defRPr sz="1200" b="1">
-                <a:solidFill>
-                  <a:srgbClr val="FFFFFF"/>
-                </a:solidFill>
-              </a:defRPr>
-            </a:pPr>
-            <a:r>
-              <a:t>POST /api/v1/documents/process</a:t>
-            </a:r>
-          </a:p>
-          <a:p>
-            <a:pPr>
-              <a:defRPr sz="1050">
-                <a:solidFill>
-                  <a:srgbClr val="94A3B8"/>
-                </a:solidFill>
-              </a:defRPr>
-            </a:pPr>
-            <a:r>
-              <a:t>Multipart file upload accepting PDF, JPG, PNG + document_type. Runs complete validation, OCR, extraction, and validation pipeline.</a:t>
-            </a:r>
-          </a:p>
-          <a:p>
-            <a:br/>
-            <a:pPr>
-              <a:defRPr sz="1200" b="1">
-                <a:solidFill>
-                  <a:srgbClr val="FFFFFF"/>
-                </a:solidFill>
-              </a:defRPr>
-            </a:pPr>
-            <a:r>
-              <a:t>GET /api/v1/documents/{name}</a:t>
-            </a:r>
-          </a:p>
-          <a:p>
-            <a:pPr>
-              <a:defRPr sz="1050">
-                <a:solidFill>
-                  <a:srgbClr val="94A3B8"/>
-                </a:solidFill>
-              </a:defRPr>
-            </a:pPr>
-            <a:r>
-              <a:t>Fetches latest structured JSON extraction and financial validation audits for a given document name.</a:t>
-            </a:r>
-          </a:p>
-          <a:p>
-            <a:br/>
-            <a:pPr>
-              <a:defRPr sz="1200" b="1">
-                <a:solidFill>
-                  <a:srgbClr val="FFFFFF"/>
-                </a:solidFill>
-              </a:defRPr>
-            </a:pPr>
-            <a:r>
-              <a:t>GET /api/v1/documents</a:t>
-            </a:r>
-          </a:p>
-          <a:p>
-            <a:pPr>
-              <a:defRPr sz="1050">
-                <a:solidFill>
-                  <a:srgbClr val="94A3B8"/>
-                </a:solidFill>
-              </a:defRPr>
-            </a:pPr>
-            <a:r>
-              <a:t>Returns index of all processed documents with status, confidence scores, and timestamps for dashboard consumption.</a:t>
-            </a:r>
-          </a:p>
-          <a:p>
-            <a:br/>
-            <a:pPr>
-              <a:defRPr sz="1200" b="1">
-                <a:solidFill>
-                  <a:srgbClr val="FFFFFF"/>
-                </a:solidFill>
-              </a:defRPr>
-            </a:pPr>
-            <a:r>
-              <a:t>GET /api/v1/health</a:t>
-            </a:r>
-          </a:p>
-          <a:p>
-            <a:pPr>
-              <a:defRPr sz="1050">
-                <a:solidFill>
-                  <a:srgbClr val="94A3B8"/>
-                </a:solidFill>
-              </a:defRPr>
-            </a:pPr>
-            <a:r>
-              <a:t>Returns system operational health, version, and platform availability.</a:t>
-            </a:r>
-          </a:p>
-        </p:txBody>
-      </p:sp>
-      <p:sp>
-        <p:nvSpPr>
-          <p:cNvPr id="7" name="Rounded Rectangle 6"/>
+              <a:defRPr sz="1600" b="1">
+                <a:solidFill>
+                  <a:srgbClr val="2563EB"/>
+                </a:solidFill>
+              </a:defRPr>
+            </a:pPr>
+            <a:r>
+              <a:t>Frontend Dashboard</a:t>
+            </a:r>
+          </a:p>
+          <a:p>
+            <a:br/>
+            <a:pPr>
+              <a:defRPr sz="1100">
+                <a:solidFill>
+                  <a:srgbClr val="475569"/>
+                </a:solidFill>
+              </a:defRPr>
+            </a:pPr>
+            <a:r>
+              <a:t>• Document type selection dropdown</a:t>
+            </a:r>
+            <a:br/>
+            <a:r>
+              <a:t>• PDF/JPG/PNG file upload</a:t>
+            </a:r>
+            <a:br/>
+            <a:r>
+              <a:t>• Real-time processing progress bar</a:t>
+            </a:r>
+            <a:br/>
+            <a:r>
+              <a:t>• Dashboard registry with status badges</a:t>
+            </a:r>
+            <a:br/>
+            <a:r>
+              <a:t>• Key-value grid with confidence tags</a:t>
+            </a:r>
+            <a:br/>
+            <a:r>
+              <a:t>• Multi-period financial table views</a:t>
+            </a:r>
+            <a:br/>
+            <a:r>
+              <a:t>• Validation checks breakdown (PASS/FAIL)</a:t>
+            </a:r>
+            <a:br/>
+            <a:r>
+              <a:t>• Missing information highlighting</a:t>
+            </a:r>
+            <a:br/>
+            <a:r>
+              <a:t>• Interactive raw JSON viewer</a:t>
+            </a:r>
+          </a:p>
+        </p:txBody>
+      </p:sp>
+      <p:sp>
+        <p:nvSpPr>
+          <p:cNvPr id="8" name="Rounded Rectangle 7"/>
           <p:cNvSpPr/>
           <p:nvPr/>
         </p:nvSpPr>
         <p:spPr>
           <a:xfrm>
-            <a:off x="6949440" y="1645920"/>
-            <a:ext cx="4480560" cy="4572000"/>
+            <a:off x="4297680" y="1371600"/>
+            <a:ext cx="3383280" cy="4754880"/>
           </a:xfrm>
           <a:prstGeom prst="roundRect">
             <a:avLst/>
           </a:prstGeom>
           <a:solidFill>
-            <a:srgbClr val="1E293B"/>
+            <a:srgbClr val="FFFFFF"/>
           </a:solidFill>
           <a:ln w="12700">
             <a:solidFill>
-              <a:srgbClr val="334155"/>
+              <a:srgbClr val="E2E8F0"/>
             </a:solidFill>
           </a:ln>
         </p:spPr>
@@ -7997,14 +9420,14 @@
       </p:sp>
       <p:sp>
         <p:nvSpPr>
-          <p:cNvPr id="8" name="TextBox 7"/>
+          <p:cNvPr id="9" name="TextBox 8"/>
           <p:cNvSpPr txBox="1"/>
           <p:nvPr/>
         </p:nvSpPr>
         <p:spPr>
           <a:xfrm>
-            <a:off x="7132320" y="1828800"/>
-            <a:ext cx="4114800" cy="4114800"/>
+            <a:off x="4434840" y="1554480"/>
+            <a:ext cx="3108960" cy="4389120"/>
           </a:xfrm>
           <a:prstGeom prst="rect">
             <a:avLst/>
@@ -8018,14 +9441,14 @@
           <a:lstStyle/>
           <a:p>
             <a:pPr>
-              <a:defRPr sz="1500" b="1">
-                <a:solidFill>
-                  <a:srgbClr val="3B82F6"/>
-                </a:solidFill>
-              </a:defRPr>
-            </a:pPr>
-            <a:r>
-              <a:t>WEB DASHBOARD CAPABILITIES</a:t>
+              <a:defRPr sz="1600" b="1">
+                <a:solidFill>
+                  <a:srgbClr val="2563EB"/>
+                </a:solidFill>
+              </a:defRPr>
+            </a:pPr>
+            <a:r>
+              <a:t>Relational Persistence</a:t>
             </a:r>
           </a:p>
           <a:p>
@@ -8033,12 +9456,120 @@
             <a:pPr>
               <a:defRPr sz="1100">
                 <a:solidFill>
-                  <a:srgbClr val="94A3B8"/>
-                </a:solidFill>
-              </a:defRPr>
-            </a:pPr>
-            <a:r>
-              <a:t>✓ Drag-and-Drop File Upload with animated processing feedback</a:t>
+                  <a:srgbClr val="475569"/>
+                </a:solidFill>
+              </a:defRPr>
+            </a:pPr>
+            <a:r>
+              <a:t>• SQLite database via SQLAlchemy ORM</a:t>
+            </a:r>
+            <a:br/>
+            <a:r>
+              <a:t>• Full result_json payload storage</a:t>
+            </a:r>
+            <a:br/>
+            <a:r>
+              <a:t>• Indexed document_name queries</a:t>
+            </a:r>
+            <a:br/>
+            <a:r>
+              <a:t>• Queryable processing_status</a:t>
+            </a:r>
+            <a:br/>
+            <a:r>
+              <a:t>• Queryable overall_confidence</a:t>
+            </a:r>
+            <a:br/>
+            <a:r>
+              <a:t>• Created &amp; updated timestamps</a:t>
+            </a:r>
+            <a:br/>
+            <a:r>
+              <a:t>• Upsert latest-wins re-processing</a:t>
+            </a:r>
+            <a:br/>
+            <a:r>
+              <a:t>• Zero-dependency portability</a:t>
+            </a:r>
+          </a:p>
+        </p:txBody>
+      </p:sp>
+      <p:sp>
+        <p:nvSpPr>
+          <p:cNvPr id="10" name="Rounded Rectangle 9"/>
+          <p:cNvSpPr/>
+          <p:nvPr/>
+        </p:nvSpPr>
+        <p:spPr>
+          <a:xfrm>
+            <a:off x="7863840" y="1371600"/>
+            <a:ext cx="3383280" cy="4754880"/>
+          </a:xfrm>
+          <a:prstGeom prst="roundRect">
+            <a:avLst/>
+          </a:prstGeom>
+          <a:solidFill>
+            <a:srgbClr val="FFFFFF"/>
+          </a:solidFill>
+          <a:ln w="12700">
+            <a:solidFill>
+              <a:srgbClr val="E2E8F0"/>
+            </a:solidFill>
+          </a:ln>
+        </p:spPr>
+        <p:style>
+          <a:lnRef idx="1">
+            <a:schemeClr val="accent1"/>
+          </a:lnRef>
+          <a:fillRef idx="3">
+            <a:schemeClr val="accent1"/>
+          </a:fillRef>
+          <a:effectRef idx="2">
+            <a:schemeClr val="accent1"/>
+          </a:effectRef>
+          <a:fontRef idx="minor">
+            <a:schemeClr val="lt1"/>
+          </a:fontRef>
+        </p:style>
+        <p:txBody>
+          <a:bodyPr rtlCol="0" anchor="ctr"/>
+          <a:lstStyle/>
+          <a:p>
+            <a:pPr algn="ctr"/>
+          </a:p>
+        </p:txBody>
+      </p:sp>
+      <p:sp>
+        <p:nvSpPr>
+          <p:cNvPr id="11" name="TextBox 10"/>
+          <p:cNvSpPr txBox="1"/>
+          <p:nvPr/>
+        </p:nvSpPr>
+        <p:spPr>
+          <a:xfrm>
+            <a:off x="8001000" y="1554480"/>
+            <a:ext cx="3108960" cy="4389120"/>
+          </a:xfrm>
+          <a:prstGeom prst="rect">
+            <a:avLst/>
+          </a:prstGeom>
+          <a:noFill/>
+        </p:spPr>
+        <p:txBody>
+          <a:bodyPr wrap="square">
+            <a:spAutoFit/>
+          </a:bodyPr>
+          <a:lstStyle/>
+          <a:p>
+            <a:pPr>
+              <a:defRPr sz="1600" b="1">
+                <a:solidFill>
+                  <a:srgbClr val="2563EB"/>
+                </a:solidFill>
+              </a:defRPr>
+            </a:pPr>
+            <a:r>
+              <a:t>Deployment &amp; Security</a:t>
             </a:r>
           </a:p>
           <a:p>
@@ -8046,64 +9577,40 @@
             <a:pPr>
               <a:defRPr sz="1100">
                 <a:solidFill>
-                  <a:srgbClr val="94A3B8"/>
-                </a:solidFill>
-              </a:defRPr>
-            </a:pPr>
-            <a:r>
-              <a:t>✓ Document Registry Table showing processing status &amp; confidence badges</a:t>
-            </a:r>
-          </a:p>
-          <a:p>
-            <a:br/>
-            <a:pPr>
-              <a:defRPr sz="1100">
-                <a:solidFill>
-                  <a:srgbClr val="94A3B8"/>
-                </a:solidFill>
-              </a:defRPr>
-            </a:pPr>
-            <a:r>
-              <a:t>✓ Interactive Financial Report with tabular line items and period breakdowns</a:t>
-            </a:r>
-          </a:p>
-          <a:p>
-            <a:br/>
-            <a:pPr>
-              <a:defRPr sz="1100">
-                <a:solidFill>
-                  <a:srgbClr val="94A3B8"/>
-                </a:solidFill>
-              </a:defRPr>
-            </a:pPr>
-            <a:r>
-              <a:t>✓ Financial Validation Audit Panel detailing calculated vs reported values &amp; variances</a:t>
-            </a:r>
-          </a:p>
-          <a:p>
-            <a:br/>
-            <a:pPr>
-              <a:defRPr sz="1100">
-                <a:solidFill>
-                  <a:srgbClr val="94A3B8"/>
-                </a:solidFill>
-              </a:defRPr>
-            </a:pPr>
-            <a:r>
-              <a:t>✓ Interactive Raw JSON Viewer toggle for developer inspection</a:t>
-            </a:r>
-          </a:p>
-          <a:p>
-            <a:br/>
-            <a:pPr>
-              <a:defRPr sz="1100">
-                <a:solidFill>
-                  <a:srgbClr val="94A3B8"/>
-                </a:solidFill>
-              </a:defRPr>
-            </a:pPr>
-            <a:r>
-              <a:t>✓ Direct link to Swagger / OpenAPI UI at /docs</a:t>
+                  <a:srgbClr val="475569"/>
+                </a:solidFill>
+              </a:defRPr>
+            </a:pPr>
+            <a:r>
+              <a:t>• Public frontend &amp; backend URLs</a:t>
+            </a:r>
+            <a:br/>
+            <a:r>
+              <a:t>• Public GitHub repository</a:t>
+            </a:r>
+            <a:br/>
+            <a:r>
+              <a:t>• Interactive Swagger/OpenAPI docs</a:t>
+            </a:r>
+            <a:br/>
+            <a:r>
+              <a:t>• Dedicated /api/v1/health probe</a:t>
+            </a:r>
+            <a:br/>
+            <a:r>
+              <a:t>• Containerized on Render via Docker</a:t>
+            </a:r>
+            <a:br/>
+            <a:r>
+              <a:t>• Secrets in environment variables (.env)</a:t>
+            </a:r>
+            <a:br/>
+            <a:r>
+              <a:t>• .gitignore protects keys &amp; DB</a:t>
+            </a:r>
+            <a:br/>
+            <a:r>
+              <a:t>• Controlled errors (no raw stack traces)</a:t>
             </a:r>
           </a:p>
         </p:txBody>
@@ -8141,7 +9648,7 @@
             <a:avLst/>
           </a:prstGeom>
           <a:solidFill>
-            <a:srgbClr val="0F172A"/>
+            <a:srgbClr val="F8FAFC"/>
           </a:solidFill>
           <a:ln>
             <a:noFill/>
@@ -8177,8 +9684,8 @@
         </p:nvSpPr>
         <p:spPr>
           <a:xfrm>
-            <a:off x="731520" y="457200"/>
-            <a:ext cx="10698480" cy="365760"/>
+            <a:off x="731520" y="365760"/>
+            <a:ext cx="10698480" cy="274320"/>
           </a:xfrm>
           <a:prstGeom prst="rect">
             <a:avLst/>
@@ -8186,20 +9693,20 @@
           <a:noFill/>
         </p:spPr>
         <p:txBody>
-          <a:bodyPr wrap="square">
+          <a:bodyPr wrap="none">
             <a:spAutoFit/>
           </a:bodyPr>
           <a:lstStyle/>
           <a:p>
             <a:pPr>
-              <a:defRPr sz="1100" b="1">
-                <a:solidFill>
-                  <a:srgbClr val="06B6D4"/>
-                </a:solidFill>
-              </a:defRPr>
-            </a:pPr>
-            <a:r>
-              <a:t>AI ENGINEER INTERNSHIP CASE STUDY</a:t>
+              <a:defRPr sz="1000" b="1">
+                <a:solidFill>
+                  <a:srgbClr val="2563EB"/>
+                </a:solidFill>
+              </a:defRPr>
+            </a:pPr>
+            <a:r>
+              <a:t>TESTING &amp; QUALITY</a:t>
             </a:r>
           </a:p>
         </p:txBody>
@@ -8212,8 +9719,8 @@
         </p:nvSpPr>
         <p:spPr>
           <a:xfrm>
-            <a:off x="731520" y="777240"/>
-            <a:ext cx="10698480" cy="731520"/>
+            <a:off x="731520" y="640080"/>
+            <a:ext cx="10698480" cy="548640"/>
           </a:xfrm>
           <a:prstGeom prst="rect">
             <a:avLst/>
@@ -8221,44 +9728,79 @@
           <a:noFill/>
         </p:spPr>
         <p:txBody>
-          <a:bodyPr wrap="square">
+          <a:bodyPr wrap="none">
             <a:spAutoFit/>
           </a:bodyPr>
           <a:lstStyle/>
           <a:p>
             <a:pPr>
-              <a:defRPr sz="2600" b="1">
-                <a:solidFill>
-                  <a:srgbClr val="FFFFFF"/>
-                </a:solidFill>
-              </a:defRPr>
-            </a:pPr>
-            <a:r>
-              <a:t>Quality Assurance &amp; Automated Test Suite</a:t>
-            </a:r>
-          </a:p>
-        </p:txBody>
-      </p:sp>
-      <p:sp>
-        <p:nvSpPr>
-          <p:cNvPr id="5" name="Rounded Rectangle 4"/>
+              <a:defRPr sz="2200" b="1">
+                <a:solidFill>
+                  <a:srgbClr val="0F172A"/>
+                </a:solidFill>
+              </a:defRPr>
+            </a:pPr>
+            <a:r>
+              <a:t>Testing &amp; Engineering Quality</a:t>
+            </a:r>
+          </a:p>
+        </p:txBody>
+      </p:sp>
+      <p:sp>
+        <p:nvSpPr>
+          <p:cNvPr id="5" name="TextBox 4"/>
+          <p:cNvSpPr txBox="1"/>
+          <p:nvPr/>
+        </p:nvSpPr>
+        <p:spPr>
+          <a:xfrm>
+            <a:off x="731520" y="6400800"/>
+            <a:ext cx="10698480" cy="274320"/>
+          </a:xfrm>
+          <a:prstGeom prst="rect">
+            <a:avLst/>
+          </a:prstGeom>
+          <a:noFill/>
+        </p:spPr>
+        <p:txBody>
+          <a:bodyPr wrap="none">
+            <a:spAutoFit/>
+          </a:bodyPr>
+          <a:lstStyle/>
+          <a:p>
+            <a:pPr>
+              <a:defRPr sz="900">
+                <a:solidFill>
+                  <a:srgbClr val="94A3B8"/>
+                </a:solidFill>
+              </a:defRPr>
+            </a:pPr>
+            <a:r>
+              <a:t>Intelligent Document Extraction, Validation &amp; API Platform  |  AI Engineer Internship Technical Case Study</a:t>
+            </a:r>
+          </a:p>
+        </p:txBody>
+      </p:sp>
+      <p:sp>
+        <p:nvSpPr>
+          <p:cNvPr id="6" name="Rounded Rectangle 5"/>
           <p:cNvSpPr/>
           <p:nvPr/>
         </p:nvSpPr>
         <p:spPr>
           <a:xfrm>
-            <a:off x="731520" y="1645920"/>
-            <a:ext cx="3383280" cy="4572000"/>
+            <a:off x="731520" y="1371600"/>
+            <a:ext cx="3383280" cy="4754880"/>
           </a:xfrm>
           <a:prstGeom prst="roundRect">
             <a:avLst/>
           </a:prstGeom>
           <a:solidFill>
-            <a:srgbClr val="1E293B"/>
+            <a:srgbClr val="FFFFFF"/>
           </a:solidFill>
           <a:ln w="12700">
             <a:solidFill>
-              <a:srgbClr val="334155"/>
+              <a:srgbClr val="E2E8F0"/>
             </a:solidFill>
           </a:ln>
         </p:spPr>
@@ -8286,14 +9828,14 @@
       </p:sp>
       <p:sp>
         <p:nvSpPr>
-          <p:cNvPr id="6" name="TextBox 5"/>
+          <p:cNvPr id="7" name="TextBox 6"/>
           <p:cNvSpPr txBox="1"/>
           <p:nvPr/>
         </p:nvSpPr>
         <p:spPr>
           <a:xfrm>
-            <a:off x="914400" y="1828800"/>
-            <a:ext cx="3017520" cy="4114800"/>
+            <a:off x="868680" y="1554480"/>
+            <a:ext cx="3108960" cy="4389120"/>
           </a:xfrm>
           <a:prstGeom prst="rect">
             <a:avLst/>
@@ -8307,83 +9849,71 @@
           <a:lstStyle/>
           <a:p>
             <a:pPr>
-              <a:defRPr sz="1500" b="1">
-                <a:solidFill>
-                  <a:srgbClr val="3B82F6"/>
-                </a:solidFill>
-              </a:defRPr>
-            </a:pPr>
-            <a:r>
-              <a:t>API Integration Tests (9 Tests)</a:t>
-            </a:r>
-          </a:p>
-          <a:p>
-            <a:br/>
-            <a:pPr>
-              <a:defRPr sz="1150">
-                <a:solidFill>
-                  <a:srgbClr val="94A3B8"/>
-                </a:solidFill>
-              </a:defRPr>
-            </a:pPr>
-            <a:r>
-              <a:t>• Health check 200 OK</a:t>
-            </a:r>
-            <a:br/>
-            <a:r>
-              <a:t>• Document listing endpoint</a:t>
-            </a:r>
-            <a:br/>
-            <a:r>
-              <a:t>• Unsupported format rejection (400)</a:t>
-            </a:r>
-            <a:br/>
-            <a:r>
-              <a:t>• Invalid document type rejection (422)</a:t>
-            </a:r>
-            <a:br/>
-            <a:r>
-              <a:t>• Empty file handling</a:t>
-            </a:r>
-            <a:br/>
-            <a:r>
-              <a:t>• Corrupted file graceful failure</a:t>
-            </a:r>
-            <a:br/>
-            <a:r>
-              <a:t>• 404 handling</a:t>
-            </a:r>
-            <a:br/>
-            <a:r>
-              <a:t>• HTML dashboard rendering</a:t>
-            </a:r>
-            <a:br/>
-            <a:r>
-              <a:t>• Document detail view rendering</a:t>
-            </a:r>
-          </a:p>
-        </p:txBody>
-      </p:sp>
-      <p:sp>
-        <p:nvSpPr>
-          <p:cNvPr id="7" name="Rounded Rectangle 6"/>
+              <a:defRPr sz="1600" b="1">
+                <a:solidFill>
+                  <a:srgbClr val="2563EB"/>
+                </a:solidFill>
+              </a:defRPr>
+            </a:pPr>
+            <a:r>
+              <a:t>Document Type Coverage</a:t>
+            </a:r>
+          </a:p>
+          <a:p>
+            <a:br/>
+            <a:pPr>
+              <a:defRPr sz="1100">
+                <a:solidFill>
+                  <a:srgbClr val="475569"/>
+                </a:solidFill>
+              </a:defRPr>
+            </a:pPr>
+            <a:r>
+              <a:t>• Tested Invoice (e.g. batch1-1109.jpg)</a:t>
+            </a:r>
+            <a:br/>
+            <a:r>
+              <a:t>• Tested Balance Sheet (HDFC 2020.pdf)</a:t>
+            </a:r>
+            <a:br/>
+            <a:r>
+              <a:t>• Tested Profit &amp; Loss (HDFC 2017.pdf)</a:t>
+            </a:r>
+            <a:br/>
+            <a:r>
+              <a:t>• Tested Cash Flow Statement (HDFC 2018.pdf)</a:t>
+            </a:r>
+            <a:br/>
+            <a:r>
+              <a:t>• Tested scanned/image-based documents</a:t>
+            </a:r>
+            <a:br/>
+            <a:r>
+              <a:t>• Tested multi-page PDF statements</a:t>
+            </a:r>
+          </a:p>
+        </p:txBody>
+      </p:sp>
+      <p:sp>
+        <p:nvSpPr>
+          <p:cNvPr id="8" name="Rounded Rectangle 7"/>
           <p:cNvSpPr/>
           <p:nvPr/>
         </p:nvSpPr>
         <p:spPr>
           <a:xfrm>
-            <a:off x="4297680" y="1645920"/>
-            <a:ext cx="3383280" cy="4572000"/>
+            <a:off x="4297680" y="1371600"/>
+            <a:ext cx="3383280" cy="4754880"/>
           </a:xfrm>
           <a:prstGeom prst="roundRect">
             <a:avLst/>
           </a:prstGeom>
           <a:solidFill>
-            <a:srgbClr val="1E293B"/>
+            <a:srgbClr val="FFFFFF"/>
           </a:solidFill>
           <a:ln w="12700">
             <a:solidFill>
-              <a:srgbClr val="334155"/>
+              <a:srgbClr val="E2E8F0"/>
             </a:solidFill>
           </a:ln>
         </p:spPr>
@@ -8411,14 +9941,14 @@
       </p:sp>
       <p:sp>
         <p:nvSpPr>
-          <p:cNvPr id="8" name="TextBox 7"/>
+          <p:cNvPr id="9" name="TextBox 8"/>
           <p:cNvSpPr txBox="1"/>
           <p:nvPr/>
         </p:nvSpPr>
         <p:spPr>
           <a:xfrm>
-            <a:off x="4480560" y="1828800"/>
-            <a:ext cx="3017520" cy="4114800"/>
+            <a:off x="4434840" y="1554480"/>
+            <a:ext cx="3108960" cy="4389120"/>
           </a:xfrm>
           <a:prstGeom prst="rect">
             <a:avLst/>
@@ -8432,87 +9962,71 @@
           <a:lstStyle/>
           <a:p>
             <a:pPr>
-              <a:defRPr sz="1500" b="1">
-                <a:solidFill>
-                  <a:srgbClr val="22C55E"/>
-                </a:solidFill>
-              </a:defRPr>
-            </a:pPr>
-            <a:r>
-              <a:t>Financial Validation Tests (13 Tests)</a:t>
-            </a:r>
-          </a:p>
-          <a:p>
-            <a:br/>
-            <a:pPr>
-              <a:defRPr sz="1150">
-                <a:solidFill>
-                  <a:srgbClr val="94A3B8"/>
-                </a:solidFill>
-              </a:defRPr>
-            </a:pPr>
-            <a:r>
-              <a:t>• Invoice line item qty × price</a:t>
-            </a:r>
-            <a:br/>
-            <a:r>
-              <a:t>• Invoice subtotal summation</a:t>
-            </a:r>
-            <a:br/>
-            <a:r>
-              <a:t>• Grand total tax &amp; discount math</a:t>
-            </a:r>
-            <a:br/>
-            <a:r>
-              <a:t>• Cash &amp; change calculation</a:t>
-            </a:r>
-            <a:br/>
-            <a:r>
-              <a:t>• Balance sheet A = L parity</a:t>
-            </a:r>
-            <a:br/>
-            <a:r>
-              <a:t>• Balance sheet schedule sums</a:t>
-            </a:r>
-            <a:br/>
-            <a:r>
-              <a:t>• P&amp;L income &amp; expenditure sums</a:t>
-            </a:r>
-            <a:br/>
-            <a:r>
-              <a:t>• P&amp;L net profit derivation</a:t>
-            </a:r>
-            <a:br/>
-            <a:r>
-              <a:t>• Cash flow sum &amp; reconciliation</a:t>
-            </a:r>
-            <a:br/>
-            <a:r>
-              <a:t>• NOT_APPLICABLE missing fields</a:t>
-            </a:r>
-          </a:p>
-        </p:txBody>
-      </p:sp>
-      <p:sp>
-        <p:nvSpPr>
-          <p:cNvPr id="9" name="Rounded Rectangle 8"/>
+              <a:defRPr sz="1600" b="1">
+                <a:solidFill>
+                  <a:srgbClr val="2563EB"/>
+                </a:solidFill>
+              </a:defRPr>
+            </a:pPr>
+            <a:r>
+              <a:t>Validation &amp; Error Testing</a:t>
+            </a:r>
+          </a:p>
+          <a:p>
+            <a:br/>
+            <a:pPr>
+              <a:defRPr sz="1100">
+                <a:solidFill>
+                  <a:srgbClr val="475569"/>
+                </a:solidFill>
+              </a:defRPr>
+            </a:pPr>
+            <a:r>
+              <a:t>• Tested validation failure (real discrepancy)</a:t>
+            </a:r>
+            <a:br/>
+            <a:r>
+              <a:t>• Tested missing / unreadable fields (null)</a:t>
+            </a:r>
+            <a:br/>
+            <a:r>
+              <a:t>• Tested unsupported extension (400)</a:t>
+            </a:r>
+            <a:br/>
+            <a:r>
+              <a:t>• Tested invalid document_type (422)</a:t>
+            </a:r>
+            <a:br/>
+            <a:r>
+              <a:t>• Tested empty file upload (400)</a:t>
+            </a:r>
+            <a:br/>
+            <a:r>
+              <a:t>• Tested corrupted PDF (graceful FAIL)</a:t>
+            </a:r>
+          </a:p>
+        </p:txBody>
+      </p:sp>
+      <p:sp>
+        <p:nvSpPr>
+          <p:cNvPr id="10" name="Rounded Rectangle 9"/>
           <p:cNvSpPr/>
           <p:nvPr/>
         </p:nvSpPr>
         <p:spPr>
           <a:xfrm>
-            <a:off x="7863840" y="1645920"/>
-            <a:ext cx="3383280" cy="4572000"/>
+            <a:off x="7863840" y="1371600"/>
+            <a:ext cx="3383280" cy="4754880"/>
           </a:xfrm>
           <a:prstGeom prst="roundRect">
             <a:avLst/>
           </a:prstGeom>
           <a:solidFill>
-            <a:srgbClr val="1E293B"/>
+            <a:srgbClr val="FFFFFF"/>
           </a:solidFill>
           <a:ln w="12700">
             <a:solidFill>
-              <a:srgbClr val="334155"/>
+              <a:srgbClr val="E2E8F0"/>
             </a:solidFill>
           </a:ln>
         </p:spPr>
@@ -8540,14 +10054,14 @@
       </p:sp>
       <p:sp>
         <p:nvSpPr>
-          <p:cNvPr id="10" name="TextBox 9"/>
+          <p:cNvPr id="11" name="TextBox 10"/>
           <p:cNvSpPr txBox="1"/>
           <p:nvPr/>
         </p:nvSpPr>
         <p:spPr>
           <a:xfrm>
-            <a:off x="8046720" y="1828800"/>
-            <a:ext cx="3017520" cy="4114800"/>
+            <a:off x="8001000" y="1554480"/>
+            <a:ext cx="3108960" cy="4389120"/>
           </a:xfrm>
           <a:prstGeom prst="rect">
             <a:avLst/>
@@ -8561,47 +10075,47 @@
           <a:lstStyle/>
           <a:p>
             <a:pPr>
-              <a:defRPr sz="1500" b="1">
-                <a:solidFill>
-                  <a:srgbClr val="06B6D4"/>
-                </a:solidFill>
-              </a:defRPr>
-            </a:pPr>
-            <a:r>
-              <a:t>Extraction &amp; Helper Tests (15 Tests)</a:t>
-            </a:r>
-          </a:p>
-          <a:p>
-            <a:br/>
-            <a:pPr>
-              <a:defRPr sz="1150">
-                <a:solidFill>
-                  <a:srgbClr val="94A3B8"/>
-                </a:solidFill>
-              </a:defRPr>
-            </a:pPr>
-            <a:r>
-              <a:t>• safe_float parenthesized negatives e.g. (500) -&gt; -500</a:t>
-            </a:r>
-            <a:br/>
-            <a:r>
-              <a:t>• safe_float comma &amp; string normalization</a:t>
-            </a:r>
-            <a:br/>
-            <a:r>
-              <a:t>• get_field_value scalar &amp; dict retrieval</a:t>
-            </a:r>
-            <a:br/>
-            <a:r>
-              <a:t>• get_nested_value deep object access</a:t>
-            </a:r>
-            <a:br/>
-            <a:r>
-              <a:t>• Edge-case &amp; None handling</a:t>
-            </a:r>
-            <a:br/>
-            <a:r>
-              <a:t>• Robustness against OCR noise</a:t>
+              <a:defRPr sz="1600" b="1">
+                <a:solidFill>
+                  <a:srgbClr val="2563EB"/>
+                </a:solidFill>
+              </a:defRPr>
+            </a:pPr>
+            <a:r>
+              <a:t>Automated Test Suite</a:t>
+            </a:r>
+          </a:p>
+          <a:p>
+            <a:br/>
+            <a:pPr>
+              <a:defRPr sz="1100">
+                <a:solidFill>
+                  <a:srgbClr val="475569"/>
+                </a:solidFill>
+              </a:defRPr>
+            </a:pPr>
+            <a:r>
+              <a:t>• 37 passing unit &amp; integration tests</a:t>
+            </a:r>
+            <a:br/>
+            <a:r>
+              <a:t>• Modular layered architecture</a:t>
+            </a:r>
+            <a:br/>
+            <a:r>
+              <a:t>• Structured application logging</a:t>
+            </a:r>
+            <a:br/>
+            <a:r>
+              <a:t>• Standard HTTP status codes</a:t>
+            </a:r>
+            <a:br/>
+            <a:r>
+              <a:t>• Robust exception isolation</a:t>
+            </a:r>
+            <a:br/>
+            <a:r>
+              <a:t>• No hardcoded extraction outputs</a:t>
             </a:r>
           </a:p>
         </p:txBody>
